--- a/Szoftverfejlesztő- és tesztelő vizsgaremek.pptx
+++ b/Szoftverfejlesztő- és tesztelő vizsgaremek.pptx
@@ -2,7 +2,7 @@
 <file path=ppt/presentation.xml><?xml version="1.0" encoding="utf-8"?>
 <p:presentation xmlns:a="http://schemas.openxmlformats.org/drawingml/2006/main" xmlns:r="http://schemas.openxmlformats.org/officeDocument/2006/relationships" xmlns:p="http://schemas.openxmlformats.org/presentationml/2006/main" saveSubsetFonts="1">
   <p:sldMasterIdLst>
-    <p:sldMasterId id="2147483648" r:id="rId1"/>
+    <p:sldMasterId id="2147483660" r:id="rId1"/>
   </p:sldMasterIdLst>
   <p:sldIdLst>
     <p:sldId id="256" r:id="rId2"/>
@@ -22,9 +22,9 @@
   <p:notesSz cx="6858000" cy="9144000"/>
   <p:defaultTextStyle>
     <a:defPPr>
-      <a:defRPr lang="hu-HU"/>
+      <a:defRPr lang="en-US"/>
     </a:defPPr>
-    <a:lvl1pPr marL="0" algn="l" defTabSz="914400" rtl="0" eaLnBrk="1" latinLnBrk="0" hangingPunct="1">
+    <a:lvl1pPr marL="0" algn="l" defTabSz="457200" rtl="0" eaLnBrk="1" latinLnBrk="0" hangingPunct="1">
       <a:defRPr sz="1800" kern="1200">
         <a:solidFill>
           <a:schemeClr val="tx1"/>
@@ -34,7 +34,7 @@
         <a:cs typeface="+mn-cs"/>
       </a:defRPr>
     </a:lvl1pPr>
-    <a:lvl2pPr marL="457200" algn="l" defTabSz="914400" rtl="0" eaLnBrk="1" latinLnBrk="0" hangingPunct="1">
+    <a:lvl2pPr marL="457200" algn="l" defTabSz="457200" rtl="0" eaLnBrk="1" latinLnBrk="0" hangingPunct="1">
       <a:defRPr sz="1800" kern="1200">
         <a:solidFill>
           <a:schemeClr val="tx1"/>
@@ -44,7 +44,7 @@
         <a:cs typeface="+mn-cs"/>
       </a:defRPr>
     </a:lvl2pPr>
-    <a:lvl3pPr marL="914400" algn="l" defTabSz="914400" rtl="0" eaLnBrk="1" latinLnBrk="0" hangingPunct="1">
+    <a:lvl3pPr marL="914400" algn="l" defTabSz="457200" rtl="0" eaLnBrk="1" latinLnBrk="0" hangingPunct="1">
       <a:defRPr sz="1800" kern="1200">
         <a:solidFill>
           <a:schemeClr val="tx1"/>
@@ -54,7 +54,7 @@
         <a:cs typeface="+mn-cs"/>
       </a:defRPr>
     </a:lvl3pPr>
-    <a:lvl4pPr marL="1371600" algn="l" defTabSz="914400" rtl="0" eaLnBrk="1" latinLnBrk="0" hangingPunct="1">
+    <a:lvl4pPr marL="1371600" algn="l" defTabSz="457200" rtl="0" eaLnBrk="1" latinLnBrk="0" hangingPunct="1">
       <a:defRPr sz="1800" kern="1200">
         <a:solidFill>
           <a:schemeClr val="tx1"/>
@@ -64,7 +64,7 @@
         <a:cs typeface="+mn-cs"/>
       </a:defRPr>
     </a:lvl4pPr>
-    <a:lvl5pPr marL="1828800" algn="l" defTabSz="914400" rtl="0" eaLnBrk="1" latinLnBrk="0" hangingPunct="1">
+    <a:lvl5pPr marL="1828800" algn="l" defTabSz="457200" rtl="0" eaLnBrk="1" latinLnBrk="0" hangingPunct="1">
       <a:defRPr sz="1800" kern="1200">
         <a:solidFill>
           <a:schemeClr val="tx1"/>
@@ -74,7 +74,7 @@
         <a:cs typeface="+mn-cs"/>
       </a:defRPr>
     </a:lvl5pPr>
-    <a:lvl6pPr marL="2286000" algn="l" defTabSz="914400" rtl="0" eaLnBrk="1" latinLnBrk="0" hangingPunct="1">
+    <a:lvl6pPr marL="2286000" algn="l" defTabSz="457200" rtl="0" eaLnBrk="1" latinLnBrk="0" hangingPunct="1">
       <a:defRPr sz="1800" kern="1200">
         <a:solidFill>
           <a:schemeClr val="tx1"/>
@@ -84,7 +84,7 @@
         <a:cs typeface="+mn-cs"/>
       </a:defRPr>
     </a:lvl6pPr>
-    <a:lvl7pPr marL="2743200" algn="l" defTabSz="914400" rtl="0" eaLnBrk="1" latinLnBrk="0" hangingPunct="1">
+    <a:lvl7pPr marL="2743200" algn="l" defTabSz="457200" rtl="0" eaLnBrk="1" latinLnBrk="0" hangingPunct="1">
       <a:defRPr sz="1800" kern="1200">
         <a:solidFill>
           <a:schemeClr val="tx1"/>
@@ -94,7 +94,7 @@
         <a:cs typeface="+mn-cs"/>
       </a:defRPr>
     </a:lvl7pPr>
-    <a:lvl8pPr marL="3200400" algn="l" defTabSz="914400" rtl="0" eaLnBrk="1" latinLnBrk="0" hangingPunct="1">
+    <a:lvl8pPr marL="3200400" algn="l" defTabSz="457200" rtl="0" eaLnBrk="1" latinLnBrk="0" hangingPunct="1">
       <a:defRPr sz="1800" kern="1200">
         <a:solidFill>
           <a:schemeClr val="tx1"/>
@@ -104,7 +104,7 @@
         <a:cs typeface="+mn-cs"/>
       </a:defRPr>
     </a:lvl8pPr>
-    <a:lvl9pPr marL="3657600" algn="l" defTabSz="914400" rtl="0" eaLnBrk="1" latinLnBrk="0" hangingPunct="1">
+    <a:lvl9pPr marL="3657600" algn="l" defTabSz="457200" rtl="0" eaLnBrk="1" latinLnBrk="0" hangingPunct="1">
       <a:defRPr sz="1800" kern="1200">
         <a:solidFill>
           <a:schemeClr val="tx1"/>
@@ -115,12 +115,28 @@
       </a:defRPr>
     </a:lvl9pPr>
   </p:defaultTextStyle>
+  <p:extLst>
+    <p:ext uri="{EFAFB233-063F-42B5-8137-9DF3F51BA10A}">
+      <p15:sldGuideLst xmlns:p15="http://schemas.microsoft.com/office/powerpoint/2012/main">
+        <p15:guide id="1" orient="horz" pos="2160">
+          <p15:clr>
+            <a:srgbClr val="A4A3A4"/>
+          </p15:clr>
+        </p15:guide>
+        <p15:guide id="2" pos="2880">
+          <p15:clr>
+            <a:srgbClr val="A4A3A4"/>
+          </p15:clr>
+        </p15:guide>
+      </p15:sldGuideLst>
+    </p:ext>
+  </p:extLst>
 </p:presentation>
 </file>
 
 <file path=ppt/slideLayouts/slideLayout1.xml><?xml version="1.0" encoding="utf-8"?>
-<p:sldLayout xmlns:a="http://schemas.openxmlformats.org/drawingml/2006/main" xmlns:r="http://schemas.openxmlformats.org/officeDocument/2006/relationships" xmlns:p="http://schemas.openxmlformats.org/presentationml/2006/main" type="title" preserve="1">
-  <p:cSld name="Title Slide">
+<p:sldLayout xmlns:a="http://schemas.openxmlformats.org/drawingml/2006/main" xmlns:r="http://schemas.openxmlformats.org/officeDocument/2006/relationships" xmlns:p="http://schemas.openxmlformats.org/presentationml/2006/main" showMasterSp="0" type="title" preserve="1">
+  <p:cSld name="Címdia">
     <p:spTree>
       <p:nvGrpSpPr>
         <p:cNvPr id="1" name=""/>
@@ -135,6 +151,608 @@
           <a:chExt cx="0" cy="0"/>
         </a:xfrm>
       </p:grpSpPr>
+      <p:grpSp>
+        <p:nvGrpSpPr>
+          <p:cNvPr id="7" name="Group 6"/>
+          <p:cNvGrpSpPr/>
+          <p:nvPr/>
+        </p:nvGrpSpPr>
+        <p:grpSpPr>
+          <a:xfrm>
+            <a:off x="-8466" y="-8468"/>
+            <a:ext cx="9169804" cy="6874935"/>
+            <a:chOff x="-8466" y="-8468"/>
+            <a:chExt cx="9169804" cy="6874935"/>
+          </a:xfrm>
+        </p:grpSpPr>
+        <p:cxnSp>
+          <p:nvCxnSpPr>
+            <p:cNvPr id="17" name="Straight Connector 16"/>
+            <p:cNvCxnSpPr/>
+            <p:nvPr/>
+          </p:nvCxnSpPr>
+          <p:spPr>
+            <a:xfrm flipV="1">
+              <a:off x="5130830" y="4175605"/>
+              <a:ext cx="4022475" cy="2682396"/>
+            </a:xfrm>
+            <a:prstGeom prst="line">
+              <a:avLst/>
+            </a:prstGeom>
+            <a:ln w="9525">
+              <a:solidFill>
+                <a:schemeClr val="bg1">
+                  <a:lumMod val="85000"/>
+                </a:schemeClr>
+              </a:solidFill>
+            </a:ln>
+          </p:spPr>
+          <p:style>
+            <a:lnRef idx="2">
+              <a:schemeClr val="accent1"/>
+            </a:lnRef>
+            <a:fillRef idx="0">
+              <a:schemeClr val="accent1"/>
+            </a:fillRef>
+            <a:effectRef idx="1">
+              <a:schemeClr val="accent1"/>
+            </a:effectRef>
+            <a:fontRef idx="minor">
+              <a:schemeClr val="tx1"/>
+            </a:fontRef>
+          </p:style>
+        </p:cxnSp>
+        <p:cxnSp>
+          <p:nvCxnSpPr>
+            <p:cNvPr id="18" name="Straight Connector 17"/>
+            <p:cNvCxnSpPr/>
+            <p:nvPr/>
+          </p:nvCxnSpPr>
+          <p:spPr>
+            <a:xfrm>
+              <a:off x="7042707" y="0"/>
+              <a:ext cx="1219200" cy="6858000"/>
+            </a:xfrm>
+            <a:prstGeom prst="line">
+              <a:avLst/>
+            </a:prstGeom>
+            <a:ln w="9525">
+              <a:solidFill>
+                <a:schemeClr val="bg1">
+                  <a:lumMod val="75000"/>
+                </a:schemeClr>
+              </a:solidFill>
+            </a:ln>
+          </p:spPr>
+          <p:style>
+            <a:lnRef idx="2">
+              <a:schemeClr val="accent1"/>
+            </a:lnRef>
+            <a:fillRef idx="0">
+              <a:schemeClr val="accent1"/>
+            </a:fillRef>
+            <a:effectRef idx="1">
+              <a:schemeClr val="accent1"/>
+            </a:effectRef>
+            <a:fontRef idx="minor">
+              <a:schemeClr val="tx1"/>
+            </a:fontRef>
+          </p:style>
+        </p:cxnSp>
+        <p:sp>
+          <p:nvSpPr>
+            <p:cNvPr id="19" name="Freeform 18"/>
+            <p:cNvSpPr/>
+            <p:nvPr/>
+          </p:nvSpPr>
+          <p:spPr>
+            <a:xfrm>
+              <a:off x="6891896" y="1"/>
+              <a:ext cx="2269442" cy="6866466"/>
+            </a:xfrm>
+            <a:custGeom>
+              <a:avLst/>
+              <a:gdLst/>
+              <a:ahLst/>
+              <a:cxnLst/>
+              <a:rect l="l" t="t" r="r" b="b"/>
+              <a:pathLst>
+                <a:path w="2269442" h="6866466">
+                  <a:moveTo>
+                    <a:pt x="2023534" y="0"/>
+                  </a:moveTo>
+                  <a:lnTo>
+                    <a:pt x="0" y="6858000"/>
+                  </a:lnTo>
+                  <a:lnTo>
+                    <a:pt x="2269067" y="6866466"/>
+                  </a:lnTo>
+                  <a:cubicBezTo>
+                    <a:pt x="2271889" y="4580466"/>
+                    <a:pt x="2257778" y="2294466"/>
+                    <a:pt x="2260600" y="8466"/>
+                  </a:cubicBezTo>
+                  <a:lnTo>
+                    <a:pt x="2023534" y="0"/>
+                  </a:lnTo>
+                  <a:close/>
+                </a:path>
+              </a:pathLst>
+            </a:custGeom>
+            <a:solidFill>
+              <a:schemeClr val="accent1">
+                <a:alpha val="30000"/>
+              </a:schemeClr>
+            </a:solidFill>
+            <a:ln>
+              <a:noFill/>
+            </a:ln>
+            <a:effectLst/>
+          </p:spPr>
+          <p:style>
+            <a:lnRef idx="1">
+              <a:schemeClr val="accent1"/>
+            </a:lnRef>
+            <a:fillRef idx="3">
+              <a:schemeClr val="accent1"/>
+            </a:fillRef>
+            <a:effectRef idx="2">
+              <a:schemeClr val="accent1"/>
+            </a:effectRef>
+            <a:fontRef idx="minor">
+              <a:schemeClr val="lt1"/>
+            </a:fontRef>
+          </p:style>
+        </p:sp>
+        <p:sp>
+          <p:nvSpPr>
+            <p:cNvPr id="20" name="Freeform 19"/>
+            <p:cNvSpPr/>
+            <p:nvPr/>
+          </p:nvSpPr>
+          <p:spPr>
+            <a:xfrm>
+              <a:off x="7205158" y="-8467"/>
+              <a:ext cx="1948147" cy="6866467"/>
+            </a:xfrm>
+            <a:custGeom>
+              <a:avLst/>
+              <a:gdLst/>
+              <a:ahLst/>
+              <a:cxnLst/>
+              <a:rect l="l" t="t" r="r" b="b"/>
+              <a:pathLst>
+                <a:path w="1948147" h="6866467">
+                  <a:moveTo>
+                    <a:pt x="0" y="0"/>
+                  </a:moveTo>
+                  <a:lnTo>
+                    <a:pt x="1202267" y="6866467"/>
+                  </a:lnTo>
+                  <a:lnTo>
+                    <a:pt x="1947333" y="6866467"/>
+                  </a:lnTo>
+                  <a:cubicBezTo>
+                    <a:pt x="1944511" y="4577645"/>
+                    <a:pt x="1950155" y="2288822"/>
+                    <a:pt x="1947333" y="0"/>
+                  </a:cubicBezTo>
+                  <a:lnTo>
+                    <a:pt x="0" y="0"/>
+                  </a:lnTo>
+                  <a:close/>
+                </a:path>
+              </a:pathLst>
+            </a:custGeom>
+            <a:solidFill>
+              <a:schemeClr val="accent1">
+                <a:alpha val="20000"/>
+              </a:schemeClr>
+            </a:solidFill>
+            <a:ln>
+              <a:noFill/>
+            </a:ln>
+            <a:effectLst/>
+          </p:spPr>
+          <p:style>
+            <a:lnRef idx="1">
+              <a:schemeClr val="accent1"/>
+            </a:lnRef>
+            <a:fillRef idx="3">
+              <a:schemeClr val="accent1"/>
+            </a:fillRef>
+            <a:effectRef idx="2">
+              <a:schemeClr val="accent1"/>
+            </a:effectRef>
+            <a:fontRef idx="minor">
+              <a:schemeClr val="lt1"/>
+            </a:fontRef>
+          </p:style>
+        </p:sp>
+        <p:sp>
+          <p:nvSpPr>
+            <p:cNvPr id="21" name="Freeform 20"/>
+            <p:cNvSpPr/>
+            <p:nvPr/>
+          </p:nvSpPr>
+          <p:spPr>
+            <a:xfrm>
+              <a:off x="6637896" y="3920066"/>
+              <a:ext cx="2513565" cy="2937933"/>
+            </a:xfrm>
+            <a:custGeom>
+              <a:avLst/>
+              <a:gdLst/>
+              <a:ahLst/>
+              <a:cxnLst/>
+              <a:rect l="l" t="t" r="r" b="b"/>
+              <a:pathLst>
+                <a:path w="3259667" h="3810000">
+                  <a:moveTo>
+                    <a:pt x="0" y="3810000"/>
+                  </a:moveTo>
+                  <a:lnTo>
+                    <a:pt x="3251200" y="0"/>
+                  </a:lnTo>
+                  <a:cubicBezTo>
+                    <a:pt x="3254022" y="1270000"/>
+                    <a:pt x="3256845" y="2540000"/>
+                    <a:pt x="3259667" y="3810000"/>
+                  </a:cubicBezTo>
+                  <a:lnTo>
+                    <a:pt x="0" y="3810000"/>
+                  </a:lnTo>
+                  <a:close/>
+                </a:path>
+              </a:pathLst>
+            </a:custGeom>
+            <a:solidFill>
+              <a:schemeClr val="accent2">
+                <a:alpha val="72000"/>
+              </a:schemeClr>
+            </a:solidFill>
+            <a:ln>
+              <a:noFill/>
+            </a:ln>
+            <a:effectLst/>
+          </p:spPr>
+          <p:style>
+            <a:lnRef idx="1">
+              <a:schemeClr val="accent1"/>
+            </a:lnRef>
+            <a:fillRef idx="3">
+              <a:schemeClr val="accent1"/>
+            </a:fillRef>
+            <a:effectRef idx="2">
+              <a:schemeClr val="accent1"/>
+            </a:effectRef>
+            <a:fontRef idx="minor">
+              <a:schemeClr val="lt1"/>
+            </a:fontRef>
+          </p:style>
+        </p:sp>
+        <p:sp>
+          <p:nvSpPr>
+            <p:cNvPr id="22" name="Freeform 21"/>
+            <p:cNvSpPr/>
+            <p:nvPr/>
+          </p:nvSpPr>
+          <p:spPr>
+            <a:xfrm>
+              <a:off x="7010429" y="-8467"/>
+              <a:ext cx="2142876" cy="6866467"/>
+            </a:xfrm>
+            <a:custGeom>
+              <a:avLst/>
+              <a:gdLst/>
+              <a:ahLst/>
+              <a:cxnLst/>
+              <a:rect l="l" t="t" r="r" b="b"/>
+              <a:pathLst>
+                <a:path w="2853267" h="6866467">
+                  <a:moveTo>
+                    <a:pt x="0" y="0"/>
+                  </a:moveTo>
+                  <a:lnTo>
+                    <a:pt x="2472267" y="6866467"/>
+                  </a:lnTo>
+                  <a:lnTo>
+                    <a:pt x="2853267" y="6858000"/>
+                  </a:lnTo>
+                  <a:lnTo>
+                    <a:pt x="2853267" y="0"/>
+                  </a:lnTo>
+                  <a:lnTo>
+                    <a:pt x="0" y="0"/>
+                  </a:lnTo>
+                  <a:close/>
+                </a:path>
+              </a:pathLst>
+            </a:custGeom>
+            <a:solidFill>
+              <a:schemeClr val="accent2">
+                <a:lumMod val="75000"/>
+                <a:alpha val="70000"/>
+              </a:schemeClr>
+            </a:solidFill>
+            <a:ln>
+              <a:noFill/>
+            </a:ln>
+            <a:effectLst/>
+          </p:spPr>
+          <p:style>
+            <a:lnRef idx="1">
+              <a:schemeClr val="accent1"/>
+            </a:lnRef>
+            <a:fillRef idx="3">
+              <a:schemeClr val="accent1"/>
+            </a:fillRef>
+            <a:effectRef idx="2">
+              <a:schemeClr val="accent1"/>
+            </a:effectRef>
+            <a:fontRef idx="minor">
+              <a:schemeClr val="lt1"/>
+            </a:fontRef>
+          </p:style>
+        </p:sp>
+        <p:sp>
+          <p:nvSpPr>
+            <p:cNvPr id="23" name="Freeform 22"/>
+            <p:cNvSpPr/>
+            <p:nvPr/>
+          </p:nvSpPr>
+          <p:spPr>
+            <a:xfrm>
+              <a:off x="8295776" y="-8467"/>
+              <a:ext cx="857530" cy="6866467"/>
+            </a:xfrm>
+            <a:custGeom>
+              <a:avLst/>
+              <a:gdLst/>
+              <a:ahLst/>
+              <a:cxnLst/>
+              <a:rect l="l" t="t" r="r" b="b"/>
+              <a:pathLst>
+                <a:path w="1286933" h="6866467">
+                  <a:moveTo>
+                    <a:pt x="1016000" y="0"/>
+                  </a:moveTo>
+                  <a:lnTo>
+                    <a:pt x="0" y="6866467"/>
+                  </a:lnTo>
+                  <a:lnTo>
+                    <a:pt x="1286933" y="6866467"/>
+                  </a:lnTo>
+                  <a:cubicBezTo>
+                    <a:pt x="1284111" y="4577645"/>
+                    <a:pt x="1281288" y="2288822"/>
+                    <a:pt x="1278466" y="0"/>
+                  </a:cubicBezTo>
+                  <a:lnTo>
+                    <a:pt x="1016000" y="0"/>
+                  </a:lnTo>
+                  <a:close/>
+                </a:path>
+              </a:pathLst>
+            </a:custGeom>
+            <a:solidFill>
+              <a:schemeClr val="accent1">
+                <a:lumMod val="60000"/>
+                <a:lumOff val="40000"/>
+                <a:alpha val="70000"/>
+              </a:schemeClr>
+            </a:solidFill>
+            <a:ln>
+              <a:noFill/>
+            </a:ln>
+            <a:effectLst/>
+          </p:spPr>
+          <p:style>
+            <a:lnRef idx="1">
+              <a:schemeClr val="accent1"/>
+            </a:lnRef>
+            <a:fillRef idx="3">
+              <a:schemeClr val="accent1"/>
+            </a:fillRef>
+            <a:effectRef idx="2">
+              <a:schemeClr val="accent1"/>
+            </a:effectRef>
+            <a:fontRef idx="minor">
+              <a:schemeClr val="lt1"/>
+            </a:fontRef>
+          </p:style>
+        </p:sp>
+        <p:sp>
+          <p:nvSpPr>
+            <p:cNvPr id="24" name="Freeform 23"/>
+            <p:cNvSpPr/>
+            <p:nvPr/>
+          </p:nvSpPr>
+          <p:spPr>
+            <a:xfrm>
+              <a:off x="8077231" y="-8468"/>
+              <a:ext cx="1066770" cy="6866467"/>
+            </a:xfrm>
+            <a:custGeom>
+              <a:avLst/>
+              <a:gdLst/>
+              <a:ahLst/>
+              <a:cxnLst/>
+              <a:rect l="l" t="t" r="r" b="b"/>
+              <a:pathLst>
+                <a:path w="1270244" h="6866467">
+                  <a:moveTo>
+                    <a:pt x="0" y="0"/>
+                  </a:moveTo>
+                  <a:lnTo>
+                    <a:pt x="1117600" y="6866467"/>
+                  </a:lnTo>
+                  <a:lnTo>
+                    <a:pt x="1270000" y="6866467"/>
+                  </a:lnTo>
+                  <a:cubicBezTo>
+                    <a:pt x="1272822" y="4574822"/>
+                    <a:pt x="1250245" y="2291645"/>
+                    <a:pt x="1253067" y="0"/>
+                  </a:cubicBezTo>
+                  <a:lnTo>
+                    <a:pt x="0" y="0"/>
+                  </a:lnTo>
+                  <a:close/>
+                </a:path>
+              </a:pathLst>
+            </a:custGeom>
+            <a:solidFill>
+              <a:schemeClr val="accent1">
+                <a:alpha val="65000"/>
+              </a:schemeClr>
+            </a:solidFill>
+            <a:ln>
+              <a:noFill/>
+            </a:ln>
+            <a:effectLst/>
+          </p:spPr>
+          <p:style>
+            <a:lnRef idx="1">
+              <a:schemeClr val="accent1"/>
+            </a:lnRef>
+            <a:fillRef idx="3">
+              <a:schemeClr val="accent1"/>
+            </a:fillRef>
+            <a:effectRef idx="2">
+              <a:schemeClr val="accent1"/>
+            </a:effectRef>
+            <a:fontRef idx="minor">
+              <a:schemeClr val="lt1"/>
+            </a:fontRef>
+          </p:style>
+        </p:sp>
+        <p:sp>
+          <p:nvSpPr>
+            <p:cNvPr id="25" name="Freeform 24"/>
+            <p:cNvSpPr/>
+            <p:nvPr/>
+          </p:nvSpPr>
+          <p:spPr>
+            <a:xfrm>
+              <a:off x="8060297" y="4893733"/>
+              <a:ext cx="1094086" cy="1964267"/>
+            </a:xfrm>
+            <a:custGeom>
+              <a:avLst/>
+              <a:gdLst/>
+              <a:ahLst/>
+              <a:cxnLst/>
+              <a:rect l="l" t="t" r="r" b="b"/>
+              <a:pathLst>
+                <a:path w="1820333" h="3268133">
+                  <a:moveTo>
+                    <a:pt x="0" y="3268133"/>
+                  </a:moveTo>
+                  <a:lnTo>
+                    <a:pt x="1811866" y="0"/>
+                  </a:lnTo>
+                  <a:cubicBezTo>
+                    <a:pt x="1814688" y="1086555"/>
+                    <a:pt x="1817511" y="2173111"/>
+                    <a:pt x="1820333" y="3259666"/>
+                  </a:cubicBezTo>
+                  <a:lnTo>
+                    <a:pt x="0" y="3268133"/>
+                  </a:lnTo>
+                  <a:close/>
+                </a:path>
+              </a:pathLst>
+            </a:custGeom>
+            <a:solidFill>
+              <a:schemeClr val="accent1">
+                <a:alpha val="80000"/>
+              </a:schemeClr>
+            </a:solidFill>
+            <a:ln>
+              <a:noFill/>
+            </a:ln>
+            <a:effectLst/>
+          </p:spPr>
+          <p:style>
+            <a:lnRef idx="1">
+              <a:schemeClr val="accent1"/>
+            </a:lnRef>
+            <a:fillRef idx="3">
+              <a:schemeClr val="accent1"/>
+            </a:fillRef>
+            <a:effectRef idx="2">
+              <a:schemeClr val="accent1"/>
+            </a:effectRef>
+            <a:fontRef idx="minor">
+              <a:schemeClr val="lt1"/>
+            </a:fontRef>
+          </p:style>
+        </p:sp>
+        <p:sp>
+          <p:nvSpPr>
+            <p:cNvPr id="28" name="Freeform 27"/>
+            <p:cNvSpPr/>
+            <p:nvPr/>
+          </p:nvSpPr>
+          <p:spPr>
+            <a:xfrm>
+              <a:off x="-8466" y="-8468"/>
+              <a:ext cx="863600" cy="5698067"/>
+            </a:xfrm>
+            <a:custGeom>
+              <a:avLst/>
+              <a:gdLst/>
+              <a:ahLst/>
+              <a:cxnLst/>
+              <a:rect l="l" t="t" r="r" b="b"/>
+              <a:pathLst>
+                <a:path w="863600" h="5698067">
+                  <a:moveTo>
+                    <a:pt x="0" y="8467"/>
+                  </a:moveTo>
+                  <a:lnTo>
+                    <a:pt x="863600" y="0"/>
+                  </a:lnTo>
+                  <a:lnTo>
+                    <a:pt x="863600" y="16934"/>
+                  </a:lnTo>
+                  <a:lnTo>
+                    <a:pt x="0" y="5698067"/>
+                  </a:lnTo>
+                  <a:lnTo>
+                    <a:pt x="0" y="8467"/>
+                  </a:lnTo>
+                  <a:close/>
+                </a:path>
+              </a:pathLst>
+            </a:custGeom>
+            <a:solidFill>
+              <a:schemeClr val="accent1">
+                <a:alpha val="85000"/>
+              </a:schemeClr>
+            </a:solidFill>
+            <a:ln>
+              <a:noFill/>
+            </a:ln>
+            <a:effectLst/>
+          </p:spPr>
+          <p:style>
+            <a:lnRef idx="1">
+              <a:schemeClr val="accent1"/>
+            </a:lnRef>
+            <a:fillRef idx="3">
+              <a:schemeClr val="accent1"/>
+            </a:fillRef>
+            <a:effectRef idx="2">
+              <a:schemeClr val="accent1"/>
+            </a:effectRef>
+            <a:fontRef idx="minor">
+              <a:schemeClr val="lt1"/>
+            </a:fontRef>
+          </p:style>
+        </p:sp>
+      </p:grpSp>
       <p:sp>
         <p:nvSpPr>
           <p:cNvPr id="2" name="Title 1"/>
@@ -147,19 +765,29 @@
         </p:nvSpPr>
         <p:spPr>
           <a:xfrm>
-            <a:off x="685800" y="2130425"/>
-            <a:ext cx="7772400" cy="1470025"/>
+            <a:off x="1130595" y="2404534"/>
+            <a:ext cx="5826719" cy="1646302"/>
           </a:xfrm>
         </p:spPr>
         <p:txBody>
-          <a:bodyPr/>
-          <a:lstStyle/>
-          <a:p>
-            <a:r>
-              <a:rPr lang="en-US" smtClean="0"/>
-              <a:t>Click to edit Master title style</a:t>
-            </a:r>
-            <a:endParaRPr lang="hu-HU"/>
+          <a:bodyPr anchor="b">
+            <a:noAutofit/>
+          </a:bodyPr>
+          <a:lstStyle>
+            <a:lvl1pPr algn="r">
+              <a:defRPr sz="5400">
+                <a:solidFill>
+                  <a:schemeClr val="accent1"/>
+                </a:solidFill>
+              </a:defRPr>
+            </a:lvl1pPr>
+          </a:lstStyle>
+          <a:p>
+            <a:r>
+              <a:rPr lang="hu-HU"/>
+              <a:t>Mintacím szerkesztése</a:t>
+            </a:r>
+            <a:endParaRPr lang="en-US" dirty="0"/>
           </a:p>
         </p:txBody>
       </p:sp>
@@ -175,19 +803,20 @@
         </p:nvSpPr>
         <p:spPr>
           <a:xfrm>
-            <a:off x="1371600" y="3886200"/>
-            <a:ext cx="6400800" cy="1752600"/>
+            <a:off x="1130595" y="4050834"/>
+            <a:ext cx="5826719" cy="1096899"/>
           </a:xfrm>
         </p:spPr>
         <p:txBody>
-          <a:bodyPr/>
+          <a:bodyPr anchor="t"/>
           <a:lstStyle>
-            <a:lvl1pPr marL="0" indent="0" algn="ctr">
+            <a:lvl1pPr marL="0" indent="0" algn="r">
               <a:buNone/>
               <a:defRPr>
                 <a:solidFill>
                   <a:schemeClr val="tx1">
-                    <a:tint val="75000"/>
+                    <a:lumMod val="50000"/>
+                    <a:lumOff val="50000"/>
                   </a:schemeClr>
                 </a:solidFill>
               </a:defRPr>
@@ -275,10 +904,10 @@
           </a:lstStyle>
           <a:p>
             <a:r>
-              <a:rPr lang="en-US" smtClean="0"/>
-              <a:t>Click to edit Master subtitle style</a:t>
-            </a:r>
-            <a:endParaRPr lang="hu-HU"/>
+              <a:rPr lang="hu-HU"/>
+              <a:t>Kattintson ide az alcím mintájának szerkesztéséhez</a:t>
+            </a:r>
+            <a:endParaRPr lang="en-US" dirty="0"/>
           </a:p>
         </p:txBody>
       </p:sp>
@@ -300,7 +929,7 @@
             <a:fld id="{7E1B2A62-5D5B-40FD-A574-BFE5DD367BE5}" type="datetimeFigureOut">
               <a:rPr lang="hu-HU" smtClean="0"/>
               <a:pPr/>
-              <a:t>2026. 04. 16.</a:t>
+              <a:t>2026. 04. 21.</a:t>
             </a:fld>
             <a:endParaRPr lang="hu-HU"/>
           </a:p>
@@ -350,6 +979,11 @@
         </p:txBody>
       </p:sp>
     </p:spTree>
+    <p:extLst>
+      <p:ext uri="{BB962C8B-B14F-4D97-AF65-F5344CB8AC3E}">
+        <p14:creationId xmlns:p14="http://schemas.microsoft.com/office/powerpoint/2010/main" val="2652331471"/>
+      </p:ext>
+    </p:extLst>
   </p:cSld>
   <p:clrMapOvr>
     <a:masterClrMapping/>
@@ -358,8 +992,8 @@
 </file>
 
 <file path=ppt/slideLayouts/slideLayout10.xml><?xml version="1.0" encoding="utf-8"?>
-<p:sldLayout xmlns:a="http://schemas.openxmlformats.org/drawingml/2006/main" xmlns:r="http://schemas.openxmlformats.org/officeDocument/2006/relationships" xmlns:p="http://schemas.openxmlformats.org/presentationml/2006/main" type="vertTx" preserve="1">
-  <p:cSld name="Title and Vertical Text">
+<p:sldLayout xmlns:a="http://schemas.openxmlformats.org/drawingml/2006/main" xmlns:r="http://schemas.openxmlformats.org/officeDocument/2006/relationships" xmlns:p="http://schemas.openxmlformats.org/presentationml/2006/main" preserve="1">
+  <p:cSld name="Cím és képaláírás">
     <p:spTree>
       <p:nvGrpSpPr>
         <p:cNvPr id="1" name=""/>
@@ -384,68 +1018,149 @@
             <p:ph type="title"/>
           </p:nvPr>
         </p:nvSpPr>
-        <p:spPr/>
-        <p:txBody>
-          <a:bodyPr/>
-          <a:lstStyle/>
-          <a:p>
-            <a:r>
-              <a:rPr lang="en-US" smtClean="0"/>
-              <a:t>Click to edit Master title style</a:t>
-            </a:r>
-            <a:endParaRPr lang="hu-HU"/>
-          </a:p>
-        </p:txBody>
-      </p:sp>
-      <p:sp>
-        <p:nvSpPr>
-          <p:cNvPr id="3" name="Vertical Text Placeholder 2"/>
-          <p:cNvSpPr>
-            <a:spLocks noGrp="1"/>
-          </p:cNvSpPr>
-          <p:nvPr>
-            <p:ph type="body" orient="vert" idx="1"/>
-          </p:nvPr>
-        </p:nvSpPr>
-        <p:spPr/>
-        <p:txBody>
-          <a:bodyPr vert="eaVert"/>
-          <a:lstStyle/>
+        <p:spPr>
+          <a:xfrm>
+            <a:off x="609600" y="609600"/>
+            <a:ext cx="6347714" cy="3403600"/>
+          </a:xfrm>
+        </p:spPr>
+        <p:txBody>
+          <a:bodyPr anchor="ctr">
+            <a:normAutofit/>
+          </a:bodyPr>
+          <a:lstStyle>
+            <a:lvl1pPr algn="l">
+              <a:defRPr sz="4400" b="0" cap="none"/>
+            </a:lvl1pPr>
+          </a:lstStyle>
+          <a:p>
+            <a:r>
+              <a:rPr lang="hu-HU"/>
+              <a:t>Mintacím szerkesztése</a:t>
+            </a:r>
+            <a:endParaRPr lang="en-US" dirty="0"/>
+          </a:p>
+        </p:txBody>
+      </p:sp>
+      <p:sp>
+        <p:nvSpPr>
+          <p:cNvPr id="3" name="Text Placeholder 2"/>
+          <p:cNvSpPr>
+            <a:spLocks noGrp="1"/>
+          </p:cNvSpPr>
+          <p:nvPr>
+            <p:ph type="body" idx="1"/>
+          </p:nvPr>
+        </p:nvSpPr>
+        <p:spPr>
+          <a:xfrm>
+            <a:off x="609600" y="4470400"/>
+            <a:ext cx="6347714" cy="1570962"/>
+          </a:xfrm>
+        </p:spPr>
+        <p:txBody>
+          <a:bodyPr anchor="ctr">
+            <a:normAutofit/>
+          </a:bodyPr>
+          <a:lstStyle>
+            <a:lvl1pPr marL="0" indent="0" algn="l">
+              <a:buNone/>
+              <a:defRPr sz="1800">
+                <a:solidFill>
+                  <a:schemeClr val="tx1">
+                    <a:lumMod val="75000"/>
+                    <a:lumOff val="25000"/>
+                  </a:schemeClr>
+                </a:solidFill>
+              </a:defRPr>
+            </a:lvl1pPr>
+            <a:lvl2pPr marL="457200" indent="0">
+              <a:buNone/>
+              <a:defRPr sz="1800">
+                <a:solidFill>
+                  <a:schemeClr val="tx1">
+                    <a:tint val="75000"/>
+                  </a:schemeClr>
+                </a:solidFill>
+              </a:defRPr>
+            </a:lvl2pPr>
+            <a:lvl3pPr marL="914400" indent="0">
+              <a:buNone/>
+              <a:defRPr sz="1600">
+                <a:solidFill>
+                  <a:schemeClr val="tx1">
+                    <a:tint val="75000"/>
+                  </a:schemeClr>
+                </a:solidFill>
+              </a:defRPr>
+            </a:lvl3pPr>
+            <a:lvl4pPr marL="1371600" indent="0">
+              <a:buNone/>
+              <a:defRPr sz="1400">
+                <a:solidFill>
+                  <a:schemeClr val="tx1">
+                    <a:tint val="75000"/>
+                  </a:schemeClr>
+                </a:solidFill>
+              </a:defRPr>
+            </a:lvl4pPr>
+            <a:lvl5pPr marL="1828800" indent="0">
+              <a:buNone/>
+              <a:defRPr sz="1400">
+                <a:solidFill>
+                  <a:schemeClr val="tx1">
+                    <a:tint val="75000"/>
+                  </a:schemeClr>
+                </a:solidFill>
+              </a:defRPr>
+            </a:lvl5pPr>
+            <a:lvl6pPr marL="2286000" indent="0">
+              <a:buNone/>
+              <a:defRPr sz="1400">
+                <a:solidFill>
+                  <a:schemeClr val="tx1">
+                    <a:tint val="75000"/>
+                  </a:schemeClr>
+                </a:solidFill>
+              </a:defRPr>
+            </a:lvl6pPr>
+            <a:lvl7pPr marL="2743200" indent="0">
+              <a:buNone/>
+              <a:defRPr sz="1400">
+                <a:solidFill>
+                  <a:schemeClr val="tx1">
+                    <a:tint val="75000"/>
+                  </a:schemeClr>
+                </a:solidFill>
+              </a:defRPr>
+            </a:lvl7pPr>
+            <a:lvl8pPr marL="3200400" indent="0">
+              <a:buNone/>
+              <a:defRPr sz="1400">
+                <a:solidFill>
+                  <a:schemeClr val="tx1">
+                    <a:tint val="75000"/>
+                  </a:schemeClr>
+                </a:solidFill>
+              </a:defRPr>
+            </a:lvl8pPr>
+            <a:lvl9pPr marL="3657600" indent="0">
+              <a:buNone/>
+              <a:defRPr sz="1400">
+                <a:solidFill>
+                  <a:schemeClr val="tx1">
+                    <a:tint val="75000"/>
+                  </a:schemeClr>
+                </a:solidFill>
+              </a:defRPr>
+            </a:lvl9pPr>
+          </a:lstStyle>
           <a:p>
             <a:pPr lvl="0"/>
             <a:r>
-              <a:rPr lang="en-US" smtClean="0"/>
-              <a:t>Click to edit Master text styles</a:t>
-            </a:r>
-          </a:p>
-          <a:p>
-            <a:pPr lvl="1"/>
-            <a:r>
-              <a:rPr lang="en-US" smtClean="0"/>
-              <a:t>Second level</a:t>
-            </a:r>
-          </a:p>
-          <a:p>
-            <a:pPr lvl="2"/>
-            <a:r>
-              <a:rPr lang="en-US" smtClean="0"/>
-              <a:t>Third level</a:t>
-            </a:r>
-          </a:p>
-          <a:p>
-            <a:pPr lvl="3"/>
-            <a:r>
-              <a:rPr lang="en-US" smtClean="0"/>
-              <a:t>Fourth level</a:t>
-            </a:r>
-          </a:p>
-          <a:p>
-            <a:pPr lvl="4"/>
-            <a:r>
-              <a:rPr lang="en-US" smtClean="0"/>
-              <a:t>Fifth level</a:t>
-            </a:r>
-            <a:endParaRPr lang="hu-HU"/>
+              <a:rPr lang="hu-HU"/>
+              <a:t>Mintaszöveg szerkesztése</a:t>
+            </a:r>
           </a:p>
         </p:txBody>
       </p:sp>
@@ -467,7 +1182,7 @@
             <a:fld id="{7E1B2A62-5D5B-40FD-A574-BFE5DD367BE5}" type="datetimeFigureOut">
               <a:rPr lang="hu-HU" smtClean="0"/>
               <a:pPr/>
-              <a:t>2026. 04. 16.</a:t>
+              <a:t>2026. 04. 21.</a:t>
             </a:fld>
             <a:endParaRPr lang="hu-HU"/>
           </a:p>
@@ -517,6 +1232,11 @@
         </p:txBody>
       </p:sp>
     </p:spTree>
+    <p:extLst>
+      <p:ext uri="{BB962C8B-B14F-4D97-AF65-F5344CB8AC3E}">
+        <p14:creationId xmlns:p14="http://schemas.microsoft.com/office/powerpoint/2010/main" val="2554071393"/>
+      </p:ext>
+    </p:extLst>
   </p:cSld>
   <p:clrMapOvr>
     <a:masterClrMapping/>
@@ -525,8 +1245,8 @@
 </file>
 
 <file path=ppt/slideLayouts/slideLayout11.xml><?xml version="1.0" encoding="utf-8"?>
-<p:sldLayout xmlns:a="http://schemas.openxmlformats.org/drawingml/2006/main" xmlns:r="http://schemas.openxmlformats.org/officeDocument/2006/relationships" xmlns:p="http://schemas.openxmlformats.org/presentationml/2006/main" type="vertTitleAndTx" preserve="1">
-  <p:cSld name="Vertical Title and Text">
+<p:sldLayout xmlns:a="http://schemas.openxmlformats.org/drawingml/2006/main" xmlns:r="http://schemas.openxmlformats.org/officeDocument/2006/relationships" xmlns:p="http://schemas.openxmlformats.org/presentationml/2006/main" preserve="1">
+  <p:cSld name="Idézet képaláírással">
     <p:spTree>
       <p:nvGrpSpPr>
         <p:cNvPr id="1" name=""/>
@@ -543,86 +1263,220 @@
       </p:grpSpPr>
       <p:sp>
         <p:nvSpPr>
-          <p:cNvPr id="2" name="Vertical Title 1"/>
-          <p:cNvSpPr>
-            <a:spLocks noGrp="1"/>
-          </p:cNvSpPr>
-          <p:nvPr>
-            <p:ph type="title" orient="vert"/>
+          <p:cNvPr id="2" name="Title 1"/>
+          <p:cNvSpPr>
+            <a:spLocks noGrp="1"/>
+          </p:cNvSpPr>
+          <p:nvPr>
+            <p:ph type="title"/>
           </p:nvPr>
         </p:nvSpPr>
         <p:spPr>
           <a:xfrm>
-            <a:off x="6629400" y="274638"/>
-            <a:ext cx="2057400" cy="5851525"/>
+            <a:off x="774885" y="609600"/>
+            <a:ext cx="6072182" cy="3022600"/>
           </a:xfrm>
         </p:spPr>
         <p:txBody>
-          <a:bodyPr vert="eaVert"/>
-          <a:lstStyle/>
-          <a:p>
-            <a:r>
-              <a:rPr lang="en-US" smtClean="0"/>
-              <a:t>Click to edit Master title style</a:t>
-            </a:r>
-            <a:endParaRPr lang="hu-HU"/>
-          </a:p>
-        </p:txBody>
-      </p:sp>
-      <p:sp>
-        <p:nvSpPr>
-          <p:cNvPr id="3" name="Vertical Text Placeholder 2"/>
-          <p:cNvSpPr>
-            <a:spLocks noGrp="1"/>
-          </p:cNvSpPr>
-          <p:nvPr>
-            <p:ph type="body" orient="vert" idx="1"/>
+          <a:bodyPr anchor="ctr">
+            <a:normAutofit/>
+          </a:bodyPr>
+          <a:lstStyle>
+            <a:lvl1pPr algn="l">
+              <a:defRPr sz="4400" b="0" cap="none"/>
+            </a:lvl1pPr>
+          </a:lstStyle>
+          <a:p>
+            <a:r>
+              <a:rPr lang="hu-HU"/>
+              <a:t>Mintacím szerkesztése</a:t>
+            </a:r>
+            <a:endParaRPr lang="en-US" dirty="0"/>
+          </a:p>
+        </p:txBody>
+      </p:sp>
+      <p:sp>
+        <p:nvSpPr>
+          <p:cNvPr id="23" name="Text Placeholder 9"/>
+          <p:cNvSpPr>
+            <a:spLocks noGrp="1"/>
+          </p:cNvSpPr>
+          <p:nvPr>
+            <p:ph type="body" sz="quarter" idx="13"/>
           </p:nvPr>
         </p:nvSpPr>
         <p:spPr>
           <a:xfrm>
-            <a:off x="457200" y="274638"/>
-            <a:ext cx="6019800" cy="5851525"/>
+            <a:off x="1101074" y="3632200"/>
+            <a:ext cx="5419804" cy="381000"/>
           </a:xfrm>
         </p:spPr>
         <p:txBody>
-          <a:bodyPr vert="eaVert"/>
-          <a:lstStyle/>
+          <a:bodyPr anchor="ctr">
+            <a:noAutofit/>
+          </a:bodyPr>
+          <a:lstStyle>
+            <a:lvl1pPr marL="0" indent="0">
+              <a:buFontTx/>
+              <a:buNone/>
+              <a:defRPr sz="1600">
+                <a:solidFill>
+                  <a:schemeClr val="tx1">
+                    <a:lumMod val="50000"/>
+                    <a:lumOff val="50000"/>
+                  </a:schemeClr>
+                </a:solidFill>
+              </a:defRPr>
+            </a:lvl1pPr>
+            <a:lvl2pPr marL="457200" indent="0">
+              <a:buFontTx/>
+              <a:buNone/>
+              <a:defRPr/>
+            </a:lvl2pPr>
+            <a:lvl3pPr marL="914400" indent="0">
+              <a:buFontTx/>
+              <a:buNone/>
+              <a:defRPr/>
+            </a:lvl3pPr>
+            <a:lvl4pPr marL="1371600" indent="0">
+              <a:buFontTx/>
+              <a:buNone/>
+              <a:defRPr/>
+            </a:lvl4pPr>
+            <a:lvl5pPr marL="1828800" indent="0">
+              <a:buFontTx/>
+              <a:buNone/>
+              <a:defRPr/>
+            </a:lvl5pPr>
+          </a:lstStyle>
           <a:p>
             <a:pPr lvl="0"/>
             <a:r>
-              <a:rPr lang="en-US" smtClean="0"/>
-              <a:t>Click to edit Master text styles</a:t>
-            </a:r>
-          </a:p>
-          <a:p>
-            <a:pPr lvl="1"/>
-            <a:r>
-              <a:rPr lang="en-US" smtClean="0"/>
-              <a:t>Second level</a:t>
-            </a:r>
-          </a:p>
-          <a:p>
-            <a:pPr lvl="2"/>
-            <a:r>
-              <a:rPr lang="en-US" smtClean="0"/>
-              <a:t>Third level</a:t>
-            </a:r>
-          </a:p>
-          <a:p>
-            <a:pPr lvl="3"/>
-            <a:r>
-              <a:rPr lang="en-US" smtClean="0"/>
-              <a:t>Fourth level</a:t>
-            </a:r>
-          </a:p>
-          <a:p>
-            <a:pPr lvl="4"/>
-            <a:r>
-              <a:rPr lang="en-US" smtClean="0"/>
-              <a:t>Fifth level</a:t>
-            </a:r>
-            <a:endParaRPr lang="hu-HU"/>
+              <a:rPr lang="hu-HU"/>
+              <a:t>Mintaszöveg szerkesztése</a:t>
+            </a:r>
+          </a:p>
+        </p:txBody>
+      </p:sp>
+      <p:sp>
+        <p:nvSpPr>
+          <p:cNvPr id="3" name="Text Placeholder 2"/>
+          <p:cNvSpPr>
+            <a:spLocks noGrp="1"/>
+          </p:cNvSpPr>
+          <p:nvPr>
+            <p:ph type="body" idx="1"/>
+          </p:nvPr>
+        </p:nvSpPr>
+        <p:spPr>
+          <a:xfrm>
+            <a:off x="609598" y="4470400"/>
+            <a:ext cx="6347715" cy="1570962"/>
+          </a:xfrm>
+        </p:spPr>
+        <p:txBody>
+          <a:bodyPr anchor="ctr">
+            <a:normAutofit/>
+          </a:bodyPr>
+          <a:lstStyle>
+            <a:lvl1pPr marL="0" indent="0" algn="l">
+              <a:buNone/>
+              <a:defRPr sz="1800">
+                <a:solidFill>
+                  <a:schemeClr val="tx1">
+                    <a:lumMod val="75000"/>
+                    <a:lumOff val="25000"/>
+                  </a:schemeClr>
+                </a:solidFill>
+              </a:defRPr>
+            </a:lvl1pPr>
+            <a:lvl2pPr marL="457200" indent="0">
+              <a:buNone/>
+              <a:defRPr sz="1800">
+                <a:solidFill>
+                  <a:schemeClr val="tx1">
+                    <a:tint val="75000"/>
+                  </a:schemeClr>
+                </a:solidFill>
+              </a:defRPr>
+            </a:lvl2pPr>
+            <a:lvl3pPr marL="914400" indent="0">
+              <a:buNone/>
+              <a:defRPr sz="1600">
+                <a:solidFill>
+                  <a:schemeClr val="tx1">
+                    <a:tint val="75000"/>
+                  </a:schemeClr>
+                </a:solidFill>
+              </a:defRPr>
+            </a:lvl3pPr>
+            <a:lvl4pPr marL="1371600" indent="0">
+              <a:buNone/>
+              <a:defRPr sz="1400">
+                <a:solidFill>
+                  <a:schemeClr val="tx1">
+                    <a:tint val="75000"/>
+                  </a:schemeClr>
+                </a:solidFill>
+              </a:defRPr>
+            </a:lvl4pPr>
+            <a:lvl5pPr marL="1828800" indent="0">
+              <a:buNone/>
+              <a:defRPr sz="1400">
+                <a:solidFill>
+                  <a:schemeClr val="tx1">
+                    <a:tint val="75000"/>
+                  </a:schemeClr>
+                </a:solidFill>
+              </a:defRPr>
+            </a:lvl5pPr>
+            <a:lvl6pPr marL="2286000" indent="0">
+              <a:buNone/>
+              <a:defRPr sz="1400">
+                <a:solidFill>
+                  <a:schemeClr val="tx1">
+                    <a:tint val="75000"/>
+                  </a:schemeClr>
+                </a:solidFill>
+              </a:defRPr>
+            </a:lvl6pPr>
+            <a:lvl7pPr marL="2743200" indent="0">
+              <a:buNone/>
+              <a:defRPr sz="1400">
+                <a:solidFill>
+                  <a:schemeClr val="tx1">
+                    <a:tint val="75000"/>
+                  </a:schemeClr>
+                </a:solidFill>
+              </a:defRPr>
+            </a:lvl7pPr>
+            <a:lvl8pPr marL="3200400" indent="0">
+              <a:buNone/>
+              <a:defRPr sz="1400">
+                <a:solidFill>
+                  <a:schemeClr val="tx1">
+                    <a:tint val="75000"/>
+                  </a:schemeClr>
+                </a:solidFill>
+              </a:defRPr>
+            </a:lvl8pPr>
+            <a:lvl9pPr marL="3657600" indent="0">
+              <a:buNone/>
+              <a:defRPr sz="1400">
+                <a:solidFill>
+                  <a:schemeClr val="tx1">
+                    <a:tint val="75000"/>
+                  </a:schemeClr>
+                </a:solidFill>
+              </a:defRPr>
+            </a:lvl9pPr>
+          </a:lstStyle>
+          <a:p>
+            <a:pPr lvl="0"/>
+            <a:r>
+              <a:rPr lang="hu-HU"/>
+              <a:t>Mintaszöveg szerkesztése</a:t>
+            </a:r>
           </a:p>
         </p:txBody>
       </p:sp>
@@ -644,7 +1498,7 @@
             <a:fld id="{7E1B2A62-5D5B-40FD-A574-BFE5DD367BE5}" type="datetimeFigureOut">
               <a:rPr lang="hu-HU" smtClean="0"/>
               <a:pPr/>
-              <a:t>2026. 04. 16.</a:t>
+              <a:t>2026. 04. 21.</a:t>
             </a:fld>
             <a:endParaRPr lang="hu-HU"/>
           </a:p>
@@ -693,7 +1547,94 @@
           </a:p>
         </p:txBody>
       </p:sp>
+      <p:sp>
+        <p:nvSpPr>
+          <p:cNvPr id="24" name="TextBox 23"/>
+          <p:cNvSpPr txBox="1"/>
+          <p:nvPr/>
+        </p:nvSpPr>
+        <p:spPr>
+          <a:xfrm>
+            <a:off x="482711" y="790378"/>
+            <a:ext cx="457319" cy="584776"/>
+          </a:xfrm>
+          <a:prstGeom prst="rect">
+            <a:avLst/>
+          </a:prstGeom>
+        </p:spPr>
+        <p:txBody>
+          <a:bodyPr vert="horz" lIns="91440" tIns="45720" rIns="91440" bIns="45720" rtlCol="0" anchor="ctr">
+            <a:noAutofit/>
+          </a:bodyPr>
+          <a:lstStyle/>
+          <a:p>
+            <a:pPr lvl="0"/>
+            <a:r>
+              <a:rPr lang="en-US" sz="8000" baseline="0" dirty="0">
+                <a:ln w="3175" cmpd="sng">
+                  <a:noFill/>
+                </a:ln>
+                <a:solidFill>
+                  <a:schemeClr val="accent1">
+                    <a:lumMod val="60000"/>
+                    <a:lumOff val="40000"/>
+                  </a:schemeClr>
+                </a:solidFill>
+                <a:effectLst/>
+                <a:latin typeface="Arial"/>
+              </a:rPr>
+              <a:t>“</a:t>
+            </a:r>
+          </a:p>
+        </p:txBody>
+      </p:sp>
+      <p:sp>
+        <p:nvSpPr>
+          <p:cNvPr id="25" name="TextBox 24"/>
+          <p:cNvSpPr txBox="1"/>
+          <p:nvPr/>
+        </p:nvSpPr>
+        <p:spPr>
+          <a:xfrm>
+            <a:off x="6747699" y="2886556"/>
+            <a:ext cx="457319" cy="584776"/>
+          </a:xfrm>
+          <a:prstGeom prst="rect">
+            <a:avLst/>
+          </a:prstGeom>
+        </p:spPr>
+        <p:txBody>
+          <a:bodyPr vert="horz" lIns="91440" tIns="45720" rIns="91440" bIns="45720" rtlCol="0" anchor="ctr">
+            <a:noAutofit/>
+          </a:bodyPr>
+          <a:lstStyle/>
+          <a:p>
+            <a:pPr lvl="0"/>
+            <a:r>
+              <a:rPr lang="en-US" sz="8000" baseline="0" dirty="0">
+                <a:ln w="3175" cmpd="sng">
+                  <a:noFill/>
+                </a:ln>
+                <a:solidFill>
+                  <a:schemeClr val="accent1">
+                    <a:lumMod val="60000"/>
+                    <a:lumOff val="40000"/>
+                  </a:schemeClr>
+                </a:solidFill>
+                <a:effectLst/>
+                <a:latin typeface="Arial"/>
+              </a:rPr>
+              <a:t>”</a:t>
+            </a:r>
+          </a:p>
+        </p:txBody>
+      </p:sp>
     </p:spTree>
+    <p:extLst>
+      <p:ext uri="{BB962C8B-B14F-4D97-AF65-F5344CB8AC3E}">
+        <p14:creationId xmlns:p14="http://schemas.microsoft.com/office/powerpoint/2010/main" val="1754991079"/>
+      </p:ext>
+    </p:extLst>
   </p:cSld>
   <p:clrMapOvr>
     <a:masterClrMapping/>
@@ -701,9 +1642,9 @@
 </p:sldLayout>
 </file>
 
-<file path=ppt/slideLayouts/slideLayout2.xml><?xml version="1.0" encoding="utf-8"?>
-<p:sldLayout xmlns:a="http://schemas.openxmlformats.org/drawingml/2006/main" xmlns:r="http://schemas.openxmlformats.org/officeDocument/2006/relationships" xmlns:p="http://schemas.openxmlformats.org/presentationml/2006/main" type="obj" preserve="1">
-  <p:cSld name="Title and Content">
+<file path=ppt/slideLayouts/slideLayout12.xml><?xml version="1.0" encoding="utf-8"?>
+<p:sldLayout xmlns:a="http://schemas.openxmlformats.org/drawingml/2006/main" xmlns:r="http://schemas.openxmlformats.org/officeDocument/2006/relationships" xmlns:p="http://schemas.openxmlformats.org/presentationml/2006/main" preserve="1">
+  <p:cSld name="Névkártya">
     <p:spTree>
       <p:nvGrpSpPr>
         <p:cNvPr id="1" name=""/>
@@ -728,68 +1669,149 @@
             <p:ph type="title"/>
           </p:nvPr>
         </p:nvSpPr>
-        <p:spPr/>
-        <p:txBody>
-          <a:bodyPr/>
-          <a:lstStyle/>
-          <a:p>
-            <a:r>
-              <a:rPr lang="en-US" smtClean="0"/>
-              <a:t>Click to edit Master title style</a:t>
-            </a:r>
-            <a:endParaRPr lang="hu-HU"/>
-          </a:p>
-        </p:txBody>
-      </p:sp>
-      <p:sp>
-        <p:nvSpPr>
-          <p:cNvPr id="3" name="Content Placeholder 2"/>
-          <p:cNvSpPr>
-            <a:spLocks noGrp="1"/>
-          </p:cNvSpPr>
-          <p:nvPr>
-            <p:ph idx="1"/>
-          </p:nvPr>
-        </p:nvSpPr>
-        <p:spPr/>
-        <p:txBody>
-          <a:bodyPr/>
-          <a:lstStyle/>
+        <p:spPr>
+          <a:xfrm>
+            <a:off x="609598" y="1931988"/>
+            <a:ext cx="6347715" cy="2595460"/>
+          </a:xfrm>
+        </p:spPr>
+        <p:txBody>
+          <a:bodyPr anchor="b">
+            <a:normAutofit/>
+          </a:bodyPr>
+          <a:lstStyle>
+            <a:lvl1pPr algn="l">
+              <a:defRPr sz="4400" b="0" cap="none"/>
+            </a:lvl1pPr>
+          </a:lstStyle>
+          <a:p>
+            <a:r>
+              <a:rPr lang="hu-HU"/>
+              <a:t>Mintacím szerkesztése</a:t>
+            </a:r>
+            <a:endParaRPr lang="en-US" dirty="0"/>
+          </a:p>
+        </p:txBody>
+      </p:sp>
+      <p:sp>
+        <p:nvSpPr>
+          <p:cNvPr id="3" name="Text Placeholder 2"/>
+          <p:cNvSpPr>
+            <a:spLocks noGrp="1"/>
+          </p:cNvSpPr>
+          <p:nvPr>
+            <p:ph type="body" idx="1"/>
+          </p:nvPr>
+        </p:nvSpPr>
+        <p:spPr>
+          <a:xfrm>
+            <a:off x="609598" y="4527448"/>
+            <a:ext cx="6347715" cy="1513914"/>
+          </a:xfrm>
+        </p:spPr>
+        <p:txBody>
+          <a:bodyPr anchor="t">
+            <a:normAutofit/>
+          </a:bodyPr>
+          <a:lstStyle>
+            <a:lvl1pPr marL="0" indent="0" algn="l">
+              <a:buNone/>
+              <a:defRPr sz="1800">
+                <a:solidFill>
+                  <a:schemeClr val="tx1">
+                    <a:lumMod val="75000"/>
+                    <a:lumOff val="25000"/>
+                  </a:schemeClr>
+                </a:solidFill>
+              </a:defRPr>
+            </a:lvl1pPr>
+            <a:lvl2pPr marL="457200" indent="0">
+              <a:buNone/>
+              <a:defRPr sz="1800">
+                <a:solidFill>
+                  <a:schemeClr val="tx1">
+                    <a:tint val="75000"/>
+                  </a:schemeClr>
+                </a:solidFill>
+              </a:defRPr>
+            </a:lvl2pPr>
+            <a:lvl3pPr marL="914400" indent="0">
+              <a:buNone/>
+              <a:defRPr sz="1600">
+                <a:solidFill>
+                  <a:schemeClr val="tx1">
+                    <a:tint val="75000"/>
+                  </a:schemeClr>
+                </a:solidFill>
+              </a:defRPr>
+            </a:lvl3pPr>
+            <a:lvl4pPr marL="1371600" indent="0">
+              <a:buNone/>
+              <a:defRPr sz="1400">
+                <a:solidFill>
+                  <a:schemeClr val="tx1">
+                    <a:tint val="75000"/>
+                  </a:schemeClr>
+                </a:solidFill>
+              </a:defRPr>
+            </a:lvl4pPr>
+            <a:lvl5pPr marL="1828800" indent="0">
+              <a:buNone/>
+              <a:defRPr sz="1400">
+                <a:solidFill>
+                  <a:schemeClr val="tx1">
+                    <a:tint val="75000"/>
+                  </a:schemeClr>
+                </a:solidFill>
+              </a:defRPr>
+            </a:lvl5pPr>
+            <a:lvl6pPr marL="2286000" indent="0">
+              <a:buNone/>
+              <a:defRPr sz="1400">
+                <a:solidFill>
+                  <a:schemeClr val="tx1">
+                    <a:tint val="75000"/>
+                  </a:schemeClr>
+                </a:solidFill>
+              </a:defRPr>
+            </a:lvl6pPr>
+            <a:lvl7pPr marL="2743200" indent="0">
+              <a:buNone/>
+              <a:defRPr sz="1400">
+                <a:solidFill>
+                  <a:schemeClr val="tx1">
+                    <a:tint val="75000"/>
+                  </a:schemeClr>
+                </a:solidFill>
+              </a:defRPr>
+            </a:lvl7pPr>
+            <a:lvl8pPr marL="3200400" indent="0">
+              <a:buNone/>
+              <a:defRPr sz="1400">
+                <a:solidFill>
+                  <a:schemeClr val="tx1">
+                    <a:tint val="75000"/>
+                  </a:schemeClr>
+                </a:solidFill>
+              </a:defRPr>
+            </a:lvl8pPr>
+            <a:lvl9pPr marL="3657600" indent="0">
+              <a:buNone/>
+              <a:defRPr sz="1400">
+                <a:solidFill>
+                  <a:schemeClr val="tx1">
+                    <a:tint val="75000"/>
+                  </a:schemeClr>
+                </a:solidFill>
+              </a:defRPr>
+            </a:lvl9pPr>
+          </a:lstStyle>
           <a:p>
             <a:pPr lvl="0"/>
             <a:r>
-              <a:rPr lang="en-US" smtClean="0"/>
-              <a:t>Click to edit Master text styles</a:t>
-            </a:r>
-          </a:p>
-          <a:p>
-            <a:pPr lvl="1"/>
-            <a:r>
-              <a:rPr lang="en-US" smtClean="0"/>
-              <a:t>Second level</a:t>
-            </a:r>
-          </a:p>
-          <a:p>
-            <a:pPr lvl="2"/>
-            <a:r>
-              <a:rPr lang="en-US" smtClean="0"/>
-              <a:t>Third level</a:t>
-            </a:r>
-          </a:p>
-          <a:p>
-            <a:pPr lvl="3"/>
-            <a:r>
-              <a:rPr lang="en-US" smtClean="0"/>
-              <a:t>Fourth level</a:t>
-            </a:r>
-          </a:p>
-          <a:p>
-            <a:pPr lvl="4"/>
-            <a:r>
-              <a:rPr lang="en-US" smtClean="0"/>
-              <a:t>Fifth level</a:t>
-            </a:r>
-            <a:endParaRPr lang="hu-HU"/>
+              <a:rPr lang="hu-HU"/>
+              <a:t>Mintaszöveg szerkesztése</a:t>
+            </a:r>
           </a:p>
         </p:txBody>
       </p:sp>
@@ -811,7 +1833,7 @@
             <a:fld id="{7E1B2A62-5D5B-40FD-A574-BFE5DD367BE5}" type="datetimeFigureOut">
               <a:rPr lang="hu-HU" smtClean="0"/>
               <a:pPr/>
-              <a:t>2026. 04. 16.</a:t>
+              <a:t>2026. 04. 21.</a:t>
             </a:fld>
             <a:endParaRPr lang="hu-HU"/>
           </a:p>
@@ -861,6 +1883,11 @@
         </p:txBody>
       </p:sp>
     </p:spTree>
+    <p:extLst>
+      <p:ext uri="{BB962C8B-B14F-4D97-AF65-F5344CB8AC3E}">
+        <p14:creationId xmlns:p14="http://schemas.microsoft.com/office/powerpoint/2010/main" val="857741157"/>
+      </p:ext>
+    </p:extLst>
   </p:cSld>
   <p:clrMapOvr>
     <a:masterClrMapping/>
@@ -868,9 +1895,9 @@
 </p:sldLayout>
 </file>
 
-<file path=ppt/slideLayouts/slideLayout3.xml><?xml version="1.0" encoding="utf-8"?>
-<p:sldLayout xmlns:a="http://schemas.openxmlformats.org/drawingml/2006/main" xmlns:r="http://schemas.openxmlformats.org/officeDocument/2006/relationships" xmlns:p="http://schemas.openxmlformats.org/presentationml/2006/main" type="secHead" preserve="1">
-  <p:cSld name="Section Header">
+<file path=ppt/slideLayouts/slideLayout13.xml><?xml version="1.0" encoding="utf-8"?>
+<p:sldLayout xmlns:a="http://schemas.openxmlformats.org/drawingml/2006/main" xmlns:r="http://schemas.openxmlformats.org/officeDocument/2006/relationships" xmlns:p="http://schemas.openxmlformats.org/presentationml/2006/main" preserve="1">
+  <p:cSld name="Névkártya idézettel">
     <p:spTree>
       <p:nvGrpSpPr>
         <p:cNvPr id="1" name=""/>
@@ -897,51 +1924,119 @@
         </p:nvSpPr>
         <p:spPr>
           <a:xfrm>
-            <a:off x="722313" y="4406900"/>
-            <a:ext cx="7772400" cy="1362075"/>
+            <a:off x="774885" y="609600"/>
+            <a:ext cx="6072182" cy="3022600"/>
           </a:xfrm>
         </p:spPr>
         <p:txBody>
-          <a:bodyPr anchor="t"/>
+          <a:bodyPr anchor="ctr">
+            <a:normAutofit/>
+          </a:bodyPr>
           <a:lstStyle>
             <a:lvl1pPr algn="l">
-              <a:defRPr sz="4000" b="1" cap="all"/>
+              <a:defRPr sz="4400" b="0" cap="none"/>
             </a:lvl1pPr>
           </a:lstStyle>
           <a:p>
             <a:r>
-              <a:rPr lang="en-US" smtClean="0"/>
-              <a:t>Click to edit Master title style</a:t>
-            </a:r>
-            <a:endParaRPr lang="hu-HU"/>
-          </a:p>
-        </p:txBody>
-      </p:sp>
-      <p:sp>
-        <p:nvSpPr>
-          <p:cNvPr id="3" name="Text Placeholder 2"/>
-          <p:cNvSpPr>
-            <a:spLocks noGrp="1"/>
-          </p:cNvSpPr>
-          <p:nvPr>
-            <p:ph type="body" idx="1"/>
+              <a:rPr lang="hu-HU"/>
+              <a:t>Mintacím szerkesztése</a:t>
+            </a:r>
+            <a:endParaRPr lang="en-US" dirty="0"/>
+          </a:p>
+        </p:txBody>
+      </p:sp>
+      <p:sp>
+        <p:nvSpPr>
+          <p:cNvPr id="23" name="Text Placeholder 9"/>
+          <p:cNvSpPr>
+            <a:spLocks noGrp="1"/>
+          </p:cNvSpPr>
+          <p:nvPr>
+            <p:ph type="body" sz="quarter" idx="13"/>
           </p:nvPr>
         </p:nvSpPr>
         <p:spPr>
           <a:xfrm>
-            <a:off x="722313" y="2906713"/>
-            <a:ext cx="7772400" cy="1500187"/>
+            <a:off x="609597" y="4013200"/>
+            <a:ext cx="6347716" cy="514248"/>
           </a:xfrm>
         </p:spPr>
         <p:txBody>
-          <a:bodyPr anchor="b"/>
+          <a:bodyPr anchor="b">
+            <a:noAutofit/>
+          </a:bodyPr>
           <a:lstStyle>
             <a:lvl1pPr marL="0" indent="0">
-              <a:buNone/>
-              <a:defRPr sz="2000">
+              <a:buFontTx/>
+              <a:buNone/>
+              <a:defRPr sz="2400">
                 <a:solidFill>
                   <a:schemeClr val="tx1">
-                    <a:tint val="75000"/>
+                    <a:lumMod val="75000"/>
+                    <a:lumOff val="25000"/>
+                  </a:schemeClr>
+                </a:solidFill>
+              </a:defRPr>
+            </a:lvl1pPr>
+            <a:lvl2pPr marL="457200" indent="0">
+              <a:buFontTx/>
+              <a:buNone/>
+              <a:defRPr/>
+            </a:lvl2pPr>
+            <a:lvl3pPr marL="914400" indent="0">
+              <a:buFontTx/>
+              <a:buNone/>
+              <a:defRPr/>
+            </a:lvl3pPr>
+            <a:lvl4pPr marL="1371600" indent="0">
+              <a:buFontTx/>
+              <a:buNone/>
+              <a:defRPr/>
+            </a:lvl4pPr>
+            <a:lvl5pPr marL="1828800" indent="0">
+              <a:buFontTx/>
+              <a:buNone/>
+              <a:defRPr/>
+            </a:lvl5pPr>
+          </a:lstStyle>
+          <a:p>
+            <a:pPr lvl="0"/>
+            <a:r>
+              <a:rPr lang="hu-HU"/>
+              <a:t>Mintaszöveg szerkesztése</a:t>
+            </a:r>
+          </a:p>
+        </p:txBody>
+      </p:sp>
+      <p:sp>
+        <p:nvSpPr>
+          <p:cNvPr id="3" name="Text Placeholder 2"/>
+          <p:cNvSpPr>
+            <a:spLocks noGrp="1"/>
+          </p:cNvSpPr>
+          <p:nvPr>
+            <p:ph type="body" idx="1"/>
+          </p:nvPr>
+        </p:nvSpPr>
+        <p:spPr>
+          <a:xfrm>
+            <a:off x="609598" y="4527448"/>
+            <a:ext cx="6347715" cy="1513914"/>
+          </a:xfrm>
+        </p:spPr>
+        <p:txBody>
+          <a:bodyPr anchor="t">
+            <a:normAutofit/>
+          </a:bodyPr>
+          <a:lstStyle>
+            <a:lvl1pPr marL="0" indent="0" algn="l">
+              <a:buNone/>
+              <a:defRPr sz="1800">
+                <a:solidFill>
+                  <a:schemeClr val="tx1">
+                    <a:lumMod val="50000"/>
+                    <a:lumOff val="50000"/>
                   </a:schemeClr>
                 </a:solidFill>
               </a:defRPr>
@@ -1030,8 +2125,8 @@
           <a:p>
             <a:pPr lvl="0"/>
             <a:r>
-              <a:rPr lang="en-US" smtClean="0"/>
-              <a:t>Click to edit Master text styles</a:t>
+              <a:rPr lang="hu-HU"/>
+              <a:t>Mintaszöveg szerkesztése</a:t>
             </a:r>
           </a:p>
         </p:txBody>
@@ -1054,7 +2149,7 @@
             <a:fld id="{7E1B2A62-5D5B-40FD-A574-BFE5DD367BE5}" type="datetimeFigureOut">
               <a:rPr lang="hu-HU" smtClean="0"/>
               <a:pPr/>
-              <a:t>2026. 04. 16.</a:t>
+              <a:t>2026. 04. 21.</a:t>
             </a:fld>
             <a:endParaRPr lang="hu-HU"/>
           </a:p>
@@ -1103,7 +2198,94 @@
           </a:p>
         </p:txBody>
       </p:sp>
+      <p:sp>
+        <p:nvSpPr>
+          <p:cNvPr id="24" name="TextBox 23"/>
+          <p:cNvSpPr txBox="1"/>
+          <p:nvPr/>
+        </p:nvSpPr>
+        <p:spPr>
+          <a:xfrm>
+            <a:off x="482711" y="790378"/>
+            <a:ext cx="457319" cy="584776"/>
+          </a:xfrm>
+          <a:prstGeom prst="rect">
+            <a:avLst/>
+          </a:prstGeom>
+        </p:spPr>
+        <p:txBody>
+          <a:bodyPr vert="horz" lIns="91440" tIns="45720" rIns="91440" bIns="45720" rtlCol="0" anchor="ctr">
+            <a:noAutofit/>
+          </a:bodyPr>
+          <a:lstStyle/>
+          <a:p>
+            <a:pPr lvl="0"/>
+            <a:r>
+              <a:rPr lang="en-US" sz="8000" baseline="0" dirty="0">
+                <a:ln w="3175" cmpd="sng">
+                  <a:noFill/>
+                </a:ln>
+                <a:solidFill>
+                  <a:schemeClr val="accent1">
+                    <a:lumMod val="60000"/>
+                    <a:lumOff val="40000"/>
+                  </a:schemeClr>
+                </a:solidFill>
+                <a:effectLst/>
+                <a:latin typeface="Arial"/>
+              </a:rPr>
+              <a:t>“</a:t>
+            </a:r>
+          </a:p>
+        </p:txBody>
+      </p:sp>
+      <p:sp>
+        <p:nvSpPr>
+          <p:cNvPr id="25" name="TextBox 24"/>
+          <p:cNvSpPr txBox="1"/>
+          <p:nvPr/>
+        </p:nvSpPr>
+        <p:spPr>
+          <a:xfrm>
+            <a:off x="6747699" y="2886556"/>
+            <a:ext cx="457319" cy="584776"/>
+          </a:xfrm>
+          <a:prstGeom prst="rect">
+            <a:avLst/>
+          </a:prstGeom>
+        </p:spPr>
+        <p:txBody>
+          <a:bodyPr vert="horz" lIns="91440" tIns="45720" rIns="91440" bIns="45720" rtlCol="0" anchor="ctr">
+            <a:noAutofit/>
+          </a:bodyPr>
+          <a:lstStyle/>
+          <a:p>
+            <a:pPr lvl="0"/>
+            <a:r>
+              <a:rPr lang="en-US" sz="8000" baseline="0" dirty="0">
+                <a:ln w="3175" cmpd="sng">
+                  <a:noFill/>
+                </a:ln>
+                <a:solidFill>
+                  <a:schemeClr val="accent1">
+                    <a:lumMod val="60000"/>
+                    <a:lumOff val="40000"/>
+                  </a:schemeClr>
+                </a:solidFill>
+                <a:effectLst/>
+                <a:latin typeface="Arial"/>
+              </a:rPr>
+              <a:t>”</a:t>
+            </a:r>
+          </a:p>
+        </p:txBody>
+      </p:sp>
     </p:spTree>
+    <p:extLst>
+      <p:ext uri="{BB962C8B-B14F-4D97-AF65-F5344CB8AC3E}">
+        <p14:creationId xmlns:p14="http://schemas.microsoft.com/office/powerpoint/2010/main" val="1341717093"/>
+      </p:ext>
+    </p:extLst>
   </p:cSld>
   <p:clrMapOvr>
     <a:masterClrMapping/>
@@ -1111,9 +2293,9 @@
 </p:sldLayout>
 </file>
 
-<file path=ppt/slideLayouts/slideLayout4.xml><?xml version="1.0" encoding="utf-8"?>
-<p:sldLayout xmlns:a="http://schemas.openxmlformats.org/drawingml/2006/main" xmlns:r="http://schemas.openxmlformats.org/officeDocument/2006/relationships" xmlns:p="http://schemas.openxmlformats.org/presentationml/2006/main" type="twoObj" preserve="1">
-  <p:cSld name="Two Content">
+<file path=ppt/slideLayouts/slideLayout14.xml><?xml version="1.0" encoding="utf-8"?>
+<p:sldLayout xmlns:a="http://schemas.openxmlformats.org/drawingml/2006/main" xmlns:r="http://schemas.openxmlformats.org/officeDocument/2006/relationships" xmlns:p="http://schemas.openxmlformats.org/presentationml/2006/main" preserve="1">
+  <p:cSld name="Igaz vagy hamis">
     <p:spTree>
       <p:nvGrpSpPr>
         <p:cNvPr id="1" name=""/>
@@ -1138,192 +2320,215 @@
             <p:ph type="title"/>
           </p:nvPr>
         </p:nvSpPr>
-        <p:spPr/>
-        <p:txBody>
-          <a:bodyPr/>
-          <a:lstStyle/>
-          <a:p>
-            <a:r>
-              <a:rPr lang="en-US" smtClean="0"/>
-              <a:t>Click to edit Master title style</a:t>
-            </a:r>
-            <a:endParaRPr lang="hu-HU"/>
-          </a:p>
-        </p:txBody>
-      </p:sp>
-      <p:sp>
-        <p:nvSpPr>
-          <p:cNvPr id="3" name="Content Placeholder 2"/>
-          <p:cNvSpPr>
-            <a:spLocks noGrp="1"/>
-          </p:cNvSpPr>
-          <p:nvPr>
-            <p:ph sz="half" idx="1"/>
-          </p:nvPr>
-        </p:nvSpPr>
         <p:spPr>
           <a:xfrm>
-            <a:off x="457200" y="1600200"/>
-            <a:ext cx="4038600" cy="4525963"/>
+            <a:off x="615848" y="609600"/>
+            <a:ext cx="6341465" cy="3022600"/>
           </a:xfrm>
         </p:spPr>
         <p:txBody>
-          <a:bodyPr/>
+          <a:bodyPr anchor="ctr">
+            <a:normAutofit/>
+          </a:bodyPr>
           <a:lstStyle>
-            <a:lvl1pPr>
-              <a:defRPr sz="2800"/>
+            <a:lvl1pPr algn="l">
+              <a:defRPr sz="4400" b="0" cap="none"/>
             </a:lvl1pPr>
-            <a:lvl2pPr>
-              <a:defRPr sz="2400"/>
+          </a:lstStyle>
+          <a:p>
+            <a:r>
+              <a:rPr lang="hu-HU"/>
+              <a:t>Mintacím szerkesztése</a:t>
+            </a:r>
+            <a:endParaRPr lang="en-US" dirty="0"/>
+          </a:p>
+        </p:txBody>
+      </p:sp>
+      <p:sp>
+        <p:nvSpPr>
+          <p:cNvPr id="23" name="Text Placeholder 9"/>
+          <p:cNvSpPr>
+            <a:spLocks noGrp="1"/>
+          </p:cNvSpPr>
+          <p:nvPr>
+            <p:ph type="body" sz="quarter" idx="13"/>
+          </p:nvPr>
+        </p:nvSpPr>
+        <p:spPr>
+          <a:xfrm>
+            <a:off x="609597" y="4013200"/>
+            <a:ext cx="6347716" cy="514248"/>
+          </a:xfrm>
+        </p:spPr>
+        <p:txBody>
+          <a:bodyPr anchor="b">
+            <a:noAutofit/>
+          </a:bodyPr>
+          <a:lstStyle>
+            <a:lvl1pPr marL="0" indent="0">
+              <a:buFontTx/>
+              <a:buNone/>
+              <a:defRPr sz="2400">
+                <a:solidFill>
+                  <a:schemeClr val="accent1"/>
+                </a:solidFill>
+              </a:defRPr>
+            </a:lvl1pPr>
+            <a:lvl2pPr marL="457200" indent="0">
+              <a:buFontTx/>
+              <a:buNone/>
+              <a:defRPr/>
             </a:lvl2pPr>
-            <a:lvl3pPr>
-              <a:defRPr sz="2000"/>
+            <a:lvl3pPr marL="914400" indent="0">
+              <a:buFontTx/>
+              <a:buNone/>
+              <a:defRPr/>
             </a:lvl3pPr>
-            <a:lvl4pPr>
-              <a:defRPr sz="1800"/>
+            <a:lvl4pPr marL="1371600" indent="0">
+              <a:buFontTx/>
+              <a:buNone/>
+              <a:defRPr/>
             </a:lvl4pPr>
-            <a:lvl5pPr>
-              <a:defRPr sz="1800"/>
+            <a:lvl5pPr marL="1828800" indent="0">
+              <a:buFontTx/>
+              <a:buNone/>
+              <a:defRPr/>
             </a:lvl5pPr>
-            <a:lvl6pPr>
-              <a:defRPr sz="1800"/>
+          </a:lstStyle>
+          <a:p>
+            <a:pPr lvl="0"/>
+            <a:r>
+              <a:rPr lang="hu-HU"/>
+              <a:t>Mintaszöveg szerkesztése</a:t>
+            </a:r>
+          </a:p>
+        </p:txBody>
+      </p:sp>
+      <p:sp>
+        <p:nvSpPr>
+          <p:cNvPr id="3" name="Text Placeholder 2"/>
+          <p:cNvSpPr>
+            <a:spLocks noGrp="1"/>
+          </p:cNvSpPr>
+          <p:nvPr>
+            <p:ph type="body" idx="1"/>
+          </p:nvPr>
+        </p:nvSpPr>
+        <p:spPr>
+          <a:xfrm>
+            <a:off x="609598" y="4527448"/>
+            <a:ext cx="6347715" cy="1513914"/>
+          </a:xfrm>
+        </p:spPr>
+        <p:txBody>
+          <a:bodyPr anchor="t">
+            <a:normAutofit/>
+          </a:bodyPr>
+          <a:lstStyle>
+            <a:lvl1pPr marL="0" indent="0" algn="l">
+              <a:buNone/>
+              <a:defRPr sz="1800">
+                <a:solidFill>
+                  <a:schemeClr val="tx1">
+                    <a:lumMod val="50000"/>
+                    <a:lumOff val="50000"/>
+                  </a:schemeClr>
+                </a:solidFill>
+              </a:defRPr>
+            </a:lvl1pPr>
+            <a:lvl2pPr marL="457200" indent="0">
+              <a:buNone/>
+              <a:defRPr sz="1800">
+                <a:solidFill>
+                  <a:schemeClr val="tx1">
+                    <a:tint val="75000"/>
+                  </a:schemeClr>
+                </a:solidFill>
+              </a:defRPr>
+            </a:lvl2pPr>
+            <a:lvl3pPr marL="914400" indent="0">
+              <a:buNone/>
+              <a:defRPr sz="1600">
+                <a:solidFill>
+                  <a:schemeClr val="tx1">
+                    <a:tint val="75000"/>
+                  </a:schemeClr>
+                </a:solidFill>
+              </a:defRPr>
+            </a:lvl3pPr>
+            <a:lvl4pPr marL="1371600" indent="0">
+              <a:buNone/>
+              <a:defRPr sz="1400">
+                <a:solidFill>
+                  <a:schemeClr val="tx1">
+                    <a:tint val="75000"/>
+                  </a:schemeClr>
+                </a:solidFill>
+              </a:defRPr>
+            </a:lvl4pPr>
+            <a:lvl5pPr marL="1828800" indent="0">
+              <a:buNone/>
+              <a:defRPr sz="1400">
+                <a:solidFill>
+                  <a:schemeClr val="tx1">
+                    <a:tint val="75000"/>
+                  </a:schemeClr>
+                </a:solidFill>
+              </a:defRPr>
+            </a:lvl5pPr>
+            <a:lvl6pPr marL="2286000" indent="0">
+              <a:buNone/>
+              <a:defRPr sz="1400">
+                <a:solidFill>
+                  <a:schemeClr val="tx1">
+                    <a:tint val="75000"/>
+                  </a:schemeClr>
+                </a:solidFill>
+              </a:defRPr>
             </a:lvl6pPr>
-            <a:lvl7pPr>
-              <a:defRPr sz="1800"/>
+            <a:lvl7pPr marL="2743200" indent="0">
+              <a:buNone/>
+              <a:defRPr sz="1400">
+                <a:solidFill>
+                  <a:schemeClr val="tx1">
+                    <a:tint val="75000"/>
+                  </a:schemeClr>
+                </a:solidFill>
+              </a:defRPr>
             </a:lvl7pPr>
-            <a:lvl8pPr>
-              <a:defRPr sz="1800"/>
+            <a:lvl8pPr marL="3200400" indent="0">
+              <a:buNone/>
+              <a:defRPr sz="1400">
+                <a:solidFill>
+                  <a:schemeClr val="tx1">
+                    <a:tint val="75000"/>
+                  </a:schemeClr>
+                </a:solidFill>
+              </a:defRPr>
             </a:lvl8pPr>
-            <a:lvl9pPr>
-              <a:defRPr sz="1800"/>
+            <a:lvl9pPr marL="3657600" indent="0">
+              <a:buNone/>
+              <a:defRPr sz="1400">
+                <a:solidFill>
+                  <a:schemeClr val="tx1">
+                    <a:tint val="75000"/>
+                  </a:schemeClr>
+                </a:solidFill>
+              </a:defRPr>
             </a:lvl9pPr>
           </a:lstStyle>
           <a:p>
             <a:pPr lvl="0"/>
             <a:r>
-              <a:rPr lang="en-US" smtClean="0"/>
-              <a:t>Click to edit Master text styles</a:t>
-            </a:r>
-          </a:p>
-          <a:p>
-            <a:pPr lvl="1"/>
-            <a:r>
-              <a:rPr lang="en-US" smtClean="0"/>
-              <a:t>Second level</a:t>
-            </a:r>
-          </a:p>
-          <a:p>
-            <a:pPr lvl="2"/>
-            <a:r>
-              <a:rPr lang="en-US" smtClean="0"/>
-              <a:t>Third level</a:t>
-            </a:r>
-          </a:p>
-          <a:p>
-            <a:pPr lvl="3"/>
-            <a:r>
-              <a:rPr lang="en-US" smtClean="0"/>
-              <a:t>Fourth level</a:t>
-            </a:r>
-          </a:p>
-          <a:p>
-            <a:pPr lvl="4"/>
-            <a:r>
-              <a:rPr lang="en-US" smtClean="0"/>
-              <a:t>Fifth level</a:t>
-            </a:r>
-            <a:endParaRPr lang="hu-HU"/>
-          </a:p>
-        </p:txBody>
-      </p:sp>
-      <p:sp>
-        <p:nvSpPr>
-          <p:cNvPr id="4" name="Content Placeholder 3"/>
-          <p:cNvSpPr>
-            <a:spLocks noGrp="1"/>
-          </p:cNvSpPr>
-          <p:nvPr>
-            <p:ph sz="half" idx="2"/>
-          </p:nvPr>
-        </p:nvSpPr>
-        <p:spPr>
-          <a:xfrm>
-            <a:off x="4648200" y="1600200"/>
-            <a:ext cx="4038600" cy="4525963"/>
-          </a:xfrm>
-        </p:spPr>
-        <p:txBody>
-          <a:bodyPr/>
-          <a:lstStyle>
-            <a:lvl1pPr>
-              <a:defRPr sz="2800"/>
-            </a:lvl1pPr>
-            <a:lvl2pPr>
-              <a:defRPr sz="2400"/>
-            </a:lvl2pPr>
-            <a:lvl3pPr>
-              <a:defRPr sz="2000"/>
-            </a:lvl3pPr>
-            <a:lvl4pPr>
-              <a:defRPr sz="1800"/>
-            </a:lvl4pPr>
-            <a:lvl5pPr>
-              <a:defRPr sz="1800"/>
-            </a:lvl5pPr>
-            <a:lvl6pPr>
-              <a:defRPr sz="1800"/>
-            </a:lvl6pPr>
-            <a:lvl7pPr>
-              <a:defRPr sz="1800"/>
-            </a:lvl7pPr>
-            <a:lvl8pPr>
-              <a:defRPr sz="1800"/>
-            </a:lvl8pPr>
-            <a:lvl9pPr>
-              <a:defRPr sz="1800"/>
-            </a:lvl9pPr>
-          </a:lstStyle>
-          <a:p>
-            <a:pPr lvl="0"/>
-            <a:r>
-              <a:rPr lang="en-US" smtClean="0"/>
-              <a:t>Click to edit Master text styles</a:t>
-            </a:r>
-          </a:p>
-          <a:p>
-            <a:pPr lvl="1"/>
-            <a:r>
-              <a:rPr lang="en-US" smtClean="0"/>
-              <a:t>Second level</a:t>
-            </a:r>
-          </a:p>
-          <a:p>
-            <a:pPr lvl="2"/>
-            <a:r>
-              <a:rPr lang="en-US" smtClean="0"/>
-              <a:t>Third level</a:t>
-            </a:r>
-          </a:p>
-          <a:p>
-            <a:pPr lvl="3"/>
-            <a:r>
-              <a:rPr lang="en-US" smtClean="0"/>
-              <a:t>Fourth level</a:t>
-            </a:r>
-          </a:p>
-          <a:p>
-            <a:pPr lvl="4"/>
-            <a:r>
-              <a:rPr lang="en-US" smtClean="0"/>
-              <a:t>Fifth level</a:t>
-            </a:r>
-            <a:endParaRPr lang="hu-HU"/>
-          </a:p>
-        </p:txBody>
-      </p:sp>
-      <p:sp>
-        <p:nvSpPr>
-          <p:cNvPr id="5" name="Date Placeholder 4"/>
+              <a:rPr lang="hu-HU"/>
+              <a:t>Mintaszöveg szerkesztése</a:t>
+            </a:r>
+          </a:p>
+        </p:txBody>
+      </p:sp>
+      <p:sp>
+        <p:nvSpPr>
+          <p:cNvPr id="4" name="Date Placeholder 3"/>
           <p:cNvSpPr>
             <a:spLocks noGrp="1"/>
           </p:cNvSpPr>
@@ -1339,7 +2544,7 @@
             <a:fld id="{7E1B2A62-5D5B-40FD-A574-BFE5DD367BE5}" type="datetimeFigureOut">
               <a:rPr lang="hu-HU" smtClean="0"/>
               <a:pPr/>
-              <a:t>2026. 04. 16.</a:t>
+              <a:t>2026. 04. 21.</a:t>
             </a:fld>
             <a:endParaRPr lang="hu-HU"/>
           </a:p>
@@ -1347,7 +2552,7 @@
       </p:sp>
       <p:sp>
         <p:nvSpPr>
-          <p:cNvPr id="6" name="Footer Placeholder 5"/>
+          <p:cNvPr id="5" name="Footer Placeholder 4"/>
           <p:cNvSpPr>
             <a:spLocks noGrp="1"/>
           </p:cNvSpPr>
@@ -1366,7 +2571,7 @@
       </p:sp>
       <p:sp>
         <p:nvSpPr>
-          <p:cNvPr id="7" name="Slide Number Placeholder 6"/>
+          <p:cNvPr id="6" name="Slide Number Placeholder 5"/>
           <p:cNvSpPr>
             <a:spLocks noGrp="1"/>
           </p:cNvSpPr>
@@ -1389,6 +2594,11 @@
         </p:txBody>
       </p:sp>
     </p:spTree>
+    <p:extLst>
+      <p:ext uri="{BB962C8B-B14F-4D97-AF65-F5344CB8AC3E}">
+        <p14:creationId xmlns:p14="http://schemas.microsoft.com/office/powerpoint/2010/main" val="649406926"/>
+      </p:ext>
+    </p:extLst>
   </p:cSld>
   <p:clrMapOvr>
     <a:masterClrMapping/>
@@ -1396,9 +2606,9 @@
 </p:sldLayout>
 </file>
 
-<file path=ppt/slideLayouts/slideLayout5.xml><?xml version="1.0" encoding="utf-8"?>
-<p:sldLayout xmlns:a="http://schemas.openxmlformats.org/drawingml/2006/main" xmlns:r="http://schemas.openxmlformats.org/officeDocument/2006/relationships" xmlns:p="http://schemas.openxmlformats.org/presentationml/2006/main" type="twoTxTwoObj" preserve="1">
-  <p:cSld name="Comparison">
+<file path=ppt/slideLayouts/slideLayout15.xml><?xml version="1.0" encoding="utf-8"?>
+<p:sldLayout xmlns:a="http://schemas.openxmlformats.org/drawingml/2006/main" xmlns:r="http://schemas.openxmlformats.org/officeDocument/2006/relationships" xmlns:p="http://schemas.openxmlformats.org/presentationml/2006/main" type="vertTx" preserve="1">
+  <p:cSld name="Cím és függőleges szöveg">
     <p:spTree>
       <p:nvGrpSpPr>
         <p:cNvPr id="1" name=""/>
@@ -1426,323 +2636,71 @@
         <p:spPr/>
         <p:txBody>
           <a:bodyPr/>
-          <a:lstStyle>
-            <a:lvl1pPr>
-              <a:defRPr/>
-            </a:lvl1pPr>
-          </a:lstStyle>
-          <a:p>
-            <a:r>
-              <a:rPr lang="en-US" smtClean="0"/>
-              <a:t>Click to edit Master title style</a:t>
-            </a:r>
-            <a:endParaRPr lang="hu-HU"/>
-          </a:p>
-        </p:txBody>
-      </p:sp>
-      <p:sp>
-        <p:nvSpPr>
-          <p:cNvPr id="3" name="Text Placeholder 2"/>
-          <p:cNvSpPr>
-            <a:spLocks noGrp="1"/>
-          </p:cNvSpPr>
-          <p:nvPr>
-            <p:ph type="body" idx="1"/>
-          </p:nvPr>
-        </p:nvSpPr>
-        <p:spPr>
-          <a:xfrm>
-            <a:off x="457200" y="1535113"/>
-            <a:ext cx="4040188" cy="639762"/>
-          </a:xfrm>
-        </p:spPr>
-        <p:txBody>
-          <a:bodyPr anchor="b"/>
-          <a:lstStyle>
-            <a:lvl1pPr marL="0" indent="0">
-              <a:buNone/>
-              <a:defRPr sz="2400" b="1"/>
-            </a:lvl1pPr>
-            <a:lvl2pPr marL="457200" indent="0">
-              <a:buNone/>
-              <a:defRPr sz="2000" b="1"/>
-            </a:lvl2pPr>
-            <a:lvl3pPr marL="914400" indent="0">
-              <a:buNone/>
-              <a:defRPr sz="1800" b="1"/>
-            </a:lvl3pPr>
-            <a:lvl4pPr marL="1371600" indent="0">
-              <a:buNone/>
-              <a:defRPr sz="1600" b="1"/>
-            </a:lvl4pPr>
-            <a:lvl5pPr marL="1828800" indent="0">
-              <a:buNone/>
-              <a:defRPr sz="1600" b="1"/>
-            </a:lvl5pPr>
-            <a:lvl6pPr marL="2286000" indent="0">
-              <a:buNone/>
-              <a:defRPr sz="1600" b="1"/>
-            </a:lvl6pPr>
-            <a:lvl7pPr marL="2743200" indent="0">
-              <a:buNone/>
-              <a:defRPr sz="1600" b="1"/>
-            </a:lvl7pPr>
-            <a:lvl8pPr marL="3200400" indent="0">
-              <a:buNone/>
-              <a:defRPr sz="1600" b="1"/>
-            </a:lvl8pPr>
-            <a:lvl9pPr marL="3657600" indent="0">
-              <a:buNone/>
-              <a:defRPr sz="1600" b="1"/>
-            </a:lvl9pPr>
-          </a:lstStyle>
+          <a:lstStyle/>
+          <a:p>
+            <a:r>
+              <a:rPr lang="hu-HU"/>
+              <a:t>Mintacím szerkesztése</a:t>
+            </a:r>
+            <a:endParaRPr lang="en-US" dirty="0"/>
+          </a:p>
+        </p:txBody>
+      </p:sp>
+      <p:sp>
+        <p:nvSpPr>
+          <p:cNvPr id="3" name="Vertical Text Placeholder 2"/>
+          <p:cNvSpPr>
+            <a:spLocks noGrp="1"/>
+          </p:cNvSpPr>
+          <p:nvPr>
+            <p:ph type="body" orient="vert" idx="1"/>
+          </p:nvPr>
+        </p:nvSpPr>
+        <p:spPr/>
+        <p:txBody>
+          <a:bodyPr vert="eaVert"/>
+          <a:lstStyle/>
           <a:p>
             <a:pPr lvl="0"/>
             <a:r>
-              <a:rPr lang="en-US" smtClean="0"/>
-              <a:t>Click to edit Master text styles</a:t>
-            </a:r>
-          </a:p>
-        </p:txBody>
-      </p:sp>
-      <p:sp>
-        <p:nvSpPr>
-          <p:cNvPr id="4" name="Content Placeholder 3"/>
-          <p:cNvSpPr>
-            <a:spLocks noGrp="1"/>
-          </p:cNvSpPr>
-          <p:nvPr>
-            <p:ph sz="half" idx="2"/>
-          </p:nvPr>
-        </p:nvSpPr>
-        <p:spPr>
-          <a:xfrm>
-            <a:off x="457200" y="2174875"/>
-            <a:ext cx="4040188" cy="3951288"/>
-          </a:xfrm>
-        </p:spPr>
-        <p:txBody>
-          <a:bodyPr/>
-          <a:lstStyle>
-            <a:lvl1pPr>
-              <a:defRPr sz="2400"/>
-            </a:lvl1pPr>
-            <a:lvl2pPr>
-              <a:defRPr sz="2000"/>
-            </a:lvl2pPr>
-            <a:lvl3pPr>
-              <a:defRPr sz="1800"/>
-            </a:lvl3pPr>
-            <a:lvl4pPr>
-              <a:defRPr sz="1600"/>
-            </a:lvl4pPr>
-            <a:lvl5pPr>
-              <a:defRPr sz="1600"/>
-            </a:lvl5pPr>
-            <a:lvl6pPr>
-              <a:defRPr sz="1600"/>
-            </a:lvl6pPr>
-            <a:lvl7pPr>
-              <a:defRPr sz="1600"/>
-            </a:lvl7pPr>
-            <a:lvl8pPr>
-              <a:defRPr sz="1600"/>
-            </a:lvl8pPr>
-            <a:lvl9pPr>
-              <a:defRPr sz="1600"/>
-            </a:lvl9pPr>
-          </a:lstStyle>
-          <a:p>
-            <a:pPr lvl="0"/>
-            <a:r>
-              <a:rPr lang="en-US" smtClean="0"/>
-              <a:t>Click to edit Master text styles</a:t>
+              <a:rPr lang="hu-HU"/>
+              <a:t>Mintaszöveg szerkesztése</a:t>
             </a:r>
           </a:p>
           <a:p>
             <a:pPr lvl="1"/>
             <a:r>
-              <a:rPr lang="en-US" smtClean="0"/>
-              <a:t>Second level</a:t>
+              <a:rPr lang="hu-HU"/>
+              <a:t>Második szint</a:t>
             </a:r>
           </a:p>
           <a:p>
             <a:pPr lvl="2"/>
             <a:r>
-              <a:rPr lang="en-US" smtClean="0"/>
-              <a:t>Third level</a:t>
+              <a:rPr lang="hu-HU"/>
+              <a:t>Harmadik szint</a:t>
             </a:r>
           </a:p>
           <a:p>
             <a:pPr lvl="3"/>
             <a:r>
-              <a:rPr lang="en-US" smtClean="0"/>
-              <a:t>Fourth level</a:t>
+              <a:rPr lang="hu-HU"/>
+              <a:t>Negyedik szint</a:t>
             </a:r>
           </a:p>
           <a:p>
             <a:pPr lvl="4"/>
             <a:r>
-              <a:rPr lang="en-US" smtClean="0"/>
-              <a:t>Fifth level</a:t>
-            </a:r>
-            <a:endParaRPr lang="hu-HU"/>
-          </a:p>
-        </p:txBody>
-      </p:sp>
-      <p:sp>
-        <p:nvSpPr>
-          <p:cNvPr id="5" name="Text Placeholder 4"/>
-          <p:cNvSpPr>
-            <a:spLocks noGrp="1"/>
-          </p:cNvSpPr>
-          <p:nvPr>
-            <p:ph type="body" sz="quarter" idx="3"/>
-          </p:nvPr>
-        </p:nvSpPr>
-        <p:spPr>
-          <a:xfrm>
-            <a:off x="4645025" y="1535113"/>
-            <a:ext cx="4041775" cy="639762"/>
-          </a:xfrm>
-        </p:spPr>
-        <p:txBody>
-          <a:bodyPr anchor="b"/>
-          <a:lstStyle>
-            <a:lvl1pPr marL="0" indent="0">
-              <a:buNone/>
-              <a:defRPr sz="2400" b="1"/>
-            </a:lvl1pPr>
-            <a:lvl2pPr marL="457200" indent="0">
-              <a:buNone/>
-              <a:defRPr sz="2000" b="1"/>
-            </a:lvl2pPr>
-            <a:lvl3pPr marL="914400" indent="0">
-              <a:buNone/>
-              <a:defRPr sz="1800" b="1"/>
-            </a:lvl3pPr>
-            <a:lvl4pPr marL="1371600" indent="0">
-              <a:buNone/>
-              <a:defRPr sz="1600" b="1"/>
-            </a:lvl4pPr>
-            <a:lvl5pPr marL="1828800" indent="0">
-              <a:buNone/>
-              <a:defRPr sz="1600" b="1"/>
-            </a:lvl5pPr>
-            <a:lvl6pPr marL="2286000" indent="0">
-              <a:buNone/>
-              <a:defRPr sz="1600" b="1"/>
-            </a:lvl6pPr>
-            <a:lvl7pPr marL="2743200" indent="0">
-              <a:buNone/>
-              <a:defRPr sz="1600" b="1"/>
-            </a:lvl7pPr>
-            <a:lvl8pPr marL="3200400" indent="0">
-              <a:buNone/>
-              <a:defRPr sz="1600" b="1"/>
-            </a:lvl8pPr>
-            <a:lvl9pPr marL="3657600" indent="0">
-              <a:buNone/>
-              <a:defRPr sz="1600" b="1"/>
-            </a:lvl9pPr>
-          </a:lstStyle>
-          <a:p>
-            <a:pPr lvl="0"/>
-            <a:r>
-              <a:rPr lang="en-US" smtClean="0"/>
-              <a:t>Click to edit Master text styles</a:t>
-            </a:r>
-          </a:p>
-        </p:txBody>
-      </p:sp>
-      <p:sp>
-        <p:nvSpPr>
-          <p:cNvPr id="6" name="Content Placeholder 5"/>
-          <p:cNvSpPr>
-            <a:spLocks noGrp="1"/>
-          </p:cNvSpPr>
-          <p:nvPr>
-            <p:ph sz="quarter" idx="4"/>
-          </p:nvPr>
-        </p:nvSpPr>
-        <p:spPr>
-          <a:xfrm>
-            <a:off x="4645025" y="2174875"/>
-            <a:ext cx="4041775" cy="3951288"/>
-          </a:xfrm>
-        </p:spPr>
-        <p:txBody>
-          <a:bodyPr/>
-          <a:lstStyle>
-            <a:lvl1pPr>
-              <a:defRPr sz="2400"/>
-            </a:lvl1pPr>
-            <a:lvl2pPr>
-              <a:defRPr sz="2000"/>
-            </a:lvl2pPr>
-            <a:lvl3pPr>
-              <a:defRPr sz="1800"/>
-            </a:lvl3pPr>
-            <a:lvl4pPr>
-              <a:defRPr sz="1600"/>
-            </a:lvl4pPr>
-            <a:lvl5pPr>
-              <a:defRPr sz="1600"/>
-            </a:lvl5pPr>
-            <a:lvl6pPr>
-              <a:defRPr sz="1600"/>
-            </a:lvl6pPr>
-            <a:lvl7pPr>
-              <a:defRPr sz="1600"/>
-            </a:lvl7pPr>
-            <a:lvl8pPr>
-              <a:defRPr sz="1600"/>
-            </a:lvl8pPr>
-            <a:lvl9pPr>
-              <a:defRPr sz="1600"/>
-            </a:lvl9pPr>
-          </a:lstStyle>
-          <a:p>
-            <a:pPr lvl="0"/>
-            <a:r>
-              <a:rPr lang="en-US" smtClean="0"/>
-              <a:t>Click to edit Master text styles</a:t>
-            </a:r>
-          </a:p>
-          <a:p>
-            <a:pPr lvl="1"/>
-            <a:r>
-              <a:rPr lang="en-US" smtClean="0"/>
-              <a:t>Second level</a:t>
-            </a:r>
-          </a:p>
-          <a:p>
-            <a:pPr lvl="2"/>
-            <a:r>
-              <a:rPr lang="en-US" smtClean="0"/>
-              <a:t>Third level</a:t>
-            </a:r>
-          </a:p>
-          <a:p>
-            <a:pPr lvl="3"/>
-            <a:r>
-              <a:rPr lang="en-US" smtClean="0"/>
-              <a:t>Fourth level</a:t>
-            </a:r>
-          </a:p>
-          <a:p>
-            <a:pPr lvl="4"/>
-            <a:r>
-              <a:rPr lang="en-US" smtClean="0"/>
-              <a:t>Fifth level</a:t>
-            </a:r>
-            <a:endParaRPr lang="hu-HU"/>
-          </a:p>
-        </p:txBody>
-      </p:sp>
-      <p:sp>
-        <p:nvSpPr>
-          <p:cNvPr id="7" name="Date Placeholder 6"/>
+              <a:rPr lang="hu-HU"/>
+              <a:t>Ötödik szint</a:t>
+            </a:r>
+            <a:endParaRPr lang="en-US" dirty="0"/>
+          </a:p>
+        </p:txBody>
+      </p:sp>
+      <p:sp>
+        <p:nvSpPr>
+          <p:cNvPr id="4" name="Date Placeholder 3"/>
           <p:cNvSpPr>
             <a:spLocks noGrp="1"/>
           </p:cNvSpPr>
@@ -1758,7 +2716,7 @@
             <a:fld id="{7E1B2A62-5D5B-40FD-A574-BFE5DD367BE5}" type="datetimeFigureOut">
               <a:rPr lang="hu-HU" smtClean="0"/>
               <a:pPr/>
-              <a:t>2026. 04. 16.</a:t>
+              <a:t>2026. 04. 21.</a:t>
             </a:fld>
             <a:endParaRPr lang="hu-HU"/>
           </a:p>
@@ -1766,7 +2724,7 @@
       </p:sp>
       <p:sp>
         <p:nvSpPr>
-          <p:cNvPr id="8" name="Footer Placeholder 7"/>
+          <p:cNvPr id="5" name="Footer Placeholder 4"/>
           <p:cNvSpPr>
             <a:spLocks noGrp="1"/>
           </p:cNvSpPr>
@@ -1785,7 +2743,7 @@
       </p:sp>
       <p:sp>
         <p:nvSpPr>
-          <p:cNvPr id="9" name="Slide Number Placeholder 8"/>
+          <p:cNvPr id="6" name="Slide Number Placeholder 5"/>
           <p:cNvSpPr>
             <a:spLocks noGrp="1"/>
           </p:cNvSpPr>
@@ -1808,6 +2766,11 @@
         </p:txBody>
       </p:sp>
     </p:spTree>
+    <p:extLst>
+      <p:ext uri="{BB962C8B-B14F-4D97-AF65-F5344CB8AC3E}">
+        <p14:creationId xmlns:p14="http://schemas.microsoft.com/office/powerpoint/2010/main" val="1749705606"/>
+      </p:ext>
+    </p:extLst>
   </p:cSld>
   <p:clrMapOvr>
     <a:masterClrMapping/>
@@ -1815,9 +2778,9 @@
 </p:sldLayout>
 </file>
 
-<file path=ppt/slideLayouts/slideLayout6.xml><?xml version="1.0" encoding="utf-8"?>
-<p:sldLayout xmlns:a="http://schemas.openxmlformats.org/drawingml/2006/main" xmlns:r="http://schemas.openxmlformats.org/officeDocument/2006/relationships" xmlns:p="http://schemas.openxmlformats.org/presentationml/2006/main" type="titleOnly" preserve="1">
-  <p:cSld name="Title Only">
+<file path=ppt/slideLayouts/slideLayout16.xml><?xml version="1.0" encoding="utf-8"?>
+<p:sldLayout xmlns:a="http://schemas.openxmlformats.org/drawingml/2006/main" xmlns:r="http://schemas.openxmlformats.org/officeDocument/2006/relationships" xmlns:p="http://schemas.openxmlformats.org/presentationml/2006/main" type="vertTitleAndTx" preserve="1">
+  <p:cSld name="Függőleges cím és szöveg">
     <p:spTree>
       <p:nvGrpSpPr>
         <p:cNvPr id="1" name=""/>
@@ -1834,30 +2797,92 @@
       </p:grpSpPr>
       <p:sp>
         <p:nvSpPr>
-          <p:cNvPr id="2" name="Title 1"/>
-          <p:cNvSpPr>
-            <a:spLocks noGrp="1"/>
-          </p:cNvSpPr>
-          <p:nvPr>
-            <p:ph type="title"/>
-          </p:nvPr>
-        </p:nvSpPr>
-        <p:spPr/>
-        <p:txBody>
-          <a:bodyPr/>
-          <a:lstStyle/>
-          <a:p>
-            <a:r>
-              <a:rPr lang="en-US" smtClean="0"/>
-              <a:t>Click to edit Master title style</a:t>
-            </a:r>
-            <a:endParaRPr lang="hu-HU"/>
-          </a:p>
-        </p:txBody>
-      </p:sp>
-      <p:sp>
-        <p:nvSpPr>
-          <p:cNvPr id="3" name="Date Placeholder 2"/>
+          <p:cNvPr id="2" name="Vertical Title 1"/>
+          <p:cNvSpPr>
+            <a:spLocks noGrp="1"/>
+          </p:cNvSpPr>
+          <p:nvPr>
+            <p:ph type="title" orient="vert"/>
+          </p:nvPr>
+        </p:nvSpPr>
+        <p:spPr>
+          <a:xfrm>
+            <a:off x="5977312" y="609600"/>
+            <a:ext cx="978812" cy="5251451"/>
+          </a:xfrm>
+        </p:spPr>
+        <p:txBody>
+          <a:bodyPr vert="eaVert" anchor="ctr"/>
+          <a:lstStyle/>
+          <a:p>
+            <a:r>
+              <a:rPr lang="hu-HU"/>
+              <a:t>Mintacím szerkesztése</a:t>
+            </a:r>
+            <a:endParaRPr lang="en-US" dirty="0"/>
+          </a:p>
+        </p:txBody>
+      </p:sp>
+      <p:sp>
+        <p:nvSpPr>
+          <p:cNvPr id="3" name="Vertical Text Placeholder 2"/>
+          <p:cNvSpPr>
+            <a:spLocks noGrp="1"/>
+          </p:cNvSpPr>
+          <p:nvPr>
+            <p:ph type="body" orient="vert" idx="1"/>
+          </p:nvPr>
+        </p:nvSpPr>
+        <p:spPr>
+          <a:xfrm>
+            <a:off x="609599" y="609600"/>
+            <a:ext cx="5195026" cy="5251451"/>
+          </a:xfrm>
+        </p:spPr>
+        <p:txBody>
+          <a:bodyPr vert="eaVert"/>
+          <a:lstStyle/>
+          <a:p>
+            <a:pPr lvl="0"/>
+            <a:r>
+              <a:rPr lang="hu-HU"/>
+              <a:t>Mintaszöveg szerkesztése</a:t>
+            </a:r>
+          </a:p>
+          <a:p>
+            <a:pPr lvl="1"/>
+            <a:r>
+              <a:rPr lang="hu-HU"/>
+              <a:t>Második szint</a:t>
+            </a:r>
+          </a:p>
+          <a:p>
+            <a:pPr lvl="2"/>
+            <a:r>
+              <a:rPr lang="hu-HU"/>
+              <a:t>Harmadik szint</a:t>
+            </a:r>
+          </a:p>
+          <a:p>
+            <a:pPr lvl="3"/>
+            <a:r>
+              <a:rPr lang="hu-HU"/>
+              <a:t>Negyedik szint</a:t>
+            </a:r>
+          </a:p>
+          <a:p>
+            <a:pPr lvl="4"/>
+            <a:r>
+              <a:rPr lang="hu-HU"/>
+              <a:t>Ötödik szint</a:t>
+            </a:r>
+            <a:endParaRPr lang="en-US" dirty="0"/>
+          </a:p>
+        </p:txBody>
+      </p:sp>
+      <p:sp>
+        <p:nvSpPr>
+          <p:cNvPr id="4" name="Date Placeholder 3"/>
           <p:cNvSpPr>
             <a:spLocks noGrp="1"/>
           </p:cNvSpPr>
@@ -1873,7 +2898,7 @@
             <a:fld id="{7E1B2A62-5D5B-40FD-A574-BFE5DD367BE5}" type="datetimeFigureOut">
               <a:rPr lang="hu-HU" smtClean="0"/>
               <a:pPr/>
-              <a:t>2026. 04. 16.</a:t>
+              <a:t>2026. 04. 21.</a:t>
             </a:fld>
             <a:endParaRPr lang="hu-HU"/>
           </a:p>
@@ -1881,7 +2906,7 @@
       </p:sp>
       <p:sp>
         <p:nvSpPr>
-          <p:cNvPr id="4" name="Footer Placeholder 3"/>
+          <p:cNvPr id="5" name="Footer Placeholder 4"/>
           <p:cNvSpPr>
             <a:spLocks noGrp="1"/>
           </p:cNvSpPr>
@@ -1900,7 +2925,7 @@
       </p:sp>
       <p:sp>
         <p:nvSpPr>
-          <p:cNvPr id="5" name="Slide Number Placeholder 4"/>
+          <p:cNvPr id="6" name="Slide Number Placeholder 5"/>
           <p:cNvSpPr>
             <a:spLocks noGrp="1"/>
           </p:cNvSpPr>
@@ -1923,6 +2948,11 @@
         </p:txBody>
       </p:sp>
     </p:spTree>
+    <p:extLst>
+      <p:ext uri="{BB962C8B-B14F-4D97-AF65-F5344CB8AC3E}">
+        <p14:creationId xmlns:p14="http://schemas.microsoft.com/office/powerpoint/2010/main" val="3017387510"/>
+      </p:ext>
+    </p:extLst>
   </p:cSld>
   <p:clrMapOvr>
     <a:masterClrMapping/>
@@ -1930,9 +2960,9 @@
 </p:sldLayout>
 </file>
 
-<file path=ppt/slideLayouts/slideLayout7.xml><?xml version="1.0" encoding="utf-8"?>
-<p:sldLayout xmlns:a="http://schemas.openxmlformats.org/drawingml/2006/main" xmlns:r="http://schemas.openxmlformats.org/officeDocument/2006/relationships" xmlns:p="http://schemas.openxmlformats.org/presentationml/2006/main" type="blank" preserve="1">
-  <p:cSld name="Blank">
+<file path=ppt/slideLayouts/slideLayout2.xml><?xml version="1.0" encoding="utf-8"?>
+<p:sldLayout xmlns:a="http://schemas.openxmlformats.org/drawingml/2006/main" xmlns:r="http://schemas.openxmlformats.org/officeDocument/2006/relationships" xmlns:p="http://schemas.openxmlformats.org/presentationml/2006/main" type="obj" preserve="1">
+  <p:cSld name="Cím és tartalom">
     <p:spTree>
       <p:nvGrpSpPr>
         <p:cNvPr id="1" name=""/>
@@ -1949,7 +2979,82 @@
       </p:grpSpPr>
       <p:sp>
         <p:nvSpPr>
-          <p:cNvPr id="2" name="Date Placeholder 1"/>
+          <p:cNvPr id="2" name="Title 1"/>
+          <p:cNvSpPr>
+            <a:spLocks noGrp="1"/>
+          </p:cNvSpPr>
+          <p:nvPr>
+            <p:ph type="title"/>
+          </p:nvPr>
+        </p:nvSpPr>
+        <p:spPr/>
+        <p:txBody>
+          <a:bodyPr/>
+          <a:lstStyle/>
+          <a:p>
+            <a:r>
+              <a:rPr lang="hu-HU"/>
+              <a:t>Mintacím szerkesztése</a:t>
+            </a:r>
+            <a:endParaRPr lang="en-US" dirty="0"/>
+          </a:p>
+        </p:txBody>
+      </p:sp>
+      <p:sp>
+        <p:nvSpPr>
+          <p:cNvPr id="3" name="Content Placeholder 2"/>
+          <p:cNvSpPr>
+            <a:spLocks noGrp="1"/>
+          </p:cNvSpPr>
+          <p:nvPr>
+            <p:ph idx="1"/>
+          </p:nvPr>
+        </p:nvSpPr>
+        <p:spPr/>
+        <p:txBody>
+          <a:bodyPr/>
+          <a:lstStyle/>
+          <a:p>
+            <a:pPr lvl="0"/>
+            <a:r>
+              <a:rPr lang="hu-HU"/>
+              <a:t>Mintaszöveg szerkesztése</a:t>
+            </a:r>
+          </a:p>
+          <a:p>
+            <a:pPr lvl="1"/>
+            <a:r>
+              <a:rPr lang="hu-HU"/>
+              <a:t>Második szint</a:t>
+            </a:r>
+          </a:p>
+          <a:p>
+            <a:pPr lvl="2"/>
+            <a:r>
+              <a:rPr lang="hu-HU"/>
+              <a:t>Harmadik szint</a:t>
+            </a:r>
+          </a:p>
+          <a:p>
+            <a:pPr lvl="3"/>
+            <a:r>
+              <a:rPr lang="hu-HU"/>
+              <a:t>Negyedik szint</a:t>
+            </a:r>
+          </a:p>
+          <a:p>
+            <a:pPr lvl="4"/>
+            <a:r>
+              <a:rPr lang="hu-HU"/>
+              <a:t>Ötödik szint</a:t>
+            </a:r>
+            <a:endParaRPr lang="en-US" dirty="0"/>
+          </a:p>
+        </p:txBody>
+      </p:sp>
+      <p:sp>
+        <p:nvSpPr>
+          <p:cNvPr id="4" name="Date Placeholder 3"/>
           <p:cNvSpPr>
             <a:spLocks noGrp="1"/>
           </p:cNvSpPr>
@@ -1965,7 +3070,7 @@
             <a:fld id="{7E1B2A62-5D5B-40FD-A574-BFE5DD367BE5}" type="datetimeFigureOut">
               <a:rPr lang="hu-HU" smtClean="0"/>
               <a:pPr/>
-              <a:t>2026. 04. 16.</a:t>
+              <a:t>2026. 04. 21.</a:t>
             </a:fld>
             <a:endParaRPr lang="hu-HU"/>
           </a:p>
@@ -1973,7 +3078,7 @@
       </p:sp>
       <p:sp>
         <p:nvSpPr>
-          <p:cNvPr id="3" name="Footer Placeholder 2"/>
+          <p:cNvPr id="5" name="Footer Placeholder 4"/>
           <p:cNvSpPr>
             <a:spLocks noGrp="1"/>
           </p:cNvSpPr>
@@ -1992,7 +3097,7 @@
       </p:sp>
       <p:sp>
         <p:nvSpPr>
-          <p:cNvPr id="4" name="Slide Number Placeholder 3"/>
+          <p:cNvPr id="6" name="Slide Number Placeholder 5"/>
           <p:cNvSpPr>
             <a:spLocks noGrp="1"/>
           </p:cNvSpPr>
@@ -2015,6 +3120,11 @@
         </p:txBody>
       </p:sp>
     </p:spTree>
+    <p:extLst>
+      <p:ext uri="{BB962C8B-B14F-4D97-AF65-F5344CB8AC3E}">
+        <p14:creationId xmlns:p14="http://schemas.microsoft.com/office/powerpoint/2010/main" val="711260976"/>
+      </p:ext>
+    </p:extLst>
   </p:cSld>
   <p:clrMapOvr>
     <a:masterClrMapping/>
@@ -2022,9 +3132,9 @@
 </p:sldLayout>
 </file>
 
-<file path=ppt/slideLayouts/slideLayout8.xml><?xml version="1.0" encoding="utf-8"?>
-<p:sldLayout xmlns:a="http://schemas.openxmlformats.org/drawingml/2006/main" xmlns:r="http://schemas.openxmlformats.org/officeDocument/2006/relationships" xmlns:p="http://schemas.openxmlformats.org/presentationml/2006/main" type="objTx" preserve="1">
-  <p:cSld name="Content with Caption">
+<file path=ppt/slideLayouts/slideLayout3.xml><?xml version="1.0" encoding="utf-8"?>
+<p:sldLayout xmlns:a="http://schemas.openxmlformats.org/drawingml/2006/main" xmlns:r="http://schemas.openxmlformats.org/officeDocument/2006/relationships" xmlns:p="http://schemas.openxmlformats.org/presentationml/2006/main" type="secHead" preserve="1">
+  <p:cSld name="Szakaszfejléc">
     <p:spTree>
       <p:nvGrpSpPr>
         <p:cNvPr id="1" name=""/>
@@ -2051,179 +3161,149 @@
         </p:nvSpPr>
         <p:spPr>
           <a:xfrm>
-            <a:off x="457200" y="273050"/>
-            <a:ext cx="3008313" cy="1162050"/>
+            <a:off x="609598" y="2700868"/>
+            <a:ext cx="6347715" cy="1826581"/>
           </a:xfrm>
         </p:spPr>
         <p:txBody>
           <a:bodyPr anchor="b"/>
           <a:lstStyle>
             <a:lvl1pPr algn="l">
-              <a:defRPr sz="2000" b="1"/>
+              <a:defRPr sz="4000" b="0" cap="none"/>
             </a:lvl1pPr>
           </a:lstStyle>
           <a:p>
             <a:r>
-              <a:rPr lang="en-US" smtClean="0"/>
-              <a:t>Click to edit Master title style</a:t>
-            </a:r>
-            <a:endParaRPr lang="hu-HU"/>
-          </a:p>
-        </p:txBody>
-      </p:sp>
-      <p:sp>
-        <p:nvSpPr>
-          <p:cNvPr id="3" name="Content Placeholder 2"/>
-          <p:cNvSpPr>
-            <a:spLocks noGrp="1"/>
-          </p:cNvSpPr>
-          <p:nvPr>
-            <p:ph idx="1"/>
+              <a:rPr lang="hu-HU"/>
+              <a:t>Mintacím szerkesztése</a:t>
+            </a:r>
+            <a:endParaRPr lang="en-US" dirty="0"/>
+          </a:p>
+        </p:txBody>
+      </p:sp>
+      <p:sp>
+        <p:nvSpPr>
+          <p:cNvPr id="3" name="Text Placeholder 2"/>
+          <p:cNvSpPr>
+            <a:spLocks noGrp="1"/>
+          </p:cNvSpPr>
+          <p:nvPr>
+            <p:ph type="body" idx="1"/>
           </p:nvPr>
         </p:nvSpPr>
         <p:spPr>
           <a:xfrm>
-            <a:off x="3575050" y="273050"/>
-            <a:ext cx="5111750" cy="5853113"/>
+            <a:off x="609598" y="4527448"/>
+            <a:ext cx="6347715" cy="860400"/>
           </a:xfrm>
         </p:spPr>
         <p:txBody>
-          <a:bodyPr/>
+          <a:bodyPr anchor="t"/>
           <a:lstStyle>
-            <a:lvl1pPr>
-              <a:defRPr sz="3200"/>
+            <a:lvl1pPr marL="0" indent="0" algn="l">
+              <a:buNone/>
+              <a:defRPr sz="2000">
+                <a:solidFill>
+                  <a:schemeClr val="tx1">
+                    <a:lumMod val="50000"/>
+                    <a:lumOff val="50000"/>
+                  </a:schemeClr>
+                </a:solidFill>
+              </a:defRPr>
             </a:lvl1pPr>
-            <a:lvl2pPr>
-              <a:defRPr sz="2800"/>
+            <a:lvl2pPr marL="457200" indent="0">
+              <a:buNone/>
+              <a:defRPr sz="1800">
+                <a:solidFill>
+                  <a:schemeClr val="tx1">
+                    <a:tint val="75000"/>
+                  </a:schemeClr>
+                </a:solidFill>
+              </a:defRPr>
             </a:lvl2pPr>
-            <a:lvl3pPr>
-              <a:defRPr sz="2400"/>
+            <a:lvl3pPr marL="914400" indent="0">
+              <a:buNone/>
+              <a:defRPr sz="1600">
+                <a:solidFill>
+                  <a:schemeClr val="tx1">
+                    <a:tint val="75000"/>
+                  </a:schemeClr>
+                </a:solidFill>
+              </a:defRPr>
             </a:lvl3pPr>
-            <a:lvl4pPr>
-              <a:defRPr sz="2000"/>
+            <a:lvl4pPr marL="1371600" indent="0">
+              <a:buNone/>
+              <a:defRPr sz="1400">
+                <a:solidFill>
+                  <a:schemeClr val="tx1">
+                    <a:tint val="75000"/>
+                  </a:schemeClr>
+                </a:solidFill>
+              </a:defRPr>
             </a:lvl4pPr>
-            <a:lvl5pPr>
-              <a:defRPr sz="2000"/>
+            <a:lvl5pPr marL="1828800" indent="0">
+              <a:buNone/>
+              <a:defRPr sz="1400">
+                <a:solidFill>
+                  <a:schemeClr val="tx1">
+                    <a:tint val="75000"/>
+                  </a:schemeClr>
+                </a:solidFill>
+              </a:defRPr>
             </a:lvl5pPr>
-            <a:lvl6pPr>
-              <a:defRPr sz="2000"/>
+            <a:lvl6pPr marL="2286000" indent="0">
+              <a:buNone/>
+              <a:defRPr sz="1400">
+                <a:solidFill>
+                  <a:schemeClr val="tx1">
+                    <a:tint val="75000"/>
+                  </a:schemeClr>
+                </a:solidFill>
+              </a:defRPr>
             </a:lvl6pPr>
-            <a:lvl7pPr>
-              <a:defRPr sz="2000"/>
+            <a:lvl7pPr marL="2743200" indent="0">
+              <a:buNone/>
+              <a:defRPr sz="1400">
+                <a:solidFill>
+                  <a:schemeClr val="tx1">
+                    <a:tint val="75000"/>
+                  </a:schemeClr>
+                </a:solidFill>
+              </a:defRPr>
             </a:lvl7pPr>
-            <a:lvl8pPr>
-              <a:defRPr sz="2000"/>
+            <a:lvl8pPr marL="3200400" indent="0">
+              <a:buNone/>
+              <a:defRPr sz="1400">
+                <a:solidFill>
+                  <a:schemeClr val="tx1">
+                    <a:tint val="75000"/>
+                  </a:schemeClr>
+                </a:solidFill>
+              </a:defRPr>
             </a:lvl8pPr>
-            <a:lvl9pPr>
-              <a:defRPr sz="2000"/>
+            <a:lvl9pPr marL="3657600" indent="0">
+              <a:buNone/>
+              <a:defRPr sz="1400">
+                <a:solidFill>
+                  <a:schemeClr val="tx1">
+                    <a:tint val="75000"/>
+                  </a:schemeClr>
+                </a:solidFill>
+              </a:defRPr>
             </a:lvl9pPr>
           </a:lstStyle>
           <a:p>
             <a:pPr lvl="0"/>
             <a:r>
-              <a:rPr lang="en-US" smtClean="0"/>
-              <a:t>Click to edit Master text styles</a:t>
-            </a:r>
-          </a:p>
-          <a:p>
-            <a:pPr lvl="1"/>
-            <a:r>
-              <a:rPr lang="en-US" smtClean="0"/>
-              <a:t>Second level</a:t>
-            </a:r>
-          </a:p>
-          <a:p>
-            <a:pPr lvl="2"/>
-            <a:r>
-              <a:rPr lang="en-US" smtClean="0"/>
-              <a:t>Third level</a:t>
-            </a:r>
-          </a:p>
-          <a:p>
-            <a:pPr lvl="3"/>
-            <a:r>
-              <a:rPr lang="en-US" smtClean="0"/>
-              <a:t>Fourth level</a:t>
-            </a:r>
-          </a:p>
-          <a:p>
-            <a:pPr lvl="4"/>
-            <a:r>
-              <a:rPr lang="en-US" smtClean="0"/>
-              <a:t>Fifth level</a:t>
-            </a:r>
-            <a:endParaRPr lang="hu-HU"/>
-          </a:p>
-        </p:txBody>
-      </p:sp>
-      <p:sp>
-        <p:nvSpPr>
-          <p:cNvPr id="4" name="Text Placeholder 3"/>
-          <p:cNvSpPr>
-            <a:spLocks noGrp="1"/>
-          </p:cNvSpPr>
-          <p:nvPr>
-            <p:ph type="body" sz="half" idx="2"/>
-          </p:nvPr>
-        </p:nvSpPr>
-        <p:spPr>
-          <a:xfrm>
-            <a:off x="457200" y="1435100"/>
-            <a:ext cx="3008313" cy="4691063"/>
-          </a:xfrm>
-        </p:spPr>
-        <p:txBody>
-          <a:bodyPr/>
-          <a:lstStyle>
-            <a:lvl1pPr marL="0" indent="0">
-              <a:buNone/>
-              <a:defRPr sz="1400"/>
-            </a:lvl1pPr>
-            <a:lvl2pPr marL="457200" indent="0">
-              <a:buNone/>
-              <a:defRPr sz="1200"/>
-            </a:lvl2pPr>
-            <a:lvl3pPr marL="914400" indent="0">
-              <a:buNone/>
-              <a:defRPr sz="1000"/>
-            </a:lvl3pPr>
-            <a:lvl4pPr marL="1371600" indent="0">
-              <a:buNone/>
-              <a:defRPr sz="900"/>
-            </a:lvl4pPr>
-            <a:lvl5pPr marL="1828800" indent="0">
-              <a:buNone/>
-              <a:defRPr sz="900"/>
-            </a:lvl5pPr>
-            <a:lvl6pPr marL="2286000" indent="0">
-              <a:buNone/>
-              <a:defRPr sz="900"/>
-            </a:lvl6pPr>
-            <a:lvl7pPr marL="2743200" indent="0">
-              <a:buNone/>
-              <a:defRPr sz="900"/>
-            </a:lvl7pPr>
-            <a:lvl8pPr marL="3200400" indent="0">
-              <a:buNone/>
-              <a:defRPr sz="900"/>
-            </a:lvl8pPr>
-            <a:lvl9pPr marL="3657600" indent="0">
-              <a:buNone/>
-              <a:defRPr sz="900"/>
-            </a:lvl9pPr>
-          </a:lstStyle>
-          <a:p>
-            <a:pPr lvl="0"/>
-            <a:r>
-              <a:rPr lang="en-US" smtClean="0"/>
-              <a:t>Click to edit Master text styles</a:t>
-            </a:r>
-          </a:p>
-        </p:txBody>
-      </p:sp>
-      <p:sp>
-        <p:nvSpPr>
-          <p:cNvPr id="5" name="Date Placeholder 4"/>
+              <a:rPr lang="hu-HU"/>
+              <a:t>Mintaszöveg szerkesztése</a:t>
+            </a:r>
+          </a:p>
+        </p:txBody>
+      </p:sp>
+      <p:sp>
+        <p:nvSpPr>
+          <p:cNvPr id="4" name="Date Placeholder 3"/>
           <p:cNvSpPr>
             <a:spLocks noGrp="1"/>
           </p:cNvSpPr>
@@ -2239,7 +3319,7 @@
             <a:fld id="{7E1B2A62-5D5B-40FD-A574-BFE5DD367BE5}" type="datetimeFigureOut">
               <a:rPr lang="hu-HU" smtClean="0"/>
               <a:pPr/>
-              <a:t>2026. 04. 16.</a:t>
+              <a:t>2026. 04. 21.</a:t>
             </a:fld>
             <a:endParaRPr lang="hu-HU"/>
           </a:p>
@@ -2247,7 +3327,7 @@
       </p:sp>
       <p:sp>
         <p:nvSpPr>
-          <p:cNvPr id="6" name="Footer Placeholder 5"/>
+          <p:cNvPr id="5" name="Footer Placeholder 4"/>
           <p:cNvSpPr>
             <a:spLocks noGrp="1"/>
           </p:cNvSpPr>
@@ -2266,7 +3346,7 @@
       </p:sp>
       <p:sp>
         <p:nvSpPr>
-          <p:cNvPr id="7" name="Slide Number Placeholder 6"/>
+          <p:cNvPr id="6" name="Slide Number Placeholder 5"/>
           <p:cNvSpPr>
             <a:spLocks noGrp="1"/>
           </p:cNvSpPr>
@@ -2289,6 +3369,11 @@
         </p:txBody>
       </p:sp>
     </p:spTree>
+    <p:extLst>
+      <p:ext uri="{BB962C8B-B14F-4D97-AF65-F5344CB8AC3E}">
+        <p14:creationId xmlns:p14="http://schemas.microsoft.com/office/powerpoint/2010/main" val="488066856"/>
+      </p:ext>
+    </p:extLst>
   </p:cSld>
   <p:clrMapOvr>
     <a:masterClrMapping/>
@@ -2296,9 +3381,9 @@
 </p:sldLayout>
 </file>
 
-<file path=ppt/slideLayouts/slideLayout9.xml><?xml version="1.0" encoding="utf-8"?>
-<p:sldLayout xmlns:a="http://schemas.openxmlformats.org/drawingml/2006/main" xmlns:r="http://schemas.openxmlformats.org/officeDocument/2006/relationships" xmlns:p="http://schemas.openxmlformats.org/presentationml/2006/main" type="picTx" preserve="1">
-  <p:cSld name="Picture with Caption">
+<file path=ppt/slideLayouts/slideLayout4.xml><?xml version="1.0" encoding="utf-8"?>
+<p:sldLayout xmlns:a="http://schemas.openxmlformats.org/drawingml/2006/main" xmlns:r="http://schemas.openxmlformats.org/officeDocument/2006/relationships" xmlns:p="http://schemas.openxmlformats.org/presentationml/2006/main" type="twoObj" preserve="1">
+  <p:cSld name="2 tartalomrész">
     <p:spTree>
       <p:nvGrpSpPr>
         <p:cNvPr id="1" name=""/>
@@ -2325,149 +3410,193 @@
         </p:nvSpPr>
         <p:spPr>
           <a:xfrm>
-            <a:off x="1792288" y="4800600"/>
-            <a:ext cx="5486400" cy="566738"/>
+            <a:off x="609600" y="609600"/>
+            <a:ext cx="6347714" cy="1320800"/>
           </a:xfrm>
         </p:spPr>
         <p:txBody>
-          <a:bodyPr anchor="b"/>
-          <a:lstStyle>
-            <a:lvl1pPr algn="l">
-              <a:defRPr sz="2000" b="1"/>
-            </a:lvl1pPr>
-          </a:lstStyle>
-          <a:p>
-            <a:r>
-              <a:rPr lang="en-US" smtClean="0"/>
-              <a:t>Click to edit Master title style</a:t>
-            </a:r>
-            <a:endParaRPr lang="hu-HU"/>
-          </a:p>
-        </p:txBody>
-      </p:sp>
-      <p:sp>
-        <p:nvSpPr>
-          <p:cNvPr id="3" name="Picture Placeholder 2"/>
-          <p:cNvSpPr>
-            <a:spLocks noGrp="1"/>
-          </p:cNvSpPr>
-          <p:nvPr>
-            <p:ph type="pic" idx="1"/>
+          <a:bodyPr/>
+          <a:lstStyle/>
+          <a:p>
+            <a:r>
+              <a:rPr lang="hu-HU"/>
+              <a:t>Mintacím szerkesztése</a:t>
+            </a:r>
+            <a:endParaRPr lang="en-US" dirty="0"/>
+          </a:p>
+        </p:txBody>
+      </p:sp>
+      <p:sp>
+        <p:nvSpPr>
+          <p:cNvPr id="3" name="Content Placeholder 2"/>
+          <p:cNvSpPr>
+            <a:spLocks noGrp="1"/>
+          </p:cNvSpPr>
+          <p:nvPr>
+            <p:ph sz="half" idx="1"/>
           </p:nvPr>
         </p:nvSpPr>
         <p:spPr>
           <a:xfrm>
-            <a:off x="1792288" y="612775"/>
-            <a:ext cx="5486400" cy="4114800"/>
+            <a:off x="609600" y="2160589"/>
+            <a:ext cx="3088109" cy="3880772"/>
           </a:xfrm>
         </p:spPr>
         <p:txBody>
-          <a:bodyPr/>
+          <a:bodyPr>
+            <a:normAutofit/>
+          </a:bodyPr>
           <a:lstStyle>
-            <a:lvl1pPr marL="0" indent="0">
-              <a:buNone/>
-              <a:defRPr sz="3200"/>
+            <a:lvl1pPr>
+              <a:defRPr sz="1800"/>
             </a:lvl1pPr>
-            <a:lvl2pPr marL="457200" indent="0">
-              <a:buNone/>
-              <a:defRPr sz="2800"/>
+            <a:lvl2pPr>
+              <a:defRPr sz="1600"/>
             </a:lvl2pPr>
-            <a:lvl3pPr marL="914400" indent="0">
-              <a:buNone/>
-              <a:defRPr sz="2400"/>
+            <a:lvl3pPr>
+              <a:defRPr sz="1400"/>
             </a:lvl3pPr>
-            <a:lvl4pPr marL="1371600" indent="0">
-              <a:buNone/>
-              <a:defRPr sz="2000"/>
+            <a:lvl4pPr>
+              <a:defRPr sz="1200"/>
             </a:lvl4pPr>
-            <a:lvl5pPr marL="1828800" indent="0">
-              <a:buNone/>
-              <a:defRPr sz="2000"/>
+            <a:lvl5pPr>
+              <a:defRPr sz="1200"/>
             </a:lvl5pPr>
-            <a:lvl6pPr marL="2286000" indent="0">
-              <a:buNone/>
-              <a:defRPr sz="2000"/>
+            <a:lvl6pPr>
+              <a:defRPr sz="1200"/>
             </a:lvl6pPr>
-            <a:lvl7pPr marL="2743200" indent="0">
-              <a:buNone/>
-              <a:defRPr sz="2000"/>
+            <a:lvl7pPr>
+              <a:defRPr sz="1200"/>
             </a:lvl7pPr>
-            <a:lvl8pPr marL="3200400" indent="0">
-              <a:buNone/>
-              <a:defRPr sz="2000"/>
+            <a:lvl8pPr>
+              <a:defRPr sz="1200"/>
             </a:lvl8pPr>
-            <a:lvl9pPr marL="3657600" indent="0">
-              <a:buNone/>
-              <a:defRPr sz="2000"/>
+            <a:lvl9pPr>
+              <a:defRPr sz="1200"/>
             </a:lvl9pPr>
           </a:lstStyle>
           <a:p>
-            <a:endParaRPr lang="hu-HU"/>
-          </a:p>
-        </p:txBody>
-      </p:sp>
-      <p:sp>
-        <p:nvSpPr>
-          <p:cNvPr id="4" name="Text Placeholder 3"/>
-          <p:cNvSpPr>
-            <a:spLocks noGrp="1"/>
-          </p:cNvSpPr>
-          <p:nvPr>
-            <p:ph type="body" sz="half" idx="2"/>
+            <a:pPr lvl="0"/>
+            <a:r>
+              <a:rPr lang="hu-HU"/>
+              <a:t>Mintaszöveg szerkesztése</a:t>
+            </a:r>
+          </a:p>
+          <a:p>
+            <a:pPr lvl="1"/>
+            <a:r>
+              <a:rPr lang="hu-HU"/>
+              <a:t>Második szint</a:t>
+            </a:r>
+          </a:p>
+          <a:p>
+            <a:pPr lvl="2"/>
+            <a:r>
+              <a:rPr lang="hu-HU"/>
+              <a:t>Harmadik szint</a:t>
+            </a:r>
+          </a:p>
+          <a:p>
+            <a:pPr lvl="3"/>
+            <a:r>
+              <a:rPr lang="hu-HU"/>
+              <a:t>Negyedik szint</a:t>
+            </a:r>
+          </a:p>
+          <a:p>
+            <a:pPr lvl="4"/>
+            <a:r>
+              <a:rPr lang="hu-HU"/>
+              <a:t>Ötödik szint</a:t>
+            </a:r>
+            <a:endParaRPr lang="en-US" dirty="0"/>
+          </a:p>
+        </p:txBody>
+      </p:sp>
+      <p:sp>
+        <p:nvSpPr>
+          <p:cNvPr id="4" name="Content Placeholder 3"/>
+          <p:cNvSpPr>
+            <a:spLocks noGrp="1"/>
+          </p:cNvSpPr>
+          <p:nvPr>
+            <p:ph sz="half" idx="2"/>
           </p:nvPr>
         </p:nvSpPr>
         <p:spPr>
           <a:xfrm>
-            <a:off x="1792288" y="5367338"/>
-            <a:ext cx="5486400" cy="804862"/>
+            <a:off x="3869204" y="2160590"/>
+            <a:ext cx="3088110" cy="3880773"/>
           </a:xfrm>
         </p:spPr>
         <p:txBody>
-          <a:bodyPr/>
+          <a:bodyPr>
+            <a:normAutofit/>
+          </a:bodyPr>
           <a:lstStyle>
-            <a:lvl1pPr marL="0" indent="0">
-              <a:buNone/>
+            <a:lvl1pPr>
+              <a:defRPr sz="1800"/>
+            </a:lvl1pPr>
+            <a:lvl2pPr>
+              <a:defRPr sz="1600"/>
+            </a:lvl2pPr>
+            <a:lvl3pPr>
               <a:defRPr sz="1400"/>
-            </a:lvl1pPr>
-            <a:lvl2pPr marL="457200" indent="0">
-              <a:buNone/>
+            </a:lvl3pPr>
+            <a:lvl4pPr>
               <a:defRPr sz="1200"/>
-            </a:lvl2pPr>
-            <a:lvl3pPr marL="914400" indent="0">
-              <a:buNone/>
-              <a:defRPr sz="1000"/>
-            </a:lvl3pPr>
-            <a:lvl4pPr marL="1371600" indent="0">
-              <a:buNone/>
-              <a:defRPr sz="900"/>
             </a:lvl4pPr>
-            <a:lvl5pPr marL="1828800" indent="0">
-              <a:buNone/>
-              <a:defRPr sz="900"/>
+            <a:lvl5pPr>
+              <a:defRPr sz="1200"/>
             </a:lvl5pPr>
-            <a:lvl6pPr marL="2286000" indent="0">
-              <a:buNone/>
-              <a:defRPr sz="900"/>
+            <a:lvl6pPr>
+              <a:defRPr sz="1200"/>
             </a:lvl6pPr>
-            <a:lvl7pPr marL="2743200" indent="0">
-              <a:buNone/>
-              <a:defRPr sz="900"/>
+            <a:lvl7pPr>
+              <a:defRPr sz="1200"/>
             </a:lvl7pPr>
-            <a:lvl8pPr marL="3200400" indent="0">
-              <a:buNone/>
-              <a:defRPr sz="900"/>
+            <a:lvl8pPr>
+              <a:defRPr sz="1200"/>
             </a:lvl8pPr>
-            <a:lvl9pPr marL="3657600" indent="0">
-              <a:buNone/>
-              <a:defRPr sz="900"/>
+            <a:lvl9pPr>
+              <a:defRPr sz="1200"/>
             </a:lvl9pPr>
           </a:lstStyle>
           <a:p>
             <a:pPr lvl="0"/>
             <a:r>
-              <a:rPr lang="en-US" smtClean="0"/>
-              <a:t>Click to edit Master text styles</a:t>
-            </a:r>
+              <a:rPr lang="hu-HU"/>
+              <a:t>Mintaszöveg szerkesztése</a:t>
+            </a:r>
+          </a:p>
+          <a:p>
+            <a:pPr lvl="1"/>
+            <a:r>
+              <a:rPr lang="hu-HU"/>
+              <a:t>Második szint</a:t>
+            </a:r>
+          </a:p>
+          <a:p>
+            <a:pPr lvl="2"/>
+            <a:r>
+              <a:rPr lang="hu-HU"/>
+              <a:t>Harmadik szint</a:t>
+            </a:r>
+          </a:p>
+          <a:p>
+            <a:pPr lvl="3"/>
+            <a:r>
+              <a:rPr lang="hu-HU"/>
+              <a:t>Negyedik szint</a:t>
+            </a:r>
+          </a:p>
+          <a:p>
+            <a:pPr lvl="4"/>
+            <a:r>
+              <a:rPr lang="hu-HU"/>
+              <a:t>Ötödik szint</a:t>
+            </a:r>
+            <a:endParaRPr lang="en-US" dirty="0"/>
           </a:p>
         </p:txBody>
       </p:sp>
@@ -2489,7 +3618,7 @@
             <a:fld id="{7E1B2A62-5D5B-40FD-A574-BFE5DD367BE5}" type="datetimeFigureOut">
               <a:rPr lang="hu-HU" smtClean="0"/>
               <a:pPr/>
-              <a:t>2026. 04. 16.</a:t>
+              <a:t>2026. 04. 21.</a:t>
             </a:fld>
             <a:endParaRPr lang="hu-HU"/>
           </a:p>
@@ -2539,6 +3668,1136 @@
         </p:txBody>
       </p:sp>
     </p:spTree>
+    <p:extLst>
+      <p:ext uri="{BB962C8B-B14F-4D97-AF65-F5344CB8AC3E}">
+        <p14:creationId xmlns:p14="http://schemas.microsoft.com/office/powerpoint/2010/main" val="3873652194"/>
+      </p:ext>
+    </p:extLst>
+  </p:cSld>
+  <p:clrMapOvr>
+    <a:masterClrMapping/>
+  </p:clrMapOvr>
+</p:sldLayout>
+</file>
+
+<file path=ppt/slideLayouts/slideLayout5.xml><?xml version="1.0" encoding="utf-8"?>
+<p:sldLayout xmlns:a="http://schemas.openxmlformats.org/drawingml/2006/main" xmlns:r="http://schemas.openxmlformats.org/officeDocument/2006/relationships" xmlns:p="http://schemas.openxmlformats.org/presentationml/2006/main" type="twoTxTwoObj" preserve="1">
+  <p:cSld name="Összehasonlítás">
+    <p:spTree>
+      <p:nvGrpSpPr>
+        <p:cNvPr id="1" name=""/>
+        <p:cNvGrpSpPr/>
+        <p:nvPr/>
+      </p:nvGrpSpPr>
+      <p:grpSpPr>
+        <a:xfrm>
+          <a:off x="0" y="0"/>
+          <a:ext cx="0" cy="0"/>
+          <a:chOff x="0" y="0"/>
+          <a:chExt cx="0" cy="0"/>
+        </a:xfrm>
+      </p:grpSpPr>
+      <p:sp>
+        <p:nvSpPr>
+          <p:cNvPr id="2" name="Title 1"/>
+          <p:cNvSpPr>
+            <a:spLocks noGrp="1"/>
+          </p:cNvSpPr>
+          <p:nvPr>
+            <p:ph type="title"/>
+          </p:nvPr>
+        </p:nvSpPr>
+        <p:spPr>
+          <a:xfrm>
+            <a:off x="609599" y="609600"/>
+            <a:ext cx="6347713" cy="1320800"/>
+          </a:xfrm>
+        </p:spPr>
+        <p:txBody>
+          <a:bodyPr/>
+          <a:lstStyle>
+            <a:lvl1pPr>
+              <a:defRPr/>
+            </a:lvl1pPr>
+          </a:lstStyle>
+          <a:p>
+            <a:r>
+              <a:rPr lang="hu-HU"/>
+              <a:t>Mintacím szerkesztése</a:t>
+            </a:r>
+            <a:endParaRPr lang="en-US" dirty="0"/>
+          </a:p>
+        </p:txBody>
+      </p:sp>
+      <p:sp>
+        <p:nvSpPr>
+          <p:cNvPr id="3" name="Text Placeholder 2"/>
+          <p:cNvSpPr>
+            <a:spLocks noGrp="1"/>
+          </p:cNvSpPr>
+          <p:nvPr>
+            <p:ph type="body" idx="1"/>
+          </p:nvPr>
+        </p:nvSpPr>
+        <p:spPr>
+          <a:xfrm>
+            <a:off x="609599" y="2160983"/>
+            <a:ext cx="3090672" cy="576262"/>
+          </a:xfrm>
+        </p:spPr>
+        <p:txBody>
+          <a:bodyPr anchor="b">
+            <a:noAutofit/>
+          </a:bodyPr>
+          <a:lstStyle>
+            <a:lvl1pPr marL="0" indent="0">
+              <a:buNone/>
+              <a:defRPr sz="2400" b="0"/>
+            </a:lvl1pPr>
+            <a:lvl2pPr marL="457200" indent="0">
+              <a:buNone/>
+              <a:defRPr sz="2000" b="1"/>
+            </a:lvl2pPr>
+            <a:lvl3pPr marL="914400" indent="0">
+              <a:buNone/>
+              <a:defRPr sz="1800" b="1"/>
+            </a:lvl3pPr>
+            <a:lvl4pPr marL="1371600" indent="0">
+              <a:buNone/>
+              <a:defRPr sz="1600" b="1"/>
+            </a:lvl4pPr>
+            <a:lvl5pPr marL="1828800" indent="0">
+              <a:buNone/>
+              <a:defRPr sz="1600" b="1"/>
+            </a:lvl5pPr>
+            <a:lvl6pPr marL="2286000" indent="0">
+              <a:buNone/>
+              <a:defRPr sz="1600" b="1"/>
+            </a:lvl6pPr>
+            <a:lvl7pPr marL="2743200" indent="0">
+              <a:buNone/>
+              <a:defRPr sz="1600" b="1"/>
+            </a:lvl7pPr>
+            <a:lvl8pPr marL="3200400" indent="0">
+              <a:buNone/>
+              <a:defRPr sz="1600" b="1"/>
+            </a:lvl8pPr>
+            <a:lvl9pPr marL="3657600" indent="0">
+              <a:buNone/>
+              <a:defRPr sz="1600" b="1"/>
+            </a:lvl9pPr>
+          </a:lstStyle>
+          <a:p>
+            <a:pPr lvl="0"/>
+            <a:r>
+              <a:rPr lang="hu-HU"/>
+              <a:t>Mintaszöveg szerkesztése</a:t>
+            </a:r>
+          </a:p>
+        </p:txBody>
+      </p:sp>
+      <p:sp>
+        <p:nvSpPr>
+          <p:cNvPr id="4" name="Content Placeholder 3"/>
+          <p:cNvSpPr>
+            <a:spLocks noGrp="1"/>
+          </p:cNvSpPr>
+          <p:nvPr>
+            <p:ph sz="half" idx="2"/>
+          </p:nvPr>
+        </p:nvSpPr>
+        <p:spPr>
+          <a:xfrm>
+            <a:off x="609599" y="2737246"/>
+            <a:ext cx="3090672" cy="3304117"/>
+          </a:xfrm>
+        </p:spPr>
+        <p:txBody>
+          <a:bodyPr>
+            <a:normAutofit/>
+          </a:bodyPr>
+          <a:lstStyle/>
+          <a:p>
+            <a:pPr lvl="0"/>
+            <a:r>
+              <a:rPr lang="hu-HU"/>
+              <a:t>Mintaszöveg szerkesztése</a:t>
+            </a:r>
+          </a:p>
+          <a:p>
+            <a:pPr lvl="1"/>
+            <a:r>
+              <a:rPr lang="hu-HU"/>
+              <a:t>Második szint</a:t>
+            </a:r>
+          </a:p>
+          <a:p>
+            <a:pPr lvl="2"/>
+            <a:r>
+              <a:rPr lang="hu-HU"/>
+              <a:t>Harmadik szint</a:t>
+            </a:r>
+          </a:p>
+          <a:p>
+            <a:pPr lvl="3"/>
+            <a:r>
+              <a:rPr lang="hu-HU"/>
+              <a:t>Negyedik szint</a:t>
+            </a:r>
+          </a:p>
+          <a:p>
+            <a:pPr lvl="4"/>
+            <a:r>
+              <a:rPr lang="hu-HU"/>
+              <a:t>Ötödik szint</a:t>
+            </a:r>
+            <a:endParaRPr lang="en-US" dirty="0"/>
+          </a:p>
+        </p:txBody>
+      </p:sp>
+      <p:sp>
+        <p:nvSpPr>
+          <p:cNvPr id="5" name="Text Placeholder 4"/>
+          <p:cNvSpPr>
+            <a:spLocks noGrp="1"/>
+          </p:cNvSpPr>
+          <p:nvPr>
+            <p:ph type="body" sz="quarter" idx="3"/>
+          </p:nvPr>
+        </p:nvSpPr>
+        <p:spPr>
+          <a:xfrm>
+            <a:off x="3866640" y="2160983"/>
+            <a:ext cx="3090672" cy="576262"/>
+          </a:xfrm>
+        </p:spPr>
+        <p:txBody>
+          <a:bodyPr anchor="b">
+            <a:noAutofit/>
+          </a:bodyPr>
+          <a:lstStyle>
+            <a:lvl1pPr marL="0" indent="0">
+              <a:buNone/>
+              <a:defRPr sz="2400" b="0"/>
+            </a:lvl1pPr>
+            <a:lvl2pPr marL="457200" indent="0">
+              <a:buNone/>
+              <a:defRPr sz="2000" b="1"/>
+            </a:lvl2pPr>
+            <a:lvl3pPr marL="914400" indent="0">
+              <a:buNone/>
+              <a:defRPr sz="1800" b="1"/>
+            </a:lvl3pPr>
+            <a:lvl4pPr marL="1371600" indent="0">
+              <a:buNone/>
+              <a:defRPr sz="1600" b="1"/>
+            </a:lvl4pPr>
+            <a:lvl5pPr marL="1828800" indent="0">
+              <a:buNone/>
+              <a:defRPr sz="1600" b="1"/>
+            </a:lvl5pPr>
+            <a:lvl6pPr marL="2286000" indent="0">
+              <a:buNone/>
+              <a:defRPr sz="1600" b="1"/>
+            </a:lvl6pPr>
+            <a:lvl7pPr marL="2743200" indent="0">
+              <a:buNone/>
+              <a:defRPr sz="1600" b="1"/>
+            </a:lvl7pPr>
+            <a:lvl8pPr marL="3200400" indent="0">
+              <a:buNone/>
+              <a:defRPr sz="1600" b="1"/>
+            </a:lvl8pPr>
+            <a:lvl9pPr marL="3657600" indent="0">
+              <a:buNone/>
+              <a:defRPr sz="1600" b="1"/>
+            </a:lvl9pPr>
+          </a:lstStyle>
+          <a:p>
+            <a:pPr lvl="0"/>
+            <a:r>
+              <a:rPr lang="hu-HU"/>
+              <a:t>Mintaszöveg szerkesztése</a:t>
+            </a:r>
+          </a:p>
+        </p:txBody>
+      </p:sp>
+      <p:sp>
+        <p:nvSpPr>
+          <p:cNvPr id="6" name="Content Placeholder 5"/>
+          <p:cNvSpPr>
+            <a:spLocks noGrp="1"/>
+          </p:cNvSpPr>
+          <p:nvPr>
+            <p:ph sz="quarter" idx="4"/>
+          </p:nvPr>
+        </p:nvSpPr>
+        <p:spPr>
+          <a:xfrm>
+            <a:off x="3866640" y="2737246"/>
+            <a:ext cx="3090672" cy="3304117"/>
+          </a:xfrm>
+        </p:spPr>
+        <p:txBody>
+          <a:bodyPr>
+            <a:normAutofit/>
+          </a:bodyPr>
+          <a:lstStyle/>
+          <a:p>
+            <a:pPr lvl="0"/>
+            <a:r>
+              <a:rPr lang="hu-HU"/>
+              <a:t>Mintaszöveg szerkesztése</a:t>
+            </a:r>
+          </a:p>
+          <a:p>
+            <a:pPr lvl="1"/>
+            <a:r>
+              <a:rPr lang="hu-HU"/>
+              <a:t>Második szint</a:t>
+            </a:r>
+          </a:p>
+          <a:p>
+            <a:pPr lvl="2"/>
+            <a:r>
+              <a:rPr lang="hu-HU"/>
+              <a:t>Harmadik szint</a:t>
+            </a:r>
+          </a:p>
+          <a:p>
+            <a:pPr lvl="3"/>
+            <a:r>
+              <a:rPr lang="hu-HU"/>
+              <a:t>Negyedik szint</a:t>
+            </a:r>
+          </a:p>
+          <a:p>
+            <a:pPr lvl="4"/>
+            <a:r>
+              <a:rPr lang="hu-HU"/>
+              <a:t>Ötödik szint</a:t>
+            </a:r>
+            <a:endParaRPr lang="en-US" dirty="0"/>
+          </a:p>
+        </p:txBody>
+      </p:sp>
+      <p:sp>
+        <p:nvSpPr>
+          <p:cNvPr id="7" name="Date Placeholder 6"/>
+          <p:cNvSpPr>
+            <a:spLocks noGrp="1"/>
+          </p:cNvSpPr>
+          <p:nvPr>
+            <p:ph type="dt" sz="half" idx="10"/>
+          </p:nvPr>
+        </p:nvSpPr>
+        <p:spPr/>
+        <p:txBody>
+          <a:bodyPr/>
+          <a:lstStyle/>
+          <a:p>
+            <a:fld id="{7E1B2A62-5D5B-40FD-A574-BFE5DD367BE5}" type="datetimeFigureOut">
+              <a:rPr lang="hu-HU" smtClean="0"/>
+              <a:pPr/>
+              <a:t>2026. 04. 21.</a:t>
+            </a:fld>
+            <a:endParaRPr lang="hu-HU"/>
+          </a:p>
+        </p:txBody>
+      </p:sp>
+      <p:sp>
+        <p:nvSpPr>
+          <p:cNvPr id="8" name="Footer Placeholder 7"/>
+          <p:cNvSpPr>
+            <a:spLocks noGrp="1"/>
+          </p:cNvSpPr>
+          <p:nvPr>
+            <p:ph type="ftr" sz="quarter" idx="11"/>
+          </p:nvPr>
+        </p:nvSpPr>
+        <p:spPr/>
+        <p:txBody>
+          <a:bodyPr/>
+          <a:lstStyle/>
+          <a:p>
+            <a:endParaRPr lang="hu-HU"/>
+          </a:p>
+        </p:txBody>
+      </p:sp>
+      <p:sp>
+        <p:nvSpPr>
+          <p:cNvPr id="9" name="Slide Number Placeholder 8"/>
+          <p:cNvSpPr>
+            <a:spLocks noGrp="1"/>
+          </p:cNvSpPr>
+          <p:nvPr>
+            <p:ph type="sldNum" sz="quarter" idx="12"/>
+          </p:nvPr>
+        </p:nvSpPr>
+        <p:spPr/>
+        <p:txBody>
+          <a:bodyPr/>
+          <a:lstStyle/>
+          <a:p>
+            <a:fld id="{63DFB246-903F-4E0C-B369-33CA455F630D}" type="slidenum">
+              <a:rPr lang="hu-HU" smtClean="0"/>
+              <a:pPr/>
+              <a:t>‹#›</a:t>
+            </a:fld>
+            <a:endParaRPr lang="hu-HU"/>
+          </a:p>
+        </p:txBody>
+      </p:sp>
+    </p:spTree>
+    <p:extLst>
+      <p:ext uri="{BB962C8B-B14F-4D97-AF65-F5344CB8AC3E}">
+        <p14:creationId xmlns:p14="http://schemas.microsoft.com/office/powerpoint/2010/main" val="2017929926"/>
+      </p:ext>
+    </p:extLst>
+  </p:cSld>
+  <p:clrMapOvr>
+    <a:masterClrMapping/>
+  </p:clrMapOvr>
+</p:sldLayout>
+</file>
+
+<file path=ppt/slideLayouts/slideLayout6.xml><?xml version="1.0" encoding="utf-8"?>
+<p:sldLayout xmlns:a="http://schemas.openxmlformats.org/drawingml/2006/main" xmlns:r="http://schemas.openxmlformats.org/officeDocument/2006/relationships" xmlns:p="http://schemas.openxmlformats.org/presentationml/2006/main" type="titleOnly" preserve="1">
+  <p:cSld name="Csak cím">
+    <p:spTree>
+      <p:nvGrpSpPr>
+        <p:cNvPr id="1" name=""/>
+        <p:cNvGrpSpPr/>
+        <p:nvPr/>
+      </p:nvGrpSpPr>
+      <p:grpSpPr>
+        <a:xfrm>
+          <a:off x="0" y="0"/>
+          <a:ext cx="0" cy="0"/>
+          <a:chOff x="0" y="0"/>
+          <a:chExt cx="0" cy="0"/>
+        </a:xfrm>
+      </p:grpSpPr>
+      <p:sp>
+        <p:nvSpPr>
+          <p:cNvPr id="2" name="Title 1"/>
+          <p:cNvSpPr>
+            <a:spLocks noGrp="1"/>
+          </p:cNvSpPr>
+          <p:nvPr>
+            <p:ph type="title"/>
+          </p:nvPr>
+        </p:nvSpPr>
+        <p:spPr>
+          <a:xfrm>
+            <a:off x="609599" y="609600"/>
+            <a:ext cx="6347714" cy="1320800"/>
+          </a:xfrm>
+        </p:spPr>
+        <p:txBody>
+          <a:bodyPr/>
+          <a:lstStyle/>
+          <a:p>
+            <a:r>
+              <a:rPr lang="hu-HU"/>
+              <a:t>Mintacím szerkesztése</a:t>
+            </a:r>
+            <a:endParaRPr lang="en-US" dirty="0"/>
+          </a:p>
+        </p:txBody>
+      </p:sp>
+      <p:sp>
+        <p:nvSpPr>
+          <p:cNvPr id="3" name="Date Placeholder 2"/>
+          <p:cNvSpPr>
+            <a:spLocks noGrp="1"/>
+          </p:cNvSpPr>
+          <p:nvPr>
+            <p:ph type="dt" sz="half" idx="10"/>
+          </p:nvPr>
+        </p:nvSpPr>
+        <p:spPr/>
+        <p:txBody>
+          <a:bodyPr/>
+          <a:lstStyle/>
+          <a:p>
+            <a:fld id="{7E1B2A62-5D5B-40FD-A574-BFE5DD367BE5}" type="datetimeFigureOut">
+              <a:rPr lang="hu-HU" smtClean="0"/>
+              <a:pPr/>
+              <a:t>2026. 04. 21.</a:t>
+            </a:fld>
+            <a:endParaRPr lang="hu-HU"/>
+          </a:p>
+        </p:txBody>
+      </p:sp>
+      <p:sp>
+        <p:nvSpPr>
+          <p:cNvPr id="4" name="Footer Placeholder 3"/>
+          <p:cNvSpPr>
+            <a:spLocks noGrp="1"/>
+          </p:cNvSpPr>
+          <p:nvPr>
+            <p:ph type="ftr" sz="quarter" idx="11"/>
+          </p:nvPr>
+        </p:nvSpPr>
+        <p:spPr/>
+        <p:txBody>
+          <a:bodyPr/>
+          <a:lstStyle/>
+          <a:p>
+            <a:endParaRPr lang="hu-HU"/>
+          </a:p>
+        </p:txBody>
+      </p:sp>
+      <p:sp>
+        <p:nvSpPr>
+          <p:cNvPr id="5" name="Slide Number Placeholder 4"/>
+          <p:cNvSpPr>
+            <a:spLocks noGrp="1"/>
+          </p:cNvSpPr>
+          <p:nvPr>
+            <p:ph type="sldNum" sz="quarter" idx="12"/>
+          </p:nvPr>
+        </p:nvSpPr>
+        <p:spPr/>
+        <p:txBody>
+          <a:bodyPr/>
+          <a:lstStyle/>
+          <a:p>
+            <a:fld id="{63DFB246-903F-4E0C-B369-33CA455F630D}" type="slidenum">
+              <a:rPr lang="hu-HU" smtClean="0"/>
+              <a:pPr/>
+              <a:t>‹#›</a:t>
+            </a:fld>
+            <a:endParaRPr lang="hu-HU"/>
+          </a:p>
+        </p:txBody>
+      </p:sp>
+    </p:spTree>
+    <p:extLst>
+      <p:ext uri="{BB962C8B-B14F-4D97-AF65-F5344CB8AC3E}">
+        <p14:creationId xmlns:p14="http://schemas.microsoft.com/office/powerpoint/2010/main" val="481938020"/>
+      </p:ext>
+    </p:extLst>
+  </p:cSld>
+  <p:clrMapOvr>
+    <a:masterClrMapping/>
+  </p:clrMapOvr>
+</p:sldLayout>
+</file>
+
+<file path=ppt/slideLayouts/slideLayout7.xml><?xml version="1.0" encoding="utf-8"?>
+<p:sldLayout xmlns:a="http://schemas.openxmlformats.org/drawingml/2006/main" xmlns:r="http://schemas.openxmlformats.org/officeDocument/2006/relationships" xmlns:p="http://schemas.openxmlformats.org/presentationml/2006/main" type="blank" preserve="1">
+  <p:cSld name="Üres">
+    <p:spTree>
+      <p:nvGrpSpPr>
+        <p:cNvPr id="1" name=""/>
+        <p:cNvGrpSpPr/>
+        <p:nvPr/>
+      </p:nvGrpSpPr>
+      <p:grpSpPr>
+        <a:xfrm>
+          <a:off x="0" y="0"/>
+          <a:ext cx="0" cy="0"/>
+          <a:chOff x="0" y="0"/>
+          <a:chExt cx="0" cy="0"/>
+        </a:xfrm>
+      </p:grpSpPr>
+      <p:sp>
+        <p:nvSpPr>
+          <p:cNvPr id="2" name="Date Placeholder 1"/>
+          <p:cNvSpPr>
+            <a:spLocks noGrp="1"/>
+          </p:cNvSpPr>
+          <p:nvPr>
+            <p:ph type="dt" sz="half" idx="10"/>
+          </p:nvPr>
+        </p:nvSpPr>
+        <p:spPr/>
+        <p:txBody>
+          <a:bodyPr/>
+          <a:lstStyle/>
+          <a:p>
+            <a:fld id="{7E1B2A62-5D5B-40FD-A574-BFE5DD367BE5}" type="datetimeFigureOut">
+              <a:rPr lang="hu-HU" smtClean="0"/>
+              <a:pPr/>
+              <a:t>2026. 04. 21.</a:t>
+            </a:fld>
+            <a:endParaRPr lang="hu-HU"/>
+          </a:p>
+        </p:txBody>
+      </p:sp>
+      <p:sp>
+        <p:nvSpPr>
+          <p:cNvPr id="3" name="Footer Placeholder 2"/>
+          <p:cNvSpPr>
+            <a:spLocks noGrp="1"/>
+          </p:cNvSpPr>
+          <p:nvPr>
+            <p:ph type="ftr" sz="quarter" idx="11"/>
+          </p:nvPr>
+        </p:nvSpPr>
+        <p:spPr/>
+        <p:txBody>
+          <a:bodyPr/>
+          <a:lstStyle/>
+          <a:p>
+            <a:endParaRPr lang="hu-HU"/>
+          </a:p>
+        </p:txBody>
+      </p:sp>
+      <p:sp>
+        <p:nvSpPr>
+          <p:cNvPr id="4" name="Slide Number Placeholder 3"/>
+          <p:cNvSpPr>
+            <a:spLocks noGrp="1"/>
+          </p:cNvSpPr>
+          <p:nvPr>
+            <p:ph type="sldNum" sz="quarter" idx="12"/>
+          </p:nvPr>
+        </p:nvSpPr>
+        <p:spPr/>
+        <p:txBody>
+          <a:bodyPr/>
+          <a:lstStyle/>
+          <a:p>
+            <a:fld id="{63DFB246-903F-4E0C-B369-33CA455F630D}" type="slidenum">
+              <a:rPr lang="hu-HU" smtClean="0"/>
+              <a:pPr/>
+              <a:t>‹#›</a:t>
+            </a:fld>
+            <a:endParaRPr lang="hu-HU"/>
+          </a:p>
+        </p:txBody>
+      </p:sp>
+    </p:spTree>
+    <p:extLst>
+      <p:ext uri="{BB962C8B-B14F-4D97-AF65-F5344CB8AC3E}">
+        <p14:creationId xmlns:p14="http://schemas.microsoft.com/office/powerpoint/2010/main" val="3224844826"/>
+      </p:ext>
+    </p:extLst>
+  </p:cSld>
+  <p:clrMapOvr>
+    <a:masterClrMapping/>
+  </p:clrMapOvr>
+</p:sldLayout>
+</file>
+
+<file path=ppt/slideLayouts/slideLayout8.xml><?xml version="1.0" encoding="utf-8"?>
+<p:sldLayout xmlns:a="http://schemas.openxmlformats.org/drawingml/2006/main" xmlns:r="http://schemas.openxmlformats.org/officeDocument/2006/relationships" xmlns:p="http://schemas.openxmlformats.org/presentationml/2006/main" type="objTx" preserve="1">
+  <p:cSld name="Tartalomrész képaláírással">
+    <p:spTree>
+      <p:nvGrpSpPr>
+        <p:cNvPr id="1" name=""/>
+        <p:cNvGrpSpPr/>
+        <p:nvPr/>
+      </p:nvGrpSpPr>
+      <p:grpSpPr>
+        <a:xfrm>
+          <a:off x="0" y="0"/>
+          <a:ext cx="0" cy="0"/>
+          <a:chOff x="0" y="0"/>
+          <a:chExt cx="0" cy="0"/>
+        </a:xfrm>
+      </p:grpSpPr>
+      <p:sp>
+        <p:nvSpPr>
+          <p:cNvPr id="2" name="Title 1"/>
+          <p:cNvSpPr>
+            <a:spLocks noGrp="1"/>
+          </p:cNvSpPr>
+          <p:nvPr>
+            <p:ph type="title"/>
+          </p:nvPr>
+        </p:nvSpPr>
+        <p:spPr>
+          <a:xfrm>
+            <a:off x="609599" y="1498604"/>
+            <a:ext cx="2790182" cy="1278466"/>
+          </a:xfrm>
+        </p:spPr>
+        <p:txBody>
+          <a:bodyPr anchor="b">
+            <a:normAutofit/>
+          </a:bodyPr>
+          <a:lstStyle>
+            <a:lvl1pPr>
+              <a:defRPr sz="2000"/>
+            </a:lvl1pPr>
+          </a:lstStyle>
+          <a:p>
+            <a:r>
+              <a:rPr lang="hu-HU"/>
+              <a:t>Mintacím szerkesztése</a:t>
+            </a:r>
+            <a:endParaRPr lang="en-US" dirty="0"/>
+          </a:p>
+        </p:txBody>
+      </p:sp>
+      <p:sp>
+        <p:nvSpPr>
+          <p:cNvPr id="3" name="Content Placeholder 2"/>
+          <p:cNvSpPr>
+            <a:spLocks noGrp="1"/>
+          </p:cNvSpPr>
+          <p:nvPr>
+            <p:ph idx="1"/>
+          </p:nvPr>
+        </p:nvSpPr>
+        <p:spPr>
+          <a:xfrm>
+            <a:off x="3571275" y="514925"/>
+            <a:ext cx="3386037" cy="5526437"/>
+          </a:xfrm>
+        </p:spPr>
+        <p:txBody>
+          <a:bodyPr>
+            <a:normAutofit/>
+          </a:bodyPr>
+          <a:lstStyle/>
+          <a:p>
+            <a:pPr lvl="0"/>
+            <a:r>
+              <a:rPr lang="hu-HU"/>
+              <a:t>Mintaszöveg szerkesztése</a:t>
+            </a:r>
+          </a:p>
+          <a:p>
+            <a:pPr lvl="1"/>
+            <a:r>
+              <a:rPr lang="hu-HU"/>
+              <a:t>Második szint</a:t>
+            </a:r>
+          </a:p>
+          <a:p>
+            <a:pPr lvl="2"/>
+            <a:r>
+              <a:rPr lang="hu-HU"/>
+              <a:t>Harmadik szint</a:t>
+            </a:r>
+          </a:p>
+          <a:p>
+            <a:pPr lvl="3"/>
+            <a:r>
+              <a:rPr lang="hu-HU"/>
+              <a:t>Negyedik szint</a:t>
+            </a:r>
+          </a:p>
+          <a:p>
+            <a:pPr lvl="4"/>
+            <a:r>
+              <a:rPr lang="hu-HU"/>
+              <a:t>Ötödik szint</a:t>
+            </a:r>
+            <a:endParaRPr lang="en-US" dirty="0"/>
+          </a:p>
+        </p:txBody>
+      </p:sp>
+      <p:sp>
+        <p:nvSpPr>
+          <p:cNvPr id="4" name="Text Placeholder 3"/>
+          <p:cNvSpPr>
+            <a:spLocks noGrp="1"/>
+          </p:cNvSpPr>
+          <p:nvPr>
+            <p:ph type="body" sz="half" idx="2"/>
+          </p:nvPr>
+        </p:nvSpPr>
+        <p:spPr>
+          <a:xfrm>
+            <a:off x="609599" y="2777069"/>
+            <a:ext cx="2790182" cy="2584449"/>
+          </a:xfrm>
+        </p:spPr>
+        <p:txBody>
+          <a:bodyPr>
+            <a:normAutofit/>
+          </a:bodyPr>
+          <a:lstStyle>
+            <a:lvl1pPr marL="0" indent="0">
+              <a:buNone/>
+              <a:defRPr sz="1400"/>
+            </a:lvl1pPr>
+            <a:lvl2pPr marL="342900" indent="0">
+              <a:buNone/>
+              <a:defRPr sz="1050"/>
+            </a:lvl2pPr>
+            <a:lvl3pPr marL="685800" indent="0">
+              <a:buNone/>
+              <a:defRPr sz="900"/>
+            </a:lvl3pPr>
+            <a:lvl4pPr marL="1028700" indent="0">
+              <a:buNone/>
+              <a:defRPr sz="750"/>
+            </a:lvl4pPr>
+            <a:lvl5pPr marL="1371600" indent="0">
+              <a:buNone/>
+              <a:defRPr sz="750"/>
+            </a:lvl5pPr>
+            <a:lvl6pPr marL="1714500" indent="0">
+              <a:buNone/>
+              <a:defRPr sz="750"/>
+            </a:lvl6pPr>
+            <a:lvl7pPr marL="2057400" indent="0">
+              <a:buNone/>
+              <a:defRPr sz="750"/>
+            </a:lvl7pPr>
+            <a:lvl8pPr marL="2400300" indent="0">
+              <a:buNone/>
+              <a:defRPr sz="750"/>
+            </a:lvl8pPr>
+            <a:lvl9pPr marL="2743200" indent="0">
+              <a:buNone/>
+              <a:defRPr sz="750"/>
+            </a:lvl9pPr>
+          </a:lstStyle>
+          <a:p>
+            <a:pPr lvl="0"/>
+            <a:r>
+              <a:rPr lang="hu-HU"/>
+              <a:t>Mintaszöveg szerkesztése</a:t>
+            </a:r>
+          </a:p>
+        </p:txBody>
+      </p:sp>
+      <p:sp>
+        <p:nvSpPr>
+          <p:cNvPr id="5" name="Date Placeholder 4"/>
+          <p:cNvSpPr>
+            <a:spLocks noGrp="1"/>
+          </p:cNvSpPr>
+          <p:nvPr>
+            <p:ph type="dt" sz="half" idx="10"/>
+          </p:nvPr>
+        </p:nvSpPr>
+        <p:spPr/>
+        <p:txBody>
+          <a:bodyPr/>
+          <a:lstStyle/>
+          <a:p>
+            <a:fld id="{7E1B2A62-5D5B-40FD-A574-BFE5DD367BE5}" type="datetimeFigureOut">
+              <a:rPr lang="hu-HU" smtClean="0"/>
+              <a:pPr/>
+              <a:t>2026. 04. 21.</a:t>
+            </a:fld>
+            <a:endParaRPr lang="hu-HU"/>
+          </a:p>
+        </p:txBody>
+      </p:sp>
+      <p:sp>
+        <p:nvSpPr>
+          <p:cNvPr id="6" name="Footer Placeholder 5"/>
+          <p:cNvSpPr>
+            <a:spLocks noGrp="1"/>
+          </p:cNvSpPr>
+          <p:nvPr>
+            <p:ph type="ftr" sz="quarter" idx="11"/>
+          </p:nvPr>
+        </p:nvSpPr>
+        <p:spPr/>
+        <p:txBody>
+          <a:bodyPr/>
+          <a:lstStyle/>
+          <a:p>
+            <a:endParaRPr lang="hu-HU"/>
+          </a:p>
+        </p:txBody>
+      </p:sp>
+      <p:sp>
+        <p:nvSpPr>
+          <p:cNvPr id="7" name="Slide Number Placeholder 6"/>
+          <p:cNvSpPr>
+            <a:spLocks noGrp="1"/>
+          </p:cNvSpPr>
+          <p:nvPr>
+            <p:ph type="sldNum" sz="quarter" idx="12"/>
+          </p:nvPr>
+        </p:nvSpPr>
+        <p:spPr/>
+        <p:txBody>
+          <a:bodyPr/>
+          <a:lstStyle/>
+          <a:p>
+            <a:fld id="{63DFB246-903F-4E0C-B369-33CA455F630D}" type="slidenum">
+              <a:rPr lang="hu-HU" smtClean="0"/>
+              <a:pPr/>
+              <a:t>‹#›</a:t>
+            </a:fld>
+            <a:endParaRPr lang="hu-HU"/>
+          </a:p>
+        </p:txBody>
+      </p:sp>
+    </p:spTree>
+    <p:extLst>
+      <p:ext uri="{BB962C8B-B14F-4D97-AF65-F5344CB8AC3E}">
+        <p14:creationId xmlns:p14="http://schemas.microsoft.com/office/powerpoint/2010/main" val="3975097974"/>
+      </p:ext>
+    </p:extLst>
+  </p:cSld>
+  <p:clrMapOvr>
+    <a:masterClrMapping/>
+  </p:clrMapOvr>
+</p:sldLayout>
+</file>
+
+<file path=ppt/slideLayouts/slideLayout9.xml><?xml version="1.0" encoding="utf-8"?>
+<p:sldLayout xmlns:a="http://schemas.openxmlformats.org/drawingml/2006/main" xmlns:r="http://schemas.openxmlformats.org/officeDocument/2006/relationships" xmlns:p="http://schemas.openxmlformats.org/presentationml/2006/main" type="picTx" preserve="1">
+  <p:cSld name="Kép képaláírással">
+    <p:spTree>
+      <p:nvGrpSpPr>
+        <p:cNvPr id="1" name=""/>
+        <p:cNvGrpSpPr/>
+        <p:nvPr/>
+      </p:nvGrpSpPr>
+      <p:grpSpPr>
+        <a:xfrm>
+          <a:off x="0" y="0"/>
+          <a:ext cx="0" cy="0"/>
+          <a:chOff x="0" y="0"/>
+          <a:chExt cx="0" cy="0"/>
+        </a:xfrm>
+      </p:grpSpPr>
+      <p:sp>
+        <p:nvSpPr>
+          <p:cNvPr id="2" name="Title 1"/>
+          <p:cNvSpPr>
+            <a:spLocks noGrp="1"/>
+          </p:cNvSpPr>
+          <p:nvPr>
+            <p:ph type="title"/>
+          </p:nvPr>
+        </p:nvSpPr>
+        <p:spPr>
+          <a:xfrm>
+            <a:off x="609599" y="4800600"/>
+            <a:ext cx="6347714" cy="566738"/>
+          </a:xfrm>
+        </p:spPr>
+        <p:txBody>
+          <a:bodyPr anchor="b">
+            <a:normAutofit/>
+          </a:bodyPr>
+          <a:lstStyle>
+            <a:lvl1pPr algn="l">
+              <a:defRPr sz="2400" b="0"/>
+            </a:lvl1pPr>
+          </a:lstStyle>
+          <a:p>
+            <a:r>
+              <a:rPr lang="hu-HU"/>
+              <a:t>Mintacím szerkesztése</a:t>
+            </a:r>
+            <a:endParaRPr lang="en-US" dirty="0"/>
+          </a:p>
+        </p:txBody>
+      </p:sp>
+      <p:sp>
+        <p:nvSpPr>
+          <p:cNvPr id="3" name="Picture Placeholder 2"/>
+          <p:cNvSpPr>
+            <a:spLocks noGrp="1" noChangeAspect="1"/>
+          </p:cNvSpPr>
+          <p:nvPr>
+            <p:ph type="pic" idx="1"/>
+          </p:nvPr>
+        </p:nvSpPr>
+        <p:spPr>
+          <a:xfrm>
+            <a:off x="609599" y="609600"/>
+            <a:ext cx="6347714" cy="3845718"/>
+          </a:xfrm>
+        </p:spPr>
+        <p:txBody>
+          <a:bodyPr anchor="t">
+            <a:normAutofit/>
+          </a:bodyPr>
+          <a:lstStyle>
+            <a:lvl1pPr marL="0" indent="0" algn="ctr">
+              <a:buNone/>
+              <a:defRPr sz="1600"/>
+            </a:lvl1pPr>
+            <a:lvl2pPr marL="457200" indent="0">
+              <a:buNone/>
+              <a:defRPr sz="1600"/>
+            </a:lvl2pPr>
+            <a:lvl3pPr marL="914400" indent="0">
+              <a:buNone/>
+              <a:defRPr sz="1600"/>
+            </a:lvl3pPr>
+            <a:lvl4pPr marL="1371600" indent="0">
+              <a:buNone/>
+              <a:defRPr sz="1600"/>
+            </a:lvl4pPr>
+            <a:lvl5pPr marL="1828800" indent="0">
+              <a:buNone/>
+              <a:defRPr sz="1600"/>
+            </a:lvl5pPr>
+            <a:lvl6pPr marL="2286000" indent="0">
+              <a:buNone/>
+              <a:defRPr sz="1600"/>
+            </a:lvl6pPr>
+            <a:lvl7pPr marL="2743200" indent="0">
+              <a:buNone/>
+              <a:defRPr sz="1600"/>
+            </a:lvl7pPr>
+            <a:lvl8pPr marL="3200400" indent="0">
+              <a:buNone/>
+              <a:defRPr sz="1600"/>
+            </a:lvl8pPr>
+            <a:lvl9pPr marL="3657600" indent="0">
+              <a:buNone/>
+              <a:defRPr sz="1600"/>
+            </a:lvl9pPr>
+          </a:lstStyle>
+          <a:p>
+            <a:r>
+              <a:rPr lang="hu-HU"/>
+              <a:t>Kép beszúrásához kattintson az ikonra</a:t>
+            </a:r>
+            <a:endParaRPr lang="en-US" dirty="0"/>
+          </a:p>
+        </p:txBody>
+      </p:sp>
+      <p:sp>
+        <p:nvSpPr>
+          <p:cNvPr id="4" name="Text Placeholder 3"/>
+          <p:cNvSpPr>
+            <a:spLocks noGrp="1"/>
+          </p:cNvSpPr>
+          <p:nvPr>
+            <p:ph type="body" sz="half" idx="2"/>
+          </p:nvPr>
+        </p:nvSpPr>
+        <p:spPr>
+          <a:xfrm>
+            <a:off x="609599" y="5367338"/>
+            <a:ext cx="6347714" cy="674024"/>
+          </a:xfrm>
+        </p:spPr>
+        <p:txBody>
+          <a:bodyPr>
+            <a:normAutofit/>
+          </a:bodyPr>
+          <a:lstStyle>
+            <a:lvl1pPr marL="0" indent="0">
+              <a:buNone/>
+              <a:defRPr sz="1200"/>
+            </a:lvl1pPr>
+            <a:lvl2pPr marL="457200" indent="0">
+              <a:buNone/>
+              <a:defRPr sz="1200"/>
+            </a:lvl2pPr>
+            <a:lvl3pPr marL="914400" indent="0">
+              <a:buNone/>
+              <a:defRPr sz="1000"/>
+            </a:lvl3pPr>
+            <a:lvl4pPr marL="1371600" indent="0">
+              <a:buNone/>
+              <a:defRPr sz="900"/>
+            </a:lvl4pPr>
+            <a:lvl5pPr marL="1828800" indent="0">
+              <a:buNone/>
+              <a:defRPr sz="900"/>
+            </a:lvl5pPr>
+            <a:lvl6pPr marL="2286000" indent="0">
+              <a:buNone/>
+              <a:defRPr sz="900"/>
+            </a:lvl6pPr>
+            <a:lvl7pPr marL="2743200" indent="0">
+              <a:buNone/>
+              <a:defRPr sz="900"/>
+            </a:lvl7pPr>
+            <a:lvl8pPr marL="3200400" indent="0">
+              <a:buNone/>
+              <a:defRPr sz="900"/>
+            </a:lvl8pPr>
+            <a:lvl9pPr marL="3657600" indent="0">
+              <a:buNone/>
+              <a:defRPr sz="900"/>
+            </a:lvl9pPr>
+          </a:lstStyle>
+          <a:p>
+            <a:pPr lvl="0"/>
+            <a:r>
+              <a:rPr lang="hu-HU"/>
+              <a:t>Mintaszöveg szerkesztése</a:t>
+            </a:r>
+          </a:p>
+        </p:txBody>
+      </p:sp>
+      <p:sp>
+        <p:nvSpPr>
+          <p:cNvPr id="5" name="Date Placeholder 4"/>
+          <p:cNvSpPr>
+            <a:spLocks noGrp="1"/>
+          </p:cNvSpPr>
+          <p:nvPr>
+            <p:ph type="dt" sz="half" idx="10"/>
+          </p:nvPr>
+        </p:nvSpPr>
+        <p:spPr/>
+        <p:txBody>
+          <a:bodyPr/>
+          <a:lstStyle/>
+          <a:p>
+            <a:fld id="{7E1B2A62-5D5B-40FD-A574-BFE5DD367BE5}" type="datetimeFigureOut">
+              <a:rPr lang="hu-HU" smtClean="0"/>
+              <a:pPr/>
+              <a:t>2026. 04. 21.</a:t>
+            </a:fld>
+            <a:endParaRPr lang="hu-HU"/>
+          </a:p>
+        </p:txBody>
+      </p:sp>
+      <p:sp>
+        <p:nvSpPr>
+          <p:cNvPr id="6" name="Footer Placeholder 5"/>
+          <p:cNvSpPr>
+            <a:spLocks noGrp="1"/>
+          </p:cNvSpPr>
+          <p:nvPr>
+            <p:ph type="ftr" sz="quarter" idx="11"/>
+          </p:nvPr>
+        </p:nvSpPr>
+        <p:spPr/>
+        <p:txBody>
+          <a:bodyPr/>
+          <a:lstStyle/>
+          <a:p>
+            <a:endParaRPr lang="hu-HU"/>
+          </a:p>
+        </p:txBody>
+      </p:sp>
+      <p:sp>
+        <p:nvSpPr>
+          <p:cNvPr id="7" name="Slide Number Placeholder 6"/>
+          <p:cNvSpPr>
+            <a:spLocks noGrp="1"/>
+          </p:cNvSpPr>
+          <p:nvPr>
+            <p:ph type="sldNum" sz="quarter" idx="12"/>
+          </p:nvPr>
+        </p:nvSpPr>
+        <p:spPr/>
+        <p:txBody>
+          <a:bodyPr/>
+          <a:lstStyle/>
+          <a:p>
+            <a:fld id="{63DFB246-903F-4E0C-B369-33CA455F630D}" type="slidenum">
+              <a:rPr lang="hu-HU" smtClean="0"/>
+              <a:pPr/>
+              <a:t>‹#›</a:t>
+            </a:fld>
+            <a:endParaRPr lang="hu-HU"/>
+          </a:p>
+        </p:txBody>
+      </p:sp>
+    </p:spTree>
+    <p:extLst>
+      <p:ext uri="{BB962C8B-B14F-4D97-AF65-F5344CB8AC3E}">
+        <p14:creationId xmlns:p14="http://schemas.microsoft.com/office/powerpoint/2010/main" val="2339674578"/>
+      </p:ext>
+    </p:extLst>
   </p:cSld>
   <p:clrMapOvr>
     <a:masterClrMapping/>
@@ -2568,6 +4827,607 @@
           <a:chExt cx="0" cy="0"/>
         </a:xfrm>
       </p:grpSpPr>
+      <p:grpSp>
+        <p:nvGrpSpPr>
+          <p:cNvPr id="17" name="Group 16"/>
+          <p:cNvGrpSpPr/>
+          <p:nvPr/>
+        </p:nvGrpSpPr>
+        <p:grpSpPr>
+          <a:xfrm>
+            <a:off x="-8467" y="-8468"/>
+            <a:ext cx="9169805" cy="6874935"/>
+            <a:chOff x="-8467" y="-8468"/>
+            <a:chExt cx="9169805" cy="6874935"/>
+          </a:xfrm>
+        </p:grpSpPr>
+        <p:sp>
+          <p:nvSpPr>
+            <p:cNvPr id="7" name="Freeform 6"/>
+            <p:cNvSpPr/>
+            <p:nvPr/>
+          </p:nvSpPr>
+          <p:spPr>
+            <a:xfrm>
+              <a:off x="-8467" y="4013200"/>
+              <a:ext cx="457200" cy="2853267"/>
+            </a:xfrm>
+            <a:custGeom>
+              <a:avLst/>
+              <a:gdLst/>
+              <a:ahLst/>
+              <a:cxnLst/>
+              <a:rect l="l" t="t" r="r" b="b"/>
+              <a:pathLst>
+                <a:path w="457200" h="2853267">
+                  <a:moveTo>
+                    <a:pt x="0" y="0"/>
+                  </a:moveTo>
+                  <a:lnTo>
+                    <a:pt x="457200" y="2853267"/>
+                  </a:lnTo>
+                  <a:lnTo>
+                    <a:pt x="0" y="2844800"/>
+                  </a:lnTo>
+                  <a:cubicBezTo>
+                    <a:pt x="2822" y="1905000"/>
+                    <a:pt x="5645" y="965200"/>
+                    <a:pt x="0" y="0"/>
+                  </a:cubicBezTo>
+                  <a:close/>
+                </a:path>
+              </a:pathLst>
+            </a:custGeom>
+            <a:solidFill>
+              <a:schemeClr val="accent1">
+                <a:alpha val="85000"/>
+              </a:schemeClr>
+            </a:solidFill>
+            <a:ln>
+              <a:noFill/>
+            </a:ln>
+            <a:effectLst/>
+          </p:spPr>
+          <p:style>
+            <a:lnRef idx="1">
+              <a:schemeClr val="accent1"/>
+            </a:lnRef>
+            <a:fillRef idx="3">
+              <a:schemeClr val="accent1"/>
+            </a:fillRef>
+            <a:effectRef idx="2">
+              <a:schemeClr val="accent1"/>
+            </a:effectRef>
+            <a:fontRef idx="minor">
+              <a:schemeClr val="lt1"/>
+            </a:fontRef>
+          </p:style>
+        </p:sp>
+        <p:cxnSp>
+          <p:nvCxnSpPr>
+            <p:cNvPr id="8" name="Straight Connector 7"/>
+            <p:cNvCxnSpPr/>
+            <p:nvPr/>
+          </p:nvCxnSpPr>
+          <p:spPr>
+            <a:xfrm flipV="1">
+              <a:off x="5130830" y="4175605"/>
+              <a:ext cx="4022475" cy="2682396"/>
+            </a:xfrm>
+            <a:prstGeom prst="line">
+              <a:avLst/>
+            </a:prstGeom>
+            <a:ln w="9525">
+              <a:solidFill>
+                <a:schemeClr val="bg1">
+                  <a:lumMod val="85000"/>
+                </a:schemeClr>
+              </a:solidFill>
+            </a:ln>
+          </p:spPr>
+          <p:style>
+            <a:lnRef idx="2">
+              <a:schemeClr val="accent1"/>
+            </a:lnRef>
+            <a:fillRef idx="0">
+              <a:schemeClr val="accent1"/>
+            </a:fillRef>
+            <a:effectRef idx="1">
+              <a:schemeClr val="accent1"/>
+            </a:effectRef>
+            <a:fontRef idx="minor">
+              <a:schemeClr val="tx1"/>
+            </a:fontRef>
+          </p:style>
+        </p:cxnSp>
+        <p:cxnSp>
+          <p:nvCxnSpPr>
+            <p:cNvPr id="9" name="Straight Connector 8"/>
+            <p:cNvCxnSpPr/>
+            <p:nvPr/>
+          </p:nvCxnSpPr>
+          <p:spPr>
+            <a:xfrm>
+              <a:off x="7042707" y="0"/>
+              <a:ext cx="1219200" cy="6858000"/>
+            </a:xfrm>
+            <a:prstGeom prst="line">
+              <a:avLst/>
+            </a:prstGeom>
+            <a:ln w="9525">
+              <a:solidFill>
+                <a:schemeClr val="bg1">
+                  <a:lumMod val="75000"/>
+                </a:schemeClr>
+              </a:solidFill>
+            </a:ln>
+          </p:spPr>
+          <p:style>
+            <a:lnRef idx="2">
+              <a:schemeClr val="accent1"/>
+            </a:lnRef>
+            <a:fillRef idx="0">
+              <a:schemeClr val="accent1"/>
+            </a:fillRef>
+            <a:effectRef idx="1">
+              <a:schemeClr val="accent1"/>
+            </a:effectRef>
+            <a:fontRef idx="minor">
+              <a:schemeClr val="tx1"/>
+            </a:fontRef>
+          </p:style>
+        </p:cxnSp>
+        <p:sp>
+          <p:nvSpPr>
+            <p:cNvPr id="10" name="Freeform 9"/>
+            <p:cNvSpPr/>
+            <p:nvPr/>
+          </p:nvSpPr>
+          <p:spPr>
+            <a:xfrm>
+              <a:off x="6891896" y="1"/>
+              <a:ext cx="2269442" cy="6866466"/>
+            </a:xfrm>
+            <a:custGeom>
+              <a:avLst/>
+              <a:gdLst/>
+              <a:ahLst/>
+              <a:cxnLst/>
+              <a:rect l="l" t="t" r="r" b="b"/>
+              <a:pathLst>
+                <a:path w="2269442" h="6866466">
+                  <a:moveTo>
+                    <a:pt x="2023534" y="0"/>
+                  </a:moveTo>
+                  <a:lnTo>
+                    <a:pt x="0" y="6858000"/>
+                  </a:lnTo>
+                  <a:lnTo>
+                    <a:pt x="2269067" y="6866466"/>
+                  </a:lnTo>
+                  <a:cubicBezTo>
+                    <a:pt x="2271889" y="4580466"/>
+                    <a:pt x="2257778" y="2294466"/>
+                    <a:pt x="2260600" y="8466"/>
+                  </a:cubicBezTo>
+                  <a:lnTo>
+                    <a:pt x="2023534" y="0"/>
+                  </a:lnTo>
+                  <a:close/>
+                </a:path>
+              </a:pathLst>
+            </a:custGeom>
+            <a:solidFill>
+              <a:schemeClr val="accent1">
+                <a:alpha val="30000"/>
+              </a:schemeClr>
+            </a:solidFill>
+            <a:ln>
+              <a:noFill/>
+            </a:ln>
+            <a:effectLst/>
+          </p:spPr>
+          <p:style>
+            <a:lnRef idx="1">
+              <a:schemeClr val="accent1"/>
+            </a:lnRef>
+            <a:fillRef idx="3">
+              <a:schemeClr val="accent1"/>
+            </a:fillRef>
+            <a:effectRef idx="2">
+              <a:schemeClr val="accent1"/>
+            </a:effectRef>
+            <a:fontRef idx="minor">
+              <a:schemeClr val="lt1"/>
+            </a:fontRef>
+          </p:style>
+        </p:sp>
+        <p:sp>
+          <p:nvSpPr>
+            <p:cNvPr id="11" name="Freeform 10"/>
+            <p:cNvSpPr/>
+            <p:nvPr/>
+          </p:nvSpPr>
+          <p:spPr>
+            <a:xfrm>
+              <a:off x="7205158" y="-8467"/>
+              <a:ext cx="1948147" cy="6866467"/>
+            </a:xfrm>
+            <a:custGeom>
+              <a:avLst/>
+              <a:gdLst/>
+              <a:ahLst/>
+              <a:cxnLst/>
+              <a:rect l="l" t="t" r="r" b="b"/>
+              <a:pathLst>
+                <a:path w="1948147" h="6866467">
+                  <a:moveTo>
+                    <a:pt x="0" y="0"/>
+                  </a:moveTo>
+                  <a:lnTo>
+                    <a:pt x="1202267" y="6866467"/>
+                  </a:lnTo>
+                  <a:lnTo>
+                    <a:pt x="1947333" y="6866467"/>
+                  </a:lnTo>
+                  <a:cubicBezTo>
+                    <a:pt x="1944511" y="4577645"/>
+                    <a:pt x="1950155" y="2288822"/>
+                    <a:pt x="1947333" y="0"/>
+                  </a:cubicBezTo>
+                  <a:lnTo>
+                    <a:pt x="0" y="0"/>
+                  </a:lnTo>
+                  <a:close/>
+                </a:path>
+              </a:pathLst>
+            </a:custGeom>
+            <a:solidFill>
+              <a:schemeClr val="accent1">
+                <a:alpha val="20000"/>
+              </a:schemeClr>
+            </a:solidFill>
+            <a:ln>
+              <a:noFill/>
+            </a:ln>
+            <a:effectLst/>
+          </p:spPr>
+          <p:style>
+            <a:lnRef idx="1">
+              <a:schemeClr val="accent1"/>
+            </a:lnRef>
+            <a:fillRef idx="3">
+              <a:schemeClr val="accent1"/>
+            </a:fillRef>
+            <a:effectRef idx="2">
+              <a:schemeClr val="accent1"/>
+            </a:effectRef>
+            <a:fontRef idx="minor">
+              <a:schemeClr val="lt1"/>
+            </a:fontRef>
+          </p:style>
+        </p:sp>
+        <p:sp>
+          <p:nvSpPr>
+            <p:cNvPr id="12" name="Freeform 11"/>
+            <p:cNvSpPr/>
+            <p:nvPr/>
+          </p:nvSpPr>
+          <p:spPr>
+            <a:xfrm>
+              <a:off x="6637896" y="3920066"/>
+              <a:ext cx="2513565" cy="2937933"/>
+            </a:xfrm>
+            <a:custGeom>
+              <a:avLst/>
+              <a:gdLst/>
+              <a:ahLst/>
+              <a:cxnLst/>
+              <a:rect l="l" t="t" r="r" b="b"/>
+              <a:pathLst>
+                <a:path w="3259667" h="3810000">
+                  <a:moveTo>
+                    <a:pt x="0" y="3810000"/>
+                  </a:moveTo>
+                  <a:lnTo>
+                    <a:pt x="3251200" y="0"/>
+                  </a:lnTo>
+                  <a:cubicBezTo>
+                    <a:pt x="3254022" y="1270000"/>
+                    <a:pt x="3256845" y="2540000"/>
+                    <a:pt x="3259667" y="3810000"/>
+                  </a:cubicBezTo>
+                  <a:lnTo>
+                    <a:pt x="0" y="3810000"/>
+                  </a:lnTo>
+                  <a:close/>
+                </a:path>
+              </a:pathLst>
+            </a:custGeom>
+            <a:solidFill>
+              <a:schemeClr val="accent2">
+                <a:alpha val="72000"/>
+              </a:schemeClr>
+            </a:solidFill>
+            <a:ln>
+              <a:noFill/>
+            </a:ln>
+            <a:effectLst/>
+          </p:spPr>
+          <p:style>
+            <a:lnRef idx="1">
+              <a:schemeClr val="accent1"/>
+            </a:lnRef>
+            <a:fillRef idx="3">
+              <a:schemeClr val="accent1"/>
+            </a:fillRef>
+            <a:effectRef idx="2">
+              <a:schemeClr val="accent1"/>
+            </a:effectRef>
+            <a:fontRef idx="minor">
+              <a:schemeClr val="lt1"/>
+            </a:fontRef>
+          </p:style>
+        </p:sp>
+        <p:sp>
+          <p:nvSpPr>
+            <p:cNvPr id="13" name="Freeform 12"/>
+            <p:cNvSpPr/>
+            <p:nvPr/>
+          </p:nvSpPr>
+          <p:spPr>
+            <a:xfrm>
+              <a:off x="7010429" y="-8467"/>
+              <a:ext cx="2142876" cy="6866467"/>
+            </a:xfrm>
+            <a:custGeom>
+              <a:avLst/>
+              <a:gdLst/>
+              <a:ahLst/>
+              <a:cxnLst/>
+              <a:rect l="l" t="t" r="r" b="b"/>
+              <a:pathLst>
+                <a:path w="2853267" h="6866467">
+                  <a:moveTo>
+                    <a:pt x="0" y="0"/>
+                  </a:moveTo>
+                  <a:lnTo>
+                    <a:pt x="2472267" y="6866467"/>
+                  </a:lnTo>
+                  <a:lnTo>
+                    <a:pt x="2853267" y="6858000"/>
+                  </a:lnTo>
+                  <a:lnTo>
+                    <a:pt x="2853267" y="0"/>
+                  </a:lnTo>
+                  <a:lnTo>
+                    <a:pt x="0" y="0"/>
+                  </a:lnTo>
+                  <a:close/>
+                </a:path>
+              </a:pathLst>
+            </a:custGeom>
+            <a:solidFill>
+              <a:schemeClr val="accent2">
+                <a:lumMod val="75000"/>
+                <a:alpha val="70000"/>
+              </a:schemeClr>
+            </a:solidFill>
+            <a:ln>
+              <a:noFill/>
+            </a:ln>
+            <a:effectLst/>
+          </p:spPr>
+          <p:style>
+            <a:lnRef idx="1">
+              <a:schemeClr val="accent1"/>
+            </a:lnRef>
+            <a:fillRef idx="3">
+              <a:schemeClr val="accent1"/>
+            </a:fillRef>
+            <a:effectRef idx="2">
+              <a:schemeClr val="accent1"/>
+            </a:effectRef>
+            <a:fontRef idx="minor">
+              <a:schemeClr val="lt1"/>
+            </a:fontRef>
+          </p:style>
+        </p:sp>
+        <p:sp>
+          <p:nvSpPr>
+            <p:cNvPr id="14" name="Freeform 13"/>
+            <p:cNvSpPr/>
+            <p:nvPr/>
+          </p:nvSpPr>
+          <p:spPr>
+            <a:xfrm>
+              <a:off x="8295776" y="-8467"/>
+              <a:ext cx="857530" cy="6866467"/>
+            </a:xfrm>
+            <a:custGeom>
+              <a:avLst/>
+              <a:gdLst/>
+              <a:ahLst/>
+              <a:cxnLst/>
+              <a:rect l="l" t="t" r="r" b="b"/>
+              <a:pathLst>
+                <a:path w="1286933" h="6866467">
+                  <a:moveTo>
+                    <a:pt x="1016000" y="0"/>
+                  </a:moveTo>
+                  <a:lnTo>
+                    <a:pt x="0" y="6866467"/>
+                  </a:lnTo>
+                  <a:lnTo>
+                    <a:pt x="1286933" y="6866467"/>
+                  </a:lnTo>
+                  <a:cubicBezTo>
+                    <a:pt x="1284111" y="4577645"/>
+                    <a:pt x="1281288" y="2288822"/>
+                    <a:pt x="1278466" y="0"/>
+                  </a:cubicBezTo>
+                  <a:lnTo>
+                    <a:pt x="1016000" y="0"/>
+                  </a:lnTo>
+                  <a:close/>
+                </a:path>
+              </a:pathLst>
+            </a:custGeom>
+            <a:solidFill>
+              <a:schemeClr val="accent1">
+                <a:lumMod val="60000"/>
+                <a:lumOff val="40000"/>
+                <a:alpha val="70000"/>
+              </a:schemeClr>
+            </a:solidFill>
+            <a:ln>
+              <a:noFill/>
+            </a:ln>
+            <a:effectLst/>
+          </p:spPr>
+          <p:style>
+            <a:lnRef idx="1">
+              <a:schemeClr val="accent1"/>
+            </a:lnRef>
+            <a:fillRef idx="3">
+              <a:schemeClr val="accent1"/>
+            </a:fillRef>
+            <a:effectRef idx="2">
+              <a:schemeClr val="accent1"/>
+            </a:effectRef>
+            <a:fontRef idx="minor">
+              <a:schemeClr val="lt1"/>
+            </a:fontRef>
+          </p:style>
+        </p:sp>
+        <p:sp>
+          <p:nvSpPr>
+            <p:cNvPr id="15" name="Freeform 14"/>
+            <p:cNvSpPr/>
+            <p:nvPr/>
+          </p:nvSpPr>
+          <p:spPr>
+            <a:xfrm>
+              <a:off x="8077231" y="-8468"/>
+              <a:ext cx="1066770" cy="6866467"/>
+            </a:xfrm>
+            <a:custGeom>
+              <a:avLst/>
+              <a:gdLst/>
+              <a:ahLst/>
+              <a:cxnLst/>
+              <a:rect l="l" t="t" r="r" b="b"/>
+              <a:pathLst>
+                <a:path w="1270244" h="6866467">
+                  <a:moveTo>
+                    <a:pt x="0" y="0"/>
+                  </a:moveTo>
+                  <a:lnTo>
+                    <a:pt x="1117600" y="6866467"/>
+                  </a:lnTo>
+                  <a:lnTo>
+                    <a:pt x="1270000" y="6866467"/>
+                  </a:lnTo>
+                  <a:cubicBezTo>
+                    <a:pt x="1272822" y="4574822"/>
+                    <a:pt x="1250245" y="2291645"/>
+                    <a:pt x="1253067" y="0"/>
+                  </a:cubicBezTo>
+                  <a:lnTo>
+                    <a:pt x="0" y="0"/>
+                  </a:lnTo>
+                  <a:close/>
+                </a:path>
+              </a:pathLst>
+            </a:custGeom>
+            <a:solidFill>
+              <a:schemeClr val="accent1">
+                <a:alpha val="65000"/>
+              </a:schemeClr>
+            </a:solidFill>
+            <a:ln>
+              <a:noFill/>
+            </a:ln>
+            <a:effectLst/>
+          </p:spPr>
+          <p:style>
+            <a:lnRef idx="1">
+              <a:schemeClr val="accent1"/>
+            </a:lnRef>
+            <a:fillRef idx="3">
+              <a:schemeClr val="accent1"/>
+            </a:fillRef>
+            <a:effectRef idx="2">
+              <a:schemeClr val="accent1"/>
+            </a:effectRef>
+            <a:fontRef idx="minor">
+              <a:schemeClr val="lt1"/>
+            </a:fontRef>
+          </p:style>
+        </p:sp>
+        <p:sp>
+          <p:nvSpPr>
+            <p:cNvPr id="16" name="Freeform 15"/>
+            <p:cNvSpPr/>
+            <p:nvPr/>
+          </p:nvSpPr>
+          <p:spPr>
+            <a:xfrm>
+              <a:off x="8060297" y="4893733"/>
+              <a:ext cx="1094086" cy="1964267"/>
+            </a:xfrm>
+            <a:custGeom>
+              <a:avLst/>
+              <a:gdLst/>
+              <a:ahLst/>
+              <a:cxnLst/>
+              <a:rect l="l" t="t" r="r" b="b"/>
+              <a:pathLst>
+                <a:path w="1820333" h="3268133">
+                  <a:moveTo>
+                    <a:pt x="0" y="3268133"/>
+                  </a:moveTo>
+                  <a:lnTo>
+                    <a:pt x="1811866" y="0"/>
+                  </a:lnTo>
+                  <a:cubicBezTo>
+                    <a:pt x="1814688" y="1086555"/>
+                    <a:pt x="1817511" y="2173111"/>
+                    <a:pt x="1820333" y="3259666"/>
+                  </a:cubicBezTo>
+                  <a:lnTo>
+                    <a:pt x="0" y="3268133"/>
+                  </a:lnTo>
+                  <a:close/>
+                </a:path>
+              </a:pathLst>
+            </a:custGeom>
+            <a:solidFill>
+              <a:schemeClr val="accent1">
+                <a:alpha val="80000"/>
+              </a:schemeClr>
+            </a:solidFill>
+            <a:ln>
+              <a:noFill/>
+            </a:ln>
+            <a:effectLst/>
+          </p:spPr>
+          <p:style>
+            <a:lnRef idx="1">
+              <a:schemeClr val="accent1"/>
+            </a:lnRef>
+            <a:fillRef idx="3">
+              <a:schemeClr val="accent1"/>
+            </a:fillRef>
+            <a:effectRef idx="2">
+              <a:schemeClr val="accent1"/>
+            </a:effectRef>
+            <a:fontRef idx="minor">
+              <a:schemeClr val="lt1"/>
+            </a:fontRef>
+          </p:style>
+        </p:sp>
+      </p:grpSp>
       <p:sp>
         <p:nvSpPr>
           <p:cNvPr id="2" name="Title Placeholder 1"/>
@@ -2580,24 +5440,24 @@
         </p:nvSpPr>
         <p:spPr>
           <a:xfrm>
-            <a:off x="457200" y="274638"/>
-            <a:ext cx="8229600" cy="1143000"/>
+            <a:off x="609599" y="609600"/>
+            <a:ext cx="6347713" cy="1320800"/>
           </a:xfrm>
           <a:prstGeom prst="rect">
             <a:avLst/>
           </a:prstGeom>
         </p:spPr>
         <p:txBody>
-          <a:bodyPr vert="horz" lIns="91440" tIns="45720" rIns="91440" bIns="45720" rtlCol="0" anchor="ctr">
+          <a:bodyPr vert="horz" lIns="91440" tIns="45720" rIns="91440" bIns="45720" rtlCol="0" anchor="t">
             <a:normAutofit/>
           </a:bodyPr>
           <a:lstStyle/>
           <a:p>
             <a:r>
-              <a:rPr lang="en-US" smtClean="0"/>
-              <a:t>Click to edit Master title style</a:t>
-            </a:r>
-            <a:endParaRPr lang="hu-HU"/>
+              <a:rPr lang="hu-HU"/>
+              <a:t>Mintacím szerkesztése</a:t>
+            </a:r>
+            <a:endParaRPr lang="en-US" dirty="0"/>
           </a:p>
         </p:txBody>
       </p:sp>
@@ -2613,8 +5473,8 @@
         </p:nvSpPr>
         <p:spPr>
           <a:xfrm>
-            <a:off x="457200" y="1600200"/>
-            <a:ext cx="8229600" cy="4525963"/>
+            <a:off x="609599" y="2160590"/>
+            <a:ext cx="6347714" cy="3880773"/>
           </a:xfrm>
           <a:prstGeom prst="rect">
             <a:avLst/>
@@ -2628,38 +5488,38 @@
           <a:p>
             <a:pPr lvl="0"/>
             <a:r>
-              <a:rPr lang="en-US" smtClean="0"/>
-              <a:t>Click to edit Master text styles</a:t>
+              <a:rPr lang="hu-HU"/>
+              <a:t>Mintaszöveg szerkesztése</a:t>
             </a:r>
           </a:p>
           <a:p>
             <a:pPr lvl="1"/>
             <a:r>
-              <a:rPr lang="en-US" smtClean="0"/>
-              <a:t>Second level</a:t>
+              <a:rPr lang="hu-HU"/>
+              <a:t>Második szint</a:t>
             </a:r>
           </a:p>
           <a:p>
             <a:pPr lvl="2"/>
             <a:r>
-              <a:rPr lang="en-US" smtClean="0"/>
-              <a:t>Third level</a:t>
+              <a:rPr lang="hu-HU"/>
+              <a:t>Harmadik szint</a:t>
             </a:r>
           </a:p>
           <a:p>
             <a:pPr lvl="3"/>
             <a:r>
-              <a:rPr lang="en-US" smtClean="0"/>
-              <a:t>Fourth level</a:t>
+              <a:rPr lang="hu-HU"/>
+              <a:t>Negyedik szint</a:t>
             </a:r>
           </a:p>
           <a:p>
             <a:pPr lvl="4"/>
             <a:r>
-              <a:rPr lang="en-US" smtClean="0"/>
-              <a:t>Fifth level</a:t>
-            </a:r>
-            <a:endParaRPr lang="hu-HU"/>
+              <a:rPr lang="hu-HU"/>
+              <a:t>Ötödik szint</a:t>
+            </a:r>
+            <a:endParaRPr lang="en-US" dirty="0"/>
           </a:p>
         </p:txBody>
       </p:sp>
@@ -2675,8 +5535,8 @@
         </p:nvSpPr>
         <p:spPr>
           <a:xfrm>
-            <a:off x="457200" y="6356350"/>
-            <a:ext cx="2133600" cy="365125"/>
+            <a:off x="5405258" y="6041363"/>
+            <a:ext cx="684132" cy="365125"/>
           </a:xfrm>
           <a:prstGeom prst="rect">
             <a:avLst/>
@@ -2685,8 +5545,8 @@
         <p:txBody>
           <a:bodyPr vert="horz" lIns="91440" tIns="45720" rIns="91440" bIns="45720" rtlCol="0" anchor="ctr"/>
           <a:lstStyle>
-            <a:lvl1pPr algn="l">
-              <a:defRPr sz="1200">
+            <a:lvl1pPr algn="r">
+              <a:defRPr sz="900">
                 <a:solidFill>
                   <a:schemeClr val="tx1">
                     <a:tint val="75000"/>
@@ -2699,7 +5559,7 @@
             <a:fld id="{7E1B2A62-5D5B-40FD-A574-BFE5DD367BE5}" type="datetimeFigureOut">
               <a:rPr lang="hu-HU" smtClean="0"/>
               <a:pPr/>
-              <a:t>2026. 04. 16.</a:t>
+              <a:t>2026. 04. 21.</a:t>
             </a:fld>
             <a:endParaRPr lang="hu-HU"/>
           </a:p>
@@ -2717,8 +5577,8 @@
         </p:nvSpPr>
         <p:spPr>
           <a:xfrm>
-            <a:off x="3124200" y="6356350"/>
-            <a:ext cx="2895600" cy="365125"/>
+            <a:off x="609599" y="6041363"/>
+            <a:ext cx="4622973" cy="365125"/>
           </a:xfrm>
           <a:prstGeom prst="rect">
             <a:avLst/>
@@ -2727,8 +5587,8 @@
         <p:txBody>
           <a:bodyPr vert="horz" lIns="91440" tIns="45720" rIns="91440" bIns="45720" rtlCol="0" anchor="ctr"/>
           <a:lstStyle>
-            <a:lvl1pPr algn="ctr">
-              <a:defRPr sz="1200">
+            <a:lvl1pPr algn="l">
+              <a:defRPr sz="900">
                 <a:solidFill>
                   <a:schemeClr val="tx1">
                     <a:tint val="75000"/>
@@ -2754,8 +5614,8 @@
         </p:nvSpPr>
         <p:spPr>
           <a:xfrm>
-            <a:off x="6553200" y="6356350"/>
-            <a:ext cx="2133600" cy="365125"/>
+            <a:off x="6444676" y="6041363"/>
+            <a:ext cx="512638" cy="365125"/>
           </a:xfrm>
           <a:prstGeom prst="rect">
             <a:avLst/>
@@ -2765,11 +5625,9 @@
           <a:bodyPr vert="horz" lIns="91440" tIns="45720" rIns="91440" bIns="45720" rtlCol="0" anchor="ctr"/>
           <a:lstStyle>
             <a:lvl1pPr algn="r">
-              <a:defRPr sz="1200">
+              <a:defRPr sz="900">
                 <a:solidFill>
-                  <a:schemeClr val="tx1">
-                    <a:tint val="75000"/>
-                  </a:schemeClr>
+                  <a:schemeClr val="accent1"/>
                 </a:solidFill>
               </a:defRPr>
             </a:lvl1pPr>
@@ -2785,168 +5643,324 @@
         </p:txBody>
       </p:sp>
     </p:spTree>
+    <p:extLst>
+      <p:ext uri="{BB962C8B-B14F-4D97-AF65-F5344CB8AC3E}">
+        <p14:creationId xmlns:p14="http://schemas.microsoft.com/office/powerpoint/2010/main" val="677202443"/>
+      </p:ext>
+    </p:extLst>
   </p:cSld>
   <p:clrMap bg1="lt1" tx1="dk1" bg2="lt2" tx2="dk2" accent1="accent1" accent2="accent2" accent3="accent3" accent4="accent4" accent5="accent5" accent6="accent6" hlink="hlink" folHlink="folHlink"/>
   <p:sldLayoutIdLst>
-    <p:sldLayoutId id="2147483649" r:id="rId1"/>
-    <p:sldLayoutId id="2147483650" r:id="rId2"/>
-    <p:sldLayoutId id="2147483651" r:id="rId3"/>
-    <p:sldLayoutId id="2147483652" r:id="rId4"/>
-    <p:sldLayoutId id="2147483653" r:id="rId5"/>
-    <p:sldLayoutId id="2147483654" r:id="rId6"/>
-    <p:sldLayoutId id="2147483655" r:id="rId7"/>
-    <p:sldLayoutId id="2147483656" r:id="rId8"/>
-    <p:sldLayoutId id="2147483657" r:id="rId9"/>
-    <p:sldLayoutId id="2147483658" r:id="rId10"/>
-    <p:sldLayoutId id="2147483659" r:id="rId11"/>
+    <p:sldLayoutId id="2147483661" r:id="rId1"/>
+    <p:sldLayoutId id="2147483662" r:id="rId2"/>
+    <p:sldLayoutId id="2147483663" r:id="rId3"/>
+    <p:sldLayoutId id="2147483664" r:id="rId4"/>
+    <p:sldLayoutId id="2147483665" r:id="rId5"/>
+    <p:sldLayoutId id="2147483666" r:id="rId6"/>
+    <p:sldLayoutId id="2147483667" r:id="rId7"/>
+    <p:sldLayoutId id="2147483668" r:id="rId8"/>
+    <p:sldLayoutId id="2147483669" r:id="rId9"/>
+    <p:sldLayoutId id="2147483670" r:id="rId10"/>
+    <p:sldLayoutId id="2147483671" r:id="rId11"/>
+    <p:sldLayoutId id="2147483672" r:id="rId12"/>
+    <p:sldLayoutId id="2147483673" r:id="rId13"/>
+    <p:sldLayoutId id="2147483674" r:id="rId14"/>
+    <p:sldLayoutId id="2147483675" r:id="rId15"/>
+    <p:sldLayoutId id="2147483676" r:id="rId16"/>
   </p:sldLayoutIdLst>
   <p:txStyles>
     <p:titleStyle>
-      <a:lvl1pPr algn="ctr" defTabSz="914400" rtl="0" eaLnBrk="1" latinLnBrk="0" hangingPunct="1">
+      <a:lvl1pPr algn="l" defTabSz="457200" rtl="0" eaLnBrk="1" latinLnBrk="0" hangingPunct="1">
         <a:spcBef>
           <a:spcPct val="0"/>
         </a:spcBef>
         <a:buNone/>
-        <a:defRPr sz="4400" kern="1200">
+        <a:defRPr sz="3600" kern="1200">
           <a:solidFill>
-            <a:schemeClr val="tx1"/>
+            <a:schemeClr val="accent1"/>
           </a:solidFill>
           <a:latin typeface="+mj-lt"/>
           <a:ea typeface="+mj-ea"/>
           <a:cs typeface="+mj-cs"/>
         </a:defRPr>
       </a:lvl1pPr>
+      <a:lvl2pPr eaLnBrk="1" hangingPunct="1">
+        <a:defRPr>
+          <a:solidFill>
+            <a:schemeClr val="tx2"/>
+          </a:solidFill>
+        </a:defRPr>
+      </a:lvl2pPr>
+      <a:lvl3pPr eaLnBrk="1" hangingPunct="1">
+        <a:defRPr>
+          <a:solidFill>
+            <a:schemeClr val="tx2"/>
+          </a:solidFill>
+        </a:defRPr>
+      </a:lvl3pPr>
+      <a:lvl4pPr eaLnBrk="1" hangingPunct="1">
+        <a:defRPr>
+          <a:solidFill>
+            <a:schemeClr val="tx2"/>
+          </a:solidFill>
+        </a:defRPr>
+      </a:lvl4pPr>
+      <a:lvl5pPr eaLnBrk="1" hangingPunct="1">
+        <a:defRPr>
+          <a:solidFill>
+            <a:schemeClr val="tx2"/>
+          </a:solidFill>
+        </a:defRPr>
+      </a:lvl5pPr>
+      <a:lvl6pPr eaLnBrk="1" hangingPunct="1">
+        <a:defRPr>
+          <a:solidFill>
+            <a:schemeClr val="tx2"/>
+          </a:solidFill>
+        </a:defRPr>
+      </a:lvl6pPr>
+      <a:lvl7pPr eaLnBrk="1" hangingPunct="1">
+        <a:defRPr>
+          <a:solidFill>
+            <a:schemeClr val="tx2"/>
+          </a:solidFill>
+        </a:defRPr>
+      </a:lvl7pPr>
+      <a:lvl8pPr eaLnBrk="1" hangingPunct="1">
+        <a:defRPr>
+          <a:solidFill>
+            <a:schemeClr val="tx2"/>
+          </a:solidFill>
+        </a:defRPr>
+      </a:lvl8pPr>
+      <a:lvl9pPr eaLnBrk="1" hangingPunct="1">
+        <a:defRPr>
+          <a:solidFill>
+            <a:schemeClr val="tx2"/>
+          </a:solidFill>
+        </a:defRPr>
+      </a:lvl9pPr>
     </p:titleStyle>
     <p:bodyStyle>
-      <a:lvl1pPr marL="342900" indent="-342900" algn="l" defTabSz="914400" rtl="0" eaLnBrk="1" latinLnBrk="0" hangingPunct="1">
+      <a:lvl1pPr marL="342900" indent="-342900" algn="l" defTabSz="457200" rtl="0" eaLnBrk="1" latinLnBrk="0" hangingPunct="1">
         <a:spcBef>
-          <a:spcPct val="20000"/>
+          <a:spcPts val="1000"/>
         </a:spcBef>
-        <a:buFont typeface="Arial" pitchFamily="34" charset="0"/>
-        <a:buChar char="•"/>
-        <a:defRPr sz="3200" kern="1200">
+        <a:spcAft>
+          <a:spcPts val="0"/>
+        </a:spcAft>
+        <a:buClr>
+          <a:schemeClr val="accent1"/>
+        </a:buClr>
+        <a:buSzPct val="80000"/>
+        <a:buFont typeface="Wingdings 3" charset="2"/>
+        <a:buChar char=""/>
+        <a:defRPr sz="1800" kern="1200">
           <a:solidFill>
-            <a:schemeClr val="tx1"/>
+            <a:schemeClr val="tx1">
+              <a:lumMod val="75000"/>
+              <a:lumOff val="25000"/>
+            </a:schemeClr>
           </a:solidFill>
           <a:latin typeface="+mn-lt"/>
           <a:ea typeface="+mn-ea"/>
           <a:cs typeface="+mn-cs"/>
         </a:defRPr>
       </a:lvl1pPr>
-      <a:lvl2pPr marL="742950" indent="-285750" algn="l" defTabSz="914400" rtl="0" eaLnBrk="1" latinLnBrk="0" hangingPunct="1">
+      <a:lvl2pPr marL="742950" indent="-285750" algn="l" defTabSz="457200" rtl="0" eaLnBrk="1" latinLnBrk="0" hangingPunct="1">
         <a:spcBef>
-          <a:spcPct val="20000"/>
+          <a:spcPts val="1000"/>
         </a:spcBef>
-        <a:buFont typeface="Arial" pitchFamily="34" charset="0"/>
-        <a:buChar char="–"/>
-        <a:defRPr sz="2800" kern="1200">
+        <a:spcAft>
+          <a:spcPts val="0"/>
+        </a:spcAft>
+        <a:buClr>
+          <a:schemeClr val="accent1"/>
+        </a:buClr>
+        <a:buSzPct val="80000"/>
+        <a:buFont typeface="Wingdings 3" charset="2"/>
+        <a:buChar char=""/>
+        <a:defRPr sz="1600" kern="1200">
           <a:solidFill>
-            <a:schemeClr val="tx1"/>
+            <a:schemeClr val="tx1">
+              <a:lumMod val="75000"/>
+              <a:lumOff val="25000"/>
+            </a:schemeClr>
           </a:solidFill>
           <a:latin typeface="+mn-lt"/>
           <a:ea typeface="+mn-ea"/>
           <a:cs typeface="+mn-cs"/>
         </a:defRPr>
       </a:lvl2pPr>
-      <a:lvl3pPr marL="1143000" indent="-228600" algn="l" defTabSz="914400" rtl="0" eaLnBrk="1" latinLnBrk="0" hangingPunct="1">
+      <a:lvl3pPr marL="1143000" indent="-228600" algn="l" defTabSz="457200" rtl="0" eaLnBrk="1" latinLnBrk="0" hangingPunct="1">
         <a:spcBef>
-          <a:spcPct val="20000"/>
+          <a:spcPts val="1000"/>
         </a:spcBef>
-        <a:buFont typeface="Arial" pitchFamily="34" charset="0"/>
-        <a:buChar char="•"/>
-        <a:defRPr sz="2400" kern="1200">
+        <a:spcAft>
+          <a:spcPts val="0"/>
+        </a:spcAft>
+        <a:buClr>
+          <a:schemeClr val="accent1"/>
+        </a:buClr>
+        <a:buSzPct val="80000"/>
+        <a:buFont typeface="Wingdings 3" charset="2"/>
+        <a:buChar char=""/>
+        <a:defRPr sz="1400" kern="1200">
           <a:solidFill>
-            <a:schemeClr val="tx1"/>
+            <a:schemeClr val="tx1">
+              <a:lumMod val="75000"/>
+              <a:lumOff val="25000"/>
+            </a:schemeClr>
           </a:solidFill>
           <a:latin typeface="+mn-lt"/>
           <a:ea typeface="+mn-ea"/>
           <a:cs typeface="+mn-cs"/>
         </a:defRPr>
       </a:lvl3pPr>
-      <a:lvl4pPr marL="1600200" indent="-228600" algn="l" defTabSz="914400" rtl="0" eaLnBrk="1" latinLnBrk="0" hangingPunct="1">
+      <a:lvl4pPr marL="1600200" indent="-228600" algn="l" defTabSz="457200" rtl="0" eaLnBrk="1" latinLnBrk="0" hangingPunct="1">
         <a:spcBef>
-          <a:spcPct val="20000"/>
+          <a:spcPts val="1000"/>
         </a:spcBef>
-        <a:buFont typeface="Arial" pitchFamily="34" charset="0"/>
-        <a:buChar char="–"/>
-        <a:defRPr sz="2000" kern="1200">
+        <a:spcAft>
+          <a:spcPts val="0"/>
+        </a:spcAft>
+        <a:buClr>
+          <a:schemeClr val="accent1"/>
+        </a:buClr>
+        <a:buSzPct val="80000"/>
+        <a:buFont typeface="Wingdings 3" charset="2"/>
+        <a:buChar char=""/>
+        <a:defRPr sz="1200" kern="1200">
           <a:solidFill>
-            <a:schemeClr val="tx1"/>
+            <a:schemeClr val="tx1">
+              <a:lumMod val="75000"/>
+              <a:lumOff val="25000"/>
+            </a:schemeClr>
           </a:solidFill>
           <a:latin typeface="+mn-lt"/>
           <a:ea typeface="+mn-ea"/>
           <a:cs typeface="+mn-cs"/>
         </a:defRPr>
       </a:lvl4pPr>
-      <a:lvl5pPr marL="2057400" indent="-228600" algn="l" defTabSz="914400" rtl="0" eaLnBrk="1" latinLnBrk="0" hangingPunct="1">
+      <a:lvl5pPr marL="2057400" indent="-228600" algn="l" defTabSz="457200" rtl="0" eaLnBrk="1" latinLnBrk="0" hangingPunct="1">
         <a:spcBef>
-          <a:spcPct val="20000"/>
+          <a:spcPts val="1000"/>
         </a:spcBef>
-        <a:buFont typeface="Arial" pitchFamily="34" charset="0"/>
-        <a:buChar char="»"/>
-        <a:defRPr sz="2000" kern="1200">
+        <a:spcAft>
+          <a:spcPts val="0"/>
+        </a:spcAft>
+        <a:buClr>
+          <a:schemeClr val="accent1"/>
+        </a:buClr>
+        <a:buSzPct val="80000"/>
+        <a:buFont typeface="Wingdings 3" charset="2"/>
+        <a:buChar char=""/>
+        <a:defRPr sz="1200" kern="1200">
           <a:solidFill>
-            <a:schemeClr val="tx1"/>
+            <a:schemeClr val="tx1">
+              <a:lumMod val="75000"/>
+              <a:lumOff val="25000"/>
+            </a:schemeClr>
           </a:solidFill>
           <a:latin typeface="+mn-lt"/>
           <a:ea typeface="+mn-ea"/>
           <a:cs typeface="+mn-cs"/>
         </a:defRPr>
       </a:lvl5pPr>
-      <a:lvl6pPr marL="2514600" indent="-228600" algn="l" defTabSz="914400" rtl="0" eaLnBrk="1" latinLnBrk="0" hangingPunct="1">
+      <a:lvl6pPr marL="2514600" indent="-228600" algn="l" defTabSz="457200" rtl="0" eaLnBrk="1" latinLnBrk="0" hangingPunct="1">
         <a:spcBef>
-          <a:spcPct val="20000"/>
+          <a:spcPts val="1000"/>
         </a:spcBef>
-        <a:buFont typeface="Arial" pitchFamily="34" charset="0"/>
-        <a:buChar char="•"/>
-        <a:defRPr sz="2000" kern="1200">
+        <a:spcAft>
+          <a:spcPts val="0"/>
+        </a:spcAft>
+        <a:buClr>
+          <a:schemeClr val="accent1"/>
+        </a:buClr>
+        <a:buSzPct val="80000"/>
+        <a:buFont typeface="Wingdings 3" charset="2"/>
+        <a:buChar char=""/>
+        <a:defRPr sz="1200" kern="1200">
           <a:solidFill>
-            <a:schemeClr val="tx1"/>
+            <a:schemeClr val="tx1">
+              <a:lumMod val="75000"/>
+              <a:lumOff val="25000"/>
+            </a:schemeClr>
           </a:solidFill>
           <a:latin typeface="+mn-lt"/>
           <a:ea typeface="+mn-ea"/>
           <a:cs typeface="+mn-cs"/>
         </a:defRPr>
       </a:lvl6pPr>
-      <a:lvl7pPr marL="2971800" indent="-228600" algn="l" defTabSz="914400" rtl="0" eaLnBrk="1" latinLnBrk="0" hangingPunct="1">
+      <a:lvl7pPr marL="2971800" indent="-228600" algn="l" defTabSz="457200" rtl="0" eaLnBrk="1" latinLnBrk="0" hangingPunct="1">
         <a:spcBef>
-          <a:spcPct val="20000"/>
+          <a:spcPts val="1000"/>
         </a:spcBef>
-        <a:buFont typeface="Arial" pitchFamily="34" charset="0"/>
-        <a:buChar char="•"/>
-        <a:defRPr sz="2000" kern="1200">
+        <a:spcAft>
+          <a:spcPts val="0"/>
+        </a:spcAft>
+        <a:buClr>
+          <a:schemeClr val="accent1"/>
+        </a:buClr>
+        <a:buSzPct val="80000"/>
+        <a:buFont typeface="Wingdings 3" charset="2"/>
+        <a:buChar char=""/>
+        <a:defRPr sz="1200" kern="1200">
           <a:solidFill>
-            <a:schemeClr val="tx1"/>
+            <a:schemeClr val="tx1">
+              <a:lumMod val="75000"/>
+              <a:lumOff val="25000"/>
+            </a:schemeClr>
           </a:solidFill>
           <a:latin typeface="+mn-lt"/>
           <a:ea typeface="+mn-ea"/>
           <a:cs typeface="+mn-cs"/>
         </a:defRPr>
       </a:lvl7pPr>
-      <a:lvl8pPr marL="3429000" indent="-228600" algn="l" defTabSz="914400" rtl="0" eaLnBrk="1" latinLnBrk="0" hangingPunct="1">
+      <a:lvl8pPr marL="3429000" indent="-228600" algn="l" defTabSz="457200" rtl="0" eaLnBrk="1" latinLnBrk="0" hangingPunct="1">
         <a:spcBef>
-          <a:spcPct val="20000"/>
+          <a:spcPts val="1000"/>
         </a:spcBef>
-        <a:buFont typeface="Arial" pitchFamily="34" charset="0"/>
-        <a:buChar char="•"/>
-        <a:defRPr sz="2000" kern="1200">
+        <a:spcAft>
+          <a:spcPts val="0"/>
+        </a:spcAft>
+        <a:buClr>
+          <a:schemeClr val="accent1"/>
+        </a:buClr>
+        <a:buSzPct val="80000"/>
+        <a:buFont typeface="Wingdings 3" charset="2"/>
+        <a:buChar char=""/>
+        <a:defRPr sz="1200" kern="1200">
           <a:solidFill>
-            <a:schemeClr val="tx1"/>
+            <a:schemeClr val="tx1">
+              <a:lumMod val="75000"/>
+              <a:lumOff val="25000"/>
+            </a:schemeClr>
           </a:solidFill>
           <a:latin typeface="+mn-lt"/>
           <a:ea typeface="+mn-ea"/>
           <a:cs typeface="+mn-cs"/>
         </a:defRPr>
       </a:lvl8pPr>
-      <a:lvl9pPr marL="3886200" indent="-228600" algn="l" defTabSz="914400" rtl="0" eaLnBrk="1" latinLnBrk="0" hangingPunct="1">
+      <a:lvl9pPr marL="3886200" indent="-228600" algn="l" defTabSz="457200" rtl="0" eaLnBrk="1" latinLnBrk="0" hangingPunct="1">
         <a:spcBef>
-          <a:spcPct val="20000"/>
+          <a:spcPts val="1000"/>
         </a:spcBef>
-        <a:buFont typeface="Arial" pitchFamily="34" charset="0"/>
-        <a:buChar char="•"/>
-        <a:defRPr sz="2000" kern="1200">
+        <a:spcAft>
+          <a:spcPts val="0"/>
+        </a:spcAft>
+        <a:buClr>
+          <a:schemeClr val="accent1"/>
+        </a:buClr>
+        <a:buSzPct val="80000"/>
+        <a:buFont typeface="Wingdings 3" charset="2"/>
+        <a:buChar char=""/>
+        <a:defRPr sz="1200" kern="1200">
           <a:solidFill>
-            <a:schemeClr val="tx1"/>
+            <a:schemeClr val="tx1">
+              <a:lumMod val="75000"/>
+              <a:lumOff val="25000"/>
+            </a:schemeClr>
           </a:solidFill>
           <a:latin typeface="+mn-lt"/>
           <a:ea typeface="+mn-ea"/>
@@ -2956,9 +5970,9 @@
     </p:bodyStyle>
     <p:otherStyle>
       <a:defPPr>
-        <a:defRPr lang="hu-HU"/>
+        <a:defRPr lang="en-US"/>
       </a:defPPr>
-      <a:lvl1pPr marL="0" algn="l" defTabSz="914400" rtl="0" eaLnBrk="1" latinLnBrk="0" hangingPunct="1">
+      <a:lvl1pPr marL="0" algn="l" defTabSz="457200" rtl="0" eaLnBrk="1" latinLnBrk="0" hangingPunct="1">
         <a:defRPr sz="1800" kern="1200">
           <a:solidFill>
             <a:schemeClr val="tx1"/>
@@ -2968,7 +5982,7 @@
           <a:cs typeface="+mn-cs"/>
         </a:defRPr>
       </a:lvl1pPr>
-      <a:lvl2pPr marL="457200" algn="l" defTabSz="914400" rtl="0" eaLnBrk="1" latinLnBrk="0" hangingPunct="1">
+      <a:lvl2pPr marL="457200" algn="l" defTabSz="457200" rtl="0" eaLnBrk="1" latinLnBrk="0" hangingPunct="1">
         <a:defRPr sz="1800" kern="1200">
           <a:solidFill>
             <a:schemeClr val="tx1"/>
@@ -2978,7 +5992,7 @@
           <a:cs typeface="+mn-cs"/>
         </a:defRPr>
       </a:lvl2pPr>
-      <a:lvl3pPr marL="914400" algn="l" defTabSz="914400" rtl="0" eaLnBrk="1" latinLnBrk="0" hangingPunct="1">
+      <a:lvl3pPr marL="914400" algn="l" defTabSz="457200" rtl="0" eaLnBrk="1" latinLnBrk="0" hangingPunct="1">
         <a:defRPr sz="1800" kern="1200">
           <a:solidFill>
             <a:schemeClr val="tx1"/>
@@ -2988,7 +6002,7 @@
           <a:cs typeface="+mn-cs"/>
         </a:defRPr>
       </a:lvl3pPr>
-      <a:lvl4pPr marL="1371600" algn="l" defTabSz="914400" rtl="0" eaLnBrk="1" latinLnBrk="0" hangingPunct="1">
+      <a:lvl4pPr marL="1371600" algn="l" defTabSz="457200" rtl="0" eaLnBrk="1" latinLnBrk="0" hangingPunct="1">
         <a:defRPr sz="1800" kern="1200">
           <a:solidFill>
             <a:schemeClr val="tx1"/>
@@ -2998,7 +6012,7 @@
           <a:cs typeface="+mn-cs"/>
         </a:defRPr>
       </a:lvl4pPr>
-      <a:lvl5pPr marL="1828800" algn="l" defTabSz="914400" rtl="0" eaLnBrk="1" latinLnBrk="0" hangingPunct="1">
+      <a:lvl5pPr marL="1828800" algn="l" defTabSz="457200" rtl="0" eaLnBrk="1" latinLnBrk="0" hangingPunct="1">
         <a:defRPr sz="1800" kern="1200">
           <a:solidFill>
             <a:schemeClr val="tx1"/>
@@ -3008,7 +6022,7 @@
           <a:cs typeface="+mn-cs"/>
         </a:defRPr>
       </a:lvl5pPr>
-      <a:lvl6pPr marL="2286000" algn="l" defTabSz="914400" rtl="0" eaLnBrk="1" latinLnBrk="0" hangingPunct="1">
+      <a:lvl6pPr marL="2286000" algn="l" defTabSz="457200" rtl="0" eaLnBrk="1" latinLnBrk="0" hangingPunct="1">
         <a:defRPr sz="1800" kern="1200">
           <a:solidFill>
             <a:schemeClr val="tx1"/>
@@ -3018,7 +6032,7 @@
           <a:cs typeface="+mn-cs"/>
         </a:defRPr>
       </a:lvl6pPr>
-      <a:lvl7pPr marL="2743200" algn="l" defTabSz="914400" rtl="0" eaLnBrk="1" latinLnBrk="0" hangingPunct="1">
+      <a:lvl7pPr marL="2743200" algn="l" defTabSz="457200" rtl="0" eaLnBrk="1" latinLnBrk="0" hangingPunct="1">
         <a:defRPr sz="1800" kern="1200">
           <a:solidFill>
             <a:schemeClr val="tx1"/>
@@ -3028,7 +6042,7 @@
           <a:cs typeface="+mn-cs"/>
         </a:defRPr>
       </a:lvl7pPr>
-      <a:lvl8pPr marL="3200400" algn="l" defTabSz="914400" rtl="0" eaLnBrk="1" latinLnBrk="0" hangingPunct="1">
+      <a:lvl8pPr marL="3200400" algn="l" defTabSz="457200" rtl="0" eaLnBrk="1" latinLnBrk="0" hangingPunct="1">
         <a:defRPr sz="1800" kern="1200">
           <a:solidFill>
             <a:schemeClr val="tx1"/>
@@ -3038,7 +6052,7 @@
           <a:cs typeface="+mn-cs"/>
         </a:defRPr>
       </a:lvl8pPr>
-      <a:lvl9pPr marL="3657600" algn="l" defTabSz="914400" rtl="0" eaLnBrk="1" latinLnBrk="0" hangingPunct="1">
+      <a:lvl9pPr marL="3657600" algn="l" defTabSz="457200" rtl="0" eaLnBrk="1" latinLnBrk="0" hangingPunct="1">
         <a:defRPr sz="1800" kern="1200">
           <a:solidFill>
             <a:schemeClr val="tx1"/>
@@ -3088,25 +6102,16 @@
           <a:lstStyle/>
           <a:p>
             <a:r>
-              <a:rPr lang="hu-HU" dirty="0" smtClean="0"/>
-              <a:t>Szoftverfejlesztő- és tesztelő </a:t>
-            </a:r>
-            <a:r>
-              <a:rPr lang="hu-HU" dirty="0" err="1" smtClean="0"/>
-              <a:t>vizsgaremek</a:t>
-            </a:r>
-            <a:r>
-              <a:rPr lang="hu-HU" smtClean="0"/>
-              <a:t/>
+              <a:rPr lang="hu-HU" dirty="0"/>
+              <a:t>Szoftverfejlesztő- és tesztelő vizsgaremek</a:t>
             </a:r>
             <a:br>
-              <a:rPr lang="hu-HU" smtClean="0"/>
+              <a:rPr lang="hu-HU" dirty="0"/>
             </a:br>
             <a:r>
-              <a:rPr lang="hu-HU" smtClean="0"/>
+              <a:rPr lang="hu-HU" dirty="0"/>
               <a:t>2026</a:t>
             </a:r>
-            <a:endParaRPr lang="hu-HU"/>
           </a:p>
         </p:txBody>
       </p:sp>
@@ -3126,10 +6131,9 @@
           <a:lstStyle/>
           <a:p>
             <a:r>
-              <a:rPr lang="hu-HU" smtClean="0"/>
+              <a:rPr lang="hu-HU"/>
               <a:t>Fuglovics Konor, Uivárosi Katona Gábriel, Kiss-Fodor Zsombor, Szöllősy Marcell</a:t>
             </a:r>
-            <a:endParaRPr lang="hu-HU"/>
           </a:p>
         </p:txBody>
       </p:sp>
@@ -3174,7 +6178,7 @@
           <a:lstStyle/>
           <a:p>
             <a:r>
-              <a:rPr lang="en-US" dirty="0" err="1" smtClean="0"/>
+              <a:rPr lang="en-US" dirty="0" err="1"/>
               <a:t>Kezelőfelület</a:t>
             </a:r>
             <a:endParaRPr lang="hu-HU" dirty="0"/>
@@ -3201,70 +6205,66 @@
               <a:buChar char="•"/>
             </a:pPr>
             <a:r>
-              <a:rPr lang="en-US" dirty="0" smtClean="0"/>
-              <a:t>3</a:t>
-            </a:r>
-            <a:r>
-              <a:rPr lang="en-US" dirty="0" smtClean="0"/>
-              <a:t>. Slideshow</a:t>
+              <a:rPr lang="en-US" dirty="0"/>
+              <a:t>3. Slideshow</a:t>
             </a:r>
           </a:p>
           <a:p>
             <a:pPr marL="742950" lvl="2" indent="-342900"/>
             <a:r>
-              <a:rPr lang="en-US" dirty="0" err="1" smtClean="0"/>
+              <a:rPr lang="en-US" dirty="0" err="1"/>
               <a:t>Képekkel</a:t>
             </a:r>
             <a:r>
-              <a:rPr lang="en-US" dirty="0" smtClean="0"/>
+              <a:rPr lang="en-US" dirty="0"/>
               <a:t> </a:t>
             </a:r>
             <a:r>
-              <a:rPr lang="en-US" dirty="0" err="1" smtClean="0"/>
+              <a:rPr lang="en-US" dirty="0" err="1"/>
               <a:t>bíztatja</a:t>
             </a:r>
             <a:r>
-              <a:rPr lang="en-US" dirty="0" smtClean="0"/>
+              <a:rPr lang="en-US" dirty="0"/>
               <a:t> meg a </a:t>
             </a:r>
             <a:r>
-              <a:rPr lang="en-US" dirty="0" err="1" smtClean="0"/>
+              <a:rPr lang="en-US" dirty="0" err="1"/>
               <a:t>vásárlót</a:t>
             </a:r>
             <a:r>
-              <a:rPr lang="en-US" dirty="0" smtClean="0"/>
+              <a:rPr lang="en-US" dirty="0"/>
               <a:t>, </a:t>
             </a:r>
             <a:r>
-              <a:rPr lang="en-US" dirty="0" err="1" smtClean="0"/>
+              <a:rPr lang="en-US" dirty="0" err="1"/>
               <a:t>hogy</a:t>
             </a:r>
             <a:r>
-              <a:rPr lang="en-US" dirty="0" smtClean="0"/>
+              <a:rPr lang="en-US" dirty="0"/>
               <a:t> </a:t>
             </a:r>
             <a:r>
-              <a:rPr lang="en-US" dirty="0" err="1" smtClean="0"/>
+              <a:rPr lang="en-US" dirty="0" err="1"/>
               <a:t>jó</a:t>
             </a:r>
             <a:r>
-              <a:rPr lang="en-US" dirty="0" smtClean="0"/>
+              <a:rPr lang="en-US" dirty="0"/>
               <a:t> </a:t>
             </a:r>
             <a:r>
-              <a:rPr lang="en-US" dirty="0" err="1" smtClean="0"/>
+              <a:rPr lang="en-US" dirty="0" err="1"/>
               <a:t>helyen</a:t>
             </a:r>
             <a:r>
-              <a:rPr lang="en-US" dirty="0" smtClean="0"/>
+              <a:rPr lang="en-US" dirty="0"/>
               <a:t> </a:t>
             </a:r>
             <a:r>
-              <a:rPr lang="en-US" dirty="0" err="1" smtClean="0"/>
+              <a:rPr lang="en-US" dirty="0" err="1"/>
               <a:t>jár</a:t>
             </a:r>
             <a:r>
-              <a:rPr lang="en-US" dirty="0" smtClean="0"/>
+              <a:rPr lang="en-US" dirty="0"/>
               <a:t>.</a:t>
             </a:r>
           </a:p>
@@ -3274,22 +6274,22 @@
               <a:buChar char="•"/>
             </a:pPr>
             <a:r>
-              <a:rPr lang="en-US" dirty="0" smtClean="0"/>
+              <a:rPr lang="en-US" dirty="0"/>
               <a:t>4. </a:t>
             </a:r>
             <a:r>
-              <a:rPr lang="en-US" dirty="0" err="1" smtClean="0"/>
+              <a:rPr lang="en-US" dirty="0" err="1"/>
               <a:t>Lábléc</a:t>
             </a:r>
-            <a:endParaRPr lang="en-US" dirty="0" smtClean="0"/>
+            <a:endParaRPr lang="en-US" dirty="0"/>
           </a:p>
           <a:p>
             <a:pPr marL="742950" lvl="2" indent="-342900"/>
             <a:r>
-              <a:rPr lang="en-US" dirty="0" err="1" smtClean="0"/>
+              <a:rPr lang="en-US" dirty="0" err="1"/>
               <a:t>Elérhetőségek</a:t>
             </a:r>
-            <a:endParaRPr lang="en-US" dirty="0" smtClean="0"/>
+            <a:endParaRPr lang="en-US" dirty="0"/>
           </a:p>
           <a:p>
             <a:pPr lvl="1"/>
@@ -3338,12 +6338,8 @@
           <a:lstStyle/>
           <a:p>
             <a:r>
-              <a:rPr lang="en-US" dirty="0" err="1" smtClean="0"/>
-              <a:t>W</a:t>
-            </a:r>
-            <a:r>
-              <a:rPr lang="en-US" dirty="0" err="1" smtClean="0"/>
-              <a:t>eboldal</a:t>
+              <a:rPr lang="en-US" dirty="0" err="1"/>
+              <a:t>Weboldal</a:t>
             </a:r>
             <a:endParaRPr lang="hu-HU" dirty="0"/>
           </a:p>
@@ -3365,95 +6361,95 @@
           <a:lstStyle/>
           <a:p>
             <a:r>
-              <a:rPr lang="en-US" dirty="0" smtClean="0"/>
+              <a:rPr lang="en-US" dirty="0"/>
               <a:t>A </a:t>
             </a:r>
             <a:r>
-              <a:rPr lang="en-US" dirty="0" err="1" smtClean="0"/>
+              <a:rPr lang="en-US" dirty="0" err="1"/>
               <a:t>weboldalunk</a:t>
             </a:r>
             <a:r>
-              <a:rPr lang="en-US" dirty="0" smtClean="0"/>
+              <a:rPr lang="en-US" dirty="0"/>
               <a:t> </a:t>
             </a:r>
             <a:r>
-              <a:rPr lang="en-US" dirty="0" err="1" smtClean="0"/>
+              <a:rPr lang="en-US" dirty="0" err="1"/>
               <a:t>rezponzív</a:t>
             </a:r>
             <a:r>
-              <a:rPr lang="en-US" dirty="0" smtClean="0"/>
+              <a:rPr lang="en-US" dirty="0"/>
               <a:t>, modern </a:t>
             </a:r>
             <a:r>
-              <a:rPr lang="en-US" dirty="0" err="1" smtClean="0"/>
+              <a:rPr lang="en-US" dirty="0" err="1"/>
               <a:t>böngésző</a:t>
             </a:r>
             <a:r>
-              <a:rPr lang="en-US" dirty="0" smtClean="0"/>
+              <a:rPr lang="en-US" dirty="0"/>
               <a:t> </a:t>
             </a:r>
             <a:r>
-              <a:rPr lang="en-US" dirty="0" err="1" smtClean="0"/>
+              <a:rPr lang="en-US" dirty="0" err="1"/>
               <a:t>szabványoknak</a:t>
             </a:r>
             <a:r>
-              <a:rPr lang="en-US" dirty="0" smtClean="0"/>
+              <a:rPr lang="en-US" dirty="0"/>
               <a:t> </a:t>
             </a:r>
             <a:r>
-              <a:rPr lang="en-US" dirty="0" err="1" smtClean="0"/>
+              <a:rPr lang="en-US" dirty="0" err="1"/>
               <a:t>megfelel</a:t>
             </a:r>
             <a:r>
-              <a:rPr lang="en-US" dirty="0" smtClean="0"/>
+              <a:rPr lang="en-US" dirty="0"/>
               <a:t>, </a:t>
             </a:r>
             <a:r>
-              <a:rPr lang="en-US" dirty="0" err="1" smtClean="0"/>
+              <a:rPr lang="en-US" dirty="0" err="1"/>
               <a:t>így</a:t>
             </a:r>
             <a:r>
-              <a:rPr lang="en-US" dirty="0" smtClean="0"/>
+              <a:rPr lang="en-US" dirty="0"/>
               <a:t> </a:t>
             </a:r>
             <a:r>
-              <a:rPr lang="en-US" dirty="0" err="1" smtClean="0"/>
+              <a:rPr lang="en-US" dirty="0" err="1"/>
               <a:t>különböző</a:t>
             </a:r>
             <a:r>
-              <a:rPr lang="en-US" dirty="0" smtClean="0"/>
+              <a:rPr lang="en-US" dirty="0"/>
               <a:t> </a:t>
             </a:r>
             <a:r>
-              <a:rPr lang="en-US" dirty="0" err="1" smtClean="0"/>
+              <a:rPr lang="en-US" dirty="0" err="1"/>
               <a:t>böngészőkön</a:t>
             </a:r>
             <a:r>
-              <a:rPr lang="en-US" dirty="0" smtClean="0"/>
+              <a:rPr lang="en-US" dirty="0"/>
               <a:t> </a:t>
             </a:r>
             <a:r>
-              <a:rPr lang="en-US" dirty="0" err="1" smtClean="0"/>
+              <a:rPr lang="en-US" dirty="0" err="1"/>
               <a:t>és</a:t>
             </a:r>
             <a:r>
-              <a:rPr lang="en-US" dirty="0" smtClean="0"/>
+              <a:rPr lang="en-US" dirty="0"/>
               <a:t> </a:t>
             </a:r>
             <a:r>
-              <a:rPr lang="en-US" dirty="0" err="1" smtClean="0"/>
+              <a:rPr lang="en-US" dirty="0" err="1"/>
               <a:t>telefonokon</a:t>
             </a:r>
             <a:r>
-              <a:rPr lang="en-US" dirty="0" smtClean="0"/>
+              <a:rPr lang="en-US" dirty="0"/>
               <a:t> is </a:t>
             </a:r>
             <a:r>
-              <a:rPr lang="en-US" dirty="0" err="1" smtClean="0"/>
+              <a:rPr lang="en-US" dirty="0" err="1"/>
               <a:t>működik</a:t>
             </a:r>
             <a:r>
-              <a:rPr lang="en-US" dirty="0" smtClean="0"/>
+              <a:rPr lang="en-US" dirty="0"/>
               <a:t>.</a:t>
             </a:r>
             <a:endParaRPr lang="hu-HU" dirty="0"/>
@@ -3501,7 +6497,7 @@
           <a:lstStyle/>
           <a:p>
             <a:r>
-              <a:rPr lang="en-US" dirty="0" err="1" smtClean="0"/>
+              <a:rPr lang="en-US" dirty="0" err="1"/>
               <a:t>Tesztelések</a:t>
             </a:r>
             <a:endParaRPr lang="hu-HU" dirty="0"/>
@@ -3524,47 +6520,47 @@
           <a:lstStyle/>
           <a:p>
             <a:r>
-              <a:rPr lang="en-US" dirty="0" smtClean="0"/>
+              <a:rPr lang="en-US" dirty="0"/>
               <a:t>A </a:t>
             </a:r>
             <a:r>
-              <a:rPr lang="en-US" dirty="0" err="1" smtClean="0"/>
+              <a:rPr lang="en-US" dirty="0" err="1"/>
               <a:t>weboldalt</a:t>
             </a:r>
             <a:r>
-              <a:rPr lang="en-US" dirty="0" smtClean="0"/>
+              <a:rPr lang="en-US" dirty="0"/>
               <a:t> </a:t>
             </a:r>
             <a:r>
-              <a:rPr lang="en-US" dirty="0" err="1" smtClean="0"/>
+              <a:rPr lang="en-US" dirty="0" err="1"/>
               <a:t>többféle</a:t>
             </a:r>
             <a:r>
-              <a:rPr lang="en-US" dirty="0" smtClean="0"/>
+              <a:rPr lang="en-US" dirty="0"/>
               <a:t> </a:t>
             </a:r>
             <a:r>
-              <a:rPr lang="en-US" dirty="0" err="1" smtClean="0"/>
+              <a:rPr lang="en-US" dirty="0" err="1"/>
               <a:t>böngészőkön</a:t>
             </a:r>
             <a:r>
-              <a:rPr lang="en-US" dirty="0" smtClean="0"/>
+              <a:rPr lang="en-US" dirty="0"/>
               <a:t> </a:t>
             </a:r>
             <a:r>
-              <a:rPr lang="en-US" dirty="0" err="1" smtClean="0"/>
+              <a:rPr lang="en-US" dirty="0" err="1"/>
               <a:t>teszteltük</a:t>
             </a:r>
             <a:r>
-              <a:rPr lang="en-US" dirty="0" smtClean="0"/>
+              <a:rPr lang="en-US" dirty="0"/>
               <a:t> (Google Chrome, Opera, Firefox, </a:t>
             </a:r>
             <a:r>
-              <a:rPr lang="en-US" dirty="0" err="1" smtClean="0"/>
+              <a:rPr lang="en-US" dirty="0" err="1"/>
               <a:t>stb</a:t>
             </a:r>
             <a:r>
-              <a:rPr lang="en-US" smtClean="0"/>
+              <a:rPr lang="en-US"/>
               <a:t>) </a:t>
             </a:r>
             <a:endParaRPr lang="hu-HU" dirty="0"/>
@@ -3612,10 +6608,9 @@
           <a:lstStyle/>
           <a:p>
             <a:r>
-              <a:rPr lang="hu-HU" smtClean="0"/>
+              <a:rPr lang="hu-HU"/>
               <a:t>Uivárosi Katona Gábriel:</a:t>
             </a:r>
-            <a:endParaRPr lang="hu-HU"/>
           </a:p>
         </p:txBody>
       </p:sp>
@@ -3635,7 +6630,7 @@
           <a:lstStyle/>
           <a:p>
             <a:r>
-              <a:rPr lang="hu-HU" dirty="0" smtClean="0"/>
+              <a:rPr lang="hu-HU" dirty="0"/>
               <a:t>Nekem az adatbázist kellet létrehoznom, a csapatársam által összegyűjtött adatokból.</a:t>
             </a:r>
           </a:p>
@@ -3682,10 +6677,9 @@
           <a:lstStyle/>
           <a:p>
             <a:r>
-              <a:rPr lang="hu-HU" smtClean="0"/>
+              <a:rPr lang="hu-HU"/>
               <a:t>Szöllősy Marcell:</a:t>
             </a:r>
-            <a:endParaRPr lang="hu-HU"/>
           </a:p>
         </p:txBody>
       </p:sp>
@@ -3705,16 +6699,15 @@
           <a:lstStyle/>
           <a:p>
             <a:r>
-              <a:rPr lang="hu-HU" dirty="0" smtClean="0"/>
+              <a:rPr lang="hu-HU" dirty="0"/>
               <a:t>Nekem az adatokat kellet összegyűjtenem.</a:t>
             </a:r>
           </a:p>
           <a:p>
             <a:r>
-              <a:rPr lang="hu-HU" dirty="0" smtClean="0"/>
+              <a:rPr lang="hu-HU" dirty="0"/>
               <a:t>Az adatokat egy szöveges fájlban gyűjtöttem össze, elrendezve.</a:t>
             </a:r>
-            <a:endParaRPr lang="hu-HU" dirty="0"/>
           </a:p>
         </p:txBody>
       </p:sp>
@@ -3759,10 +6752,9 @@
           <a:lstStyle/>
           <a:p>
             <a:r>
-              <a:rPr lang="hu-HU" smtClean="0"/>
+              <a:rPr lang="hu-HU"/>
               <a:t>Fuglovics Konor</a:t>
             </a:r>
-            <a:endParaRPr lang="hu-HU"/>
           </a:p>
         </p:txBody>
       </p:sp>
@@ -3782,10 +6774,9 @@
           <a:lstStyle/>
           <a:p>
             <a:r>
-              <a:rPr lang="hu-HU" dirty="0" smtClean="0"/>
+              <a:rPr lang="hu-HU" dirty="0"/>
               <a:t>Az én feladatom a prezentáció elkészítése volt a projekthez, és back endben megcsinálni az ár rendszert.</a:t>
             </a:r>
-            <a:endParaRPr lang="hu-HU" dirty="0"/>
           </a:p>
         </p:txBody>
       </p:sp>
@@ -3830,10 +6821,9 @@
           <a:lstStyle/>
           <a:p>
             <a:r>
-              <a:rPr lang="hu-HU" dirty="0" smtClean="0"/>
+              <a:rPr lang="hu-HU" dirty="0"/>
               <a:t>Kiss- Fodor Zsombor:</a:t>
             </a:r>
-            <a:endParaRPr lang="hu-HU" dirty="0"/>
           </a:p>
         </p:txBody>
       </p:sp>
@@ -3853,52 +6843,52 @@
           <a:lstStyle/>
           <a:p>
             <a:r>
-              <a:rPr lang="hu-HU" dirty="0" smtClean="0"/>
+              <a:rPr lang="hu-HU" dirty="0"/>
               <a:t>Én csináltam meg a frontendet</a:t>
             </a:r>
             <a:r>
-              <a:rPr lang="en-US" dirty="0" smtClean="0"/>
+              <a:rPr lang="en-US" dirty="0"/>
               <a:t> </a:t>
             </a:r>
             <a:r>
-              <a:rPr lang="en-US" dirty="0" err="1" smtClean="0"/>
+              <a:rPr lang="en-US" dirty="0" err="1"/>
               <a:t>és</a:t>
             </a:r>
             <a:r>
-              <a:rPr lang="en-US" dirty="0" smtClean="0"/>
+              <a:rPr lang="en-US" dirty="0"/>
               <a:t> </a:t>
             </a:r>
             <a:r>
-              <a:rPr lang="en-US" dirty="0" err="1" smtClean="0"/>
+              <a:rPr lang="en-US" dirty="0" err="1"/>
               <a:t>az</a:t>
             </a:r>
             <a:r>
-              <a:rPr lang="en-US" dirty="0" smtClean="0"/>
+              <a:rPr lang="en-US" dirty="0"/>
               <a:t> </a:t>
             </a:r>
             <a:r>
-              <a:rPr lang="hu-HU" dirty="0" smtClean="0"/>
+              <a:rPr lang="hu-HU" dirty="0"/>
               <a:t>.</a:t>
             </a:r>
           </a:p>
           <a:p>
             <a:r>
-              <a:rPr lang="hu-HU" dirty="0" smtClean="0"/>
+              <a:rPr lang="hu-HU" dirty="0"/>
               <a:t>Bootstrap-et</a:t>
             </a:r>
             <a:r>
-              <a:rPr lang="en-US" dirty="0" smtClean="0"/>
+              <a:rPr lang="en-US" dirty="0"/>
               <a:t> </a:t>
             </a:r>
             <a:r>
-              <a:rPr lang="en-US" dirty="0" err="1" smtClean="0"/>
+              <a:rPr lang="en-US" dirty="0" err="1"/>
               <a:t>használtam</a:t>
             </a:r>
             <a:r>
-              <a:rPr lang="hu-HU" dirty="0" smtClean="0"/>
+              <a:rPr lang="hu-HU" dirty="0"/>
               <a:t>, hogy reszponzív legyen a weboldal.</a:t>
             </a:r>
-            <a:endParaRPr lang="en-US" dirty="0" smtClean="0"/>
+            <a:endParaRPr lang="en-US" dirty="0"/>
           </a:p>
         </p:txBody>
       </p:sp>
@@ -3943,7 +6933,7 @@
           <a:lstStyle/>
           <a:p>
             <a:r>
-              <a:rPr lang="en-US" dirty="0" err="1" smtClean="0"/>
+              <a:rPr lang="en-US" dirty="0" err="1"/>
               <a:t>Prezentáció</a:t>
             </a:r>
             <a:endParaRPr lang="hu-HU" dirty="0"/>
@@ -3966,30 +6956,25 @@
           <a:lstStyle/>
           <a:p>
             <a:r>
-              <a:rPr lang="hu-HU" smtClean="0"/>
+              <a:rPr lang="hu-HU"/>
               <a:t>Bemutatjuk a Release the Mags nevű webshopot.</a:t>
             </a:r>
           </a:p>
           <a:p>
             <a:r>
-              <a:rPr lang="hu-HU" smtClean="0"/>
+              <a:rPr lang="hu-HU"/>
               <a:t>Egy weboldal, ahol fegyvereket, katonai felszereléseket, járműveket és kellékeket lehet vásárolni.</a:t>
             </a:r>
           </a:p>
           <a:p>
             <a:r>
-              <a:rPr lang="hu-HU" b="1" smtClean="0">
+              <a:rPr lang="hu-HU" b="1">
                 <a:solidFill>
                   <a:srgbClr val="C00000"/>
                 </a:solidFill>
               </a:rPr>
               <a:t>Fegyvereket csak fegyvertartási engedéllyel lehet vásárolni és ha 18 éves elmúlt!</a:t>
             </a:r>
-            <a:endParaRPr lang="hu-HU" b="1">
-              <a:solidFill>
-                <a:srgbClr val="C00000"/>
-              </a:solidFill>
-            </a:endParaRPr>
           </a:p>
         </p:txBody>
       </p:sp>
@@ -4034,10 +7019,9 @@
           <a:lstStyle/>
           <a:p>
             <a:r>
-              <a:rPr lang="hu-HU" smtClean="0"/>
+              <a:rPr lang="hu-HU"/>
               <a:t>Az oldal tuajdonságai</a:t>
             </a:r>
-            <a:endParaRPr lang="hu-HU"/>
           </a:p>
         </p:txBody>
       </p:sp>
@@ -4061,26 +7045,26 @@
               <a:buChar char="-"/>
             </a:pPr>
             <a:r>
-              <a:rPr lang="en-US" dirty="0" err="1" smtClean="0"/>
+              <a:rPr lang="en-US" dirty="0" err="1"/>
               <a:t>Nem</a:t>
             </a:r>
             <a:r>
-              <a:rPr lang="en-US" dirty="0" smtClean="0"/>
+              <a:rPr lang="en-US" dirty="0"/>
               <a:t> </a:t>
             </a:r>
             <a:r>
-              <a:rPr lang="en-US" dirty="0" err="1" smtClean="0"/>
+              <a:rPr lang="en-US" dirty="0" err="1"/>
               <a:t>kell</a:t>
             </a:r>
             <a:r>
-              <a:rPr lang="en-US" dirty="0" smtClean="0"/>
+              <a:rPr lang="en-US" dirty="0"/>
               <a:t> </a:t>
             </a:r>
             <a:r>
-              <a:rPr lang="en-US" dirty="0" err="1" smtClean="0"/>
+              <a:rPr lang="en-US" dirty="0" err="1"/>
               <a:t>regisztrálni</a:t>
             </a:r>
-            <a:endParaRPr lang="en-US" dirty="0" smtClean="0"/>
+            <a:endParaRPr lang="en-US" dirty="0"/>
           </a:p>
           <a:p>
             <a:pPr>
@@ -4088,18 +7072,18 @@
               <a:buChar char="-"/>
             </a:pPr>
             <a:r>
-              <a:rPr lang="en-US" dirty="0" err="1" smtClean="0"/>
+              <a:rPr lang="en-US" dirty="0" err="1"/>
               <a:t>Gyors</a:t>
             </a:r>
             <a:r>
-              <a:rPr lang="en-US" dirty="0" smtClean="0"/>
+              <a:rPr lang="en-US" dirty="0"/>
               <a:t> </a:t>
             </a:r>
             <a:r>
-              <a:rPr lang="en-US" dirty="0" err="1" smtClean="0"/>
+              <a:rPr lang="en-US" dirty="0" err="1"/>
               <a:t>fizetés</a:t>
             </a:r>
-            <a:endParaRPr lang="en-US" dirty="0" smtClean="0"/>
+            <a:endParaRPr lang="en-US" dirty="0"/>
           </a:p>
           <a:p>
             <a:pPr>
@@ -4107,14 +7091,14 @@
               <a:buChar char="-"/>
             </a:pPr>
             <a:r>
-              <a:rPr lang="en-US" dirty="0" smtClean="0"/>
+              <a:rPr lang="en-US" dirty="0"/>
               <a:t>Nagy </a:t>
             </a:r>
             <a:r>
-              <a:rPr lang="en-US" dirty="0" err="1" smtClean="0"/>
+              <a:rPr lang="en-US" dirty="0" err="1"/>
               <a:t>választék</a:t>
             </a:r>
-            <a:endParaRPr lang="en-US" dirty="0" smtClean="0"/>
+            <a:endParaRPr lang="en-US" dirty="0"/>
           </a:p>
           <a:p>
             <a:pPr>
@@ -4122,15 +7106,15 @@
               <a:buChar char="-"/>
             </a:pPr>
             <a:r>
-              <a:rPr lang="en-US" dirty="0" err="1" smtClean="0"/>
+              <a:rPr lang="en-US" dirty="0" err="1"/>
               <a:t>kibaszott</a:t>
             </a:r>
             <a:r>
-              <a:rPr lang="en-US" dirty="0" smtClean="0"/>
+              <a:rPr lang="en-US" dirty="0"/>
               <a:t> </a:t>
             </a:r>
             <a:r>
-              <a:rPr lang="en-US" smtClean="0"/>
+              <a:rPr lang="en-US"/>
               <a:t>szar</a:t>
             </a:r>
             <a:endParaRPr lang="hu-HU" dirty="0"/>
@@ -4175,28 +7159,28 @@
         <p:spPr/>
         <p:txBody>
           <a:bodyPr>
-            <a:normAutofit/>
+            <a:normAutofit fontScale="90000"/>
           </a:bodyPr>
           <a:lstStyle/>
           <a:p>
             <a:r>
-              <a:rPr lang="en-US" sz="3600" dirty="0" err="1" smtClean="0"/>
+              <a:rPr lang="en-US" sz="3600" dirty="0" err="1"/>
               <a:t>Használt</a:t>
             </a:r>
             <a:r>
-              <a:rPr lang="en-US" sz="3600" dirty="0" smtClean="0"/>
+              <a:rPr lang="en-US" sz="3600" dirty="0"/>
               <a:t> </a:t>
             </a:r>
             <a:r>
-              <a:rPr lang="en-US" sz="3600" dirty="0" err="1" smtClean="0"/>
+              <a:rPr lang="en-US" sz="3600" dirty="0" err="1"/>
               <a:t>alkalmazások</a:t>
             </a:r>
             <a:r>
-              <a:rPr lang="en-US" sz="3600" dirty="0" smtClean="0"/>
+              <a:rPr lang="en-US" sz="3600" dirty="0"/>
               <a:t>/</a:t>
             </a:r>
             <a:r>
-              <a:rPr lang="en-US" sz="3600" dirty="0" err="1" smtClean="0"/>
+              <a:rPr lang="en-US" sz="3600" dirty="0" err="1"/>
               <a:t>programnyelvek</a:t>
             </a:r>
             <a:endParaRPr lang="hu-HU" sz="3600" dirty="0"/>
@@ -4219,92 +7203,92 @@
           <a:lstStyle/>
           <a:p>
             <a:r>
-              <a:rPr lang="en-US" dirty="0" smtClean="0"/>
+              <a:rPr lang="en-US" dirty="0"/>
               <a:t>HTML, CSS, JavaScript – </a:t>
             </a:r>
             <a:r>
-              <a:rPr lang="en-US" dirty="0" err="1" smtClean="0"/>
+              <a:rPr lang="en-US" dirty="0" err="1"/>
               <a:t>Weboldal</a:t>
             </a:r>
             <a:r>
-              <a:rPr lang="en-US" dirty="0" smtClean="0"/>
+              <a:rPr lang="en-US" dirty="0"/>
               <a:t> </a:t>
             </a:r>
             <a:r>
-              <a:rPr lang="en-US" dirty="0" err="1" smtClean="0"/>
+              <a:rPr lang="en-US" dirty="0" err="1"/>
               <a:t>elkészítése</a:t>
             </a:r>
-            <a:endParaRPr lang="en-US" dirty="0" smtClean="0"/>
-          </a:p>
-          <a:p>
-            <a:r>
-              <a:rPr lang="en-US" dirty="0" smtClean="0"/>
+            <a:endParaRPr lang="en-US" dirty="0"/>
+          </a:p>
+          <a:p>
+            <a:r>
+              <a:rPr lang="en-US" dirty="0"/>
               <a:t>PHP, Apache – </a:t>
             </a:r>
             <a:r>
-              <a:rPr lang="en-US" dirty="0" err="1" smtClean="0"/>
+              <a:rPr lang="en-US" dirty="0" err="1"/>
               <a:t>Adatbázis</a:t>
             </a:r>
             <a:r>
-              <a:rPr lang="en-US" dirty="0" smtClean="0"/>
+              <a:rPr lang="en-US" dirty="0"/>
               <a:t> </a:t>
             </a:r>
             <a:r>
-              <a:rPr lang="en-US" dirty="0" err="1" smtClean="0"/>
+              <a:rPr lang="en-US" dirty="0" err="1"/>
               <a:t>létrehozása</a:t>
             </a:r>
             <a:r>
-              <a:rPr lang="en-US" dirty="0" smtClean="0"/>
+              <a:rPr lang="en-US" dirty="0"/>
               <a:t>, </a:t>
             </a:r>
             <a:r>
-              <a:rPr lang="en-US" dirty="0" err="1" smtClean="0"/>
+              <a:rPr lang="en-US" dirty="0" err="1"/>
               <a:t>valamint</a:t>
             </a:r>
             <a:r>
-              <a:rPr lang="en-US" dirty="0" smtClean="0"/>
+              <a:rPr lang="en-US" dirty="0"/>
               <a:t> a </a:t>
             </a:r>
             <a:r>
-              <a:rPr lang="en-US" dirty="0" err="1" smtClean="0"/>
+              <a:rPr lang="en-US" dirty="0" err="1"/>
               <a:t>kigyűjtött</a:t>
             </a:r>
             <a:r>
-              <a:rPr lang="en-US" dirty="0" smtClean="0"/>
+              <a:rPr lang="en-US" dirty="0"/>
               <a:t> </a:t>
             </a:r>
             <a:r>
-              <a:rPr lang="en-US" dirty="0" err="1" smtClean="0"/>
+              <a:rPr lang="en-US" dirty="0" err="1"/>
               <a:t>adatok</a:t>
             </a:r>
             <a:r>
-              <a:rPr lang="en-US" dirty="0" smtClean="0"/>
+              <a:rPr lang="en-US" dirty="0"/>
               <a:t> </a:t>
             </a:r>
             <a:r>
-              <a:rPr lang="en-US" dirty="0" err="1" smtClean="0"/>
+              <a:rPr lang="en-US" dirty="0" err="1"/>
               <a:t>eltárolása</a:t>
             </a:r>
-            <a:endParaRPr lang="en-US" dirty="0" smtClean="0"/>
-          </a:p>
-          <a:p>
-            <a:r>
-              <a:rPr lang="en-US" dirty="0" smtClean="0"/>
+            <a:endParaRPr lang="en-US" dirty="0"/>
+          </a:p>
+          <a:p>
+            <a:r>
+              <a:rPr lang="en-US" dirty="0"/>
               <a:t>Bootstrap – </a:t>
             </a:r>
             <a:r>
-              <a:rPr lang="en-US" dirty="0" err="1" smtClean="0"/>
+              <a:rPr lang="en-US" dirty="0" err="1"/>
               <a:t>Weboldal</a:t>
             </a:r>
             <a:r>
-              <a:rPr lang="en-US" dirty="0" smtClean="0"/>
+              <a:rPr lang="en-US" dirty="0"/>
               <a:t> </a:t>
             </a:r>
             <a:r>
-              <a:rPr lang="en-US" dirty="0" err="1" smtClean="0"/>
+              <a:rPr lang="en-US" dirty="0" err="1"/>
               <a:t>dizájn</a:t>
             </a:r>
-            <a:endParaRPr lang="en-US" dirty="0" smtClean="0"/>
+            <a:endParaRPr lang="en-US" dirty="0"/>
           </a:p>
           <a:p>
             <a:endParaRPr lang="hu-HU" dirty="0"/>
@@ -4352,7 +7336,7 @@
           <a:lstStyle/>
           <a:p>
             <a:r>
-              <a:rPr lang="en-US" dirty="0" err="1" smtClean="0"/>
+              <a:rPr lang="en-US" dirty="0" err="1"/>
               <a:t>Kezelőfelület</a:t>
             </a:r>
             <a:endParaRPr lang="hu-HU" dirty="0"/>
@@ -4377,173 +7361,168 @@
           <a:lstStyle/>
           <a:p>
             <a:r>
-              <a:rPr lang="en-US" dirty="0" smtClean="0"/>
+              <a:rPr lang="en-US" dirty="0"/>
               <a:t>1. </a:t>
             </a:r>
             <a:r>
-              <a:rPr lang="en-US" dirty="0" err="1" smtClean="0"/>
+              <a:rPr lang="en-US" dirty="0" err="1"/>
               <a:t>Fejléc</a:t>
             </a:r>
-            <a:endParaRPr lang="en-US" dirty="0" smtClean="0"/>
+            <a:endParaRPr lang="en-US" dirty="0"/>
           </a:p>
           <a:p>
             <a:pPr lvl="1"/>
             <a:r>
-              <a:rPr lang="en-US" dirty="0" err="1" smtClean="0"/>
+              <a:rPr lang="en-US" dirty="0" err="1"/>
               <a:t>Keresés</a:t>
             </a:r>
             <a:r>
-              <a:rPr lang="en-US" dirty="0" smtClean="0"/>
+              <a:rPr lang="en-US" dirty="0"/>
               <a:t> </a:t>
             </a:r>
             <a:r>
-              <a:rPr lang="en-US" dirty="0" err="1" smtClean="0"/>
+              <a:rPr lang="en-US" dirty="0" err="1"/>
               <a:t>funkció</a:t>
             </a:r>
-            <a:endParaRPr lang="en-US" dirty="0" smtClean="0"/>
+            <a:endParaRPr lang="en-US" dirty="0"/>
           </a:p>
           <a:p>
             <a:pPr lvl="1"/>
             <a:r>
-              <a:rPr lang="en-US" dirty="0" err="1" smtClean="0"/>
+              <a:rPr lang="en-US" dirty="0" err="1"/>
               <a:t>Menük</a:t>
             </a:r>
             <a:r>
-              <a:rPr lang="en-US" dirty="0" smtClean="0"/>
+              <a:rPr lang="en-US" dirty="0"/>
               <a:t> (</a:t>
             </a:r>
             <a:r>
-              <a:rPr lang="en-US" dirty="0" err="1" smtClean="0"/>
+              <a:rPr lang="en-US" dirty="0" err="1"/>
               <a:t>Kezdőlap</a:t>
             </a:r>
             <a:r>
-              <a:rPr lang="en-US" dirty="0" smtClean="0"/>
+              <a:rPr lang="en-US" dirty="0"/>
               <a:t>, </a:t>
             </a:r>
             <a:r>
-              <a:rPr lang="en-US" dirty="0" err="1" smtClean="0"/>
+              <a:rPr lang="en-US" dirty="0" err="1"/>
               <a:t>kategóriák</a:t>
             </a:r>
             <a:r>
-              <a:rPr lang="en-US" dirty="0" smtClean="0"/>
+              <a:rPr lang="en-US" dirty="0"/>
               <a:t>, </a:t>
             </a:r>
             <a:r>
-              <a:rPr lang="en-US" dirty="0" err="1" smtClean="0"/>
+              <a:rPr lang="en-US" dirty="0" err="1"/>
               <a:t>rólunk</a:t>
             </a:r>
             <a:r>
-              <a:rPr lang="en-US" dirty="0" smtClean="0"/>
+              <a:rPr lang="en-US" dirty="0"/>
               <a:t>)</a:t>
             </a:r>
-            <a:endParaRPr lang="en-US" dirty="0" smtClean="0"/>
-          </a:p>
-          <a:p>
-            <a:r>
-              <a:rPr lang="hu-HU" dirty="0" smtClean="0"/>
-              <a:t>2</a:t>
-            </a:r>
-            <a:r>
-              <a:rPr lang="hu-HU" dirty="0" smtClean="0"/>
-              <a:t>. </a:t>
-            </a:r>
-            <a:r>
-              <a:rPr lang="en-US" dirty="0" err="1" smtClean="0"/>
+          </a:p>
+          <a:p>
+            <a:r>
+              <a:rPr lang="hu-HU" dirty="0"/>
+              <a:t>2. </a:t>
+            </a:r>
+            <a:r>
+              <a:rPr lang="en-US" dirty="0" err="1"/>
               <a:t>Termékmenü</a:t>
             </a:r>
-            <a:endParaRPr lang="en-US" dirty="0" smtClean="0"/>
+            <a:endParaRPr lang="en-US" dirty="0"/>
           </a:p>
           <a:p>
             <a:pPr lvl="1"/>
             <a:r>
-              <a:rPr lang="en-US" dirty="0" err="1" smtClean="0"/>
+              <a:rPr lang="en-US" dirty="0" err="1"/>
               <a:t>Fegyverkategóriák</a:t>
             </a:r>
-            <a:endParaRPr lang="en-US" dirty="0" smtClean="0"/>
+            <a:endParaRPr lang="en-US" dirty="0"/>
           </a:p>
           <a:p>
             <a:pPr lvl="2"/>
             <a:r>
-              <a:rPr lang="en-US" dirty="0" smtClean="0"/>
+              <a:rPr lang="en-US" dirty="0"/>
               <a:t>5 </a:t>
             </a:r>
             <a:r>
-              <a:rPr lang="en-US" dirty="0" err="1" smtClean="0"/>
+              <a:rPr lang="en-US" dirty="0" err="1"/>
               <a:t>fajta</a:t>
             </a:r>
             <a:r>
-              <a:rPr lang="en-US" dirty="0" smtClean="0"/>
+              <a:rPr lang="en-US" dirty="0"/>
               <a:t> </a:t>
             </a:r>
             <a:r>
-              <a:rPr lang="en-US" dirty="0" err="1" smtClean="0"/>
+              <a:rPr lang="en-US" dirty="0" err="1"/>
               <a:t>fegyvertípusokból</a:t>
             </a:r>
             <a:r>
-              <a:rPr lang="en-US" dirty="0" smtClean="0"/>
+              <a:rPr lang="en-US" dirty="0"/>
               <a:t> </a:t>
             </a:r>
             <a:r>
-              <a:rPr lang="en-US" dirty="0" err="1" smtClean="0"/>
+              <a:rPr lang="en-US" dirty="0" err="1"/>
               <a:t>és</a:t>
             </a:r>
             <a:r>
-              <a:rPr lang="en-US" dirty="0" smtClean="0"/>
+              <a:rPr lang="en-US" dirty="0"/>
               <a:t> </a:t>
             </a:r>
             <a:r>
-              <a:rPr lang="en-US" dirty="0" err="1" smtClean="0"/>
+              <a:rPr lang="en-US" dirty="0" err="1"/>
               <a:t>gránátokból</a:t>
             </a:r>
             <a:r>
-              <a:rPr lang="en-US" dirty="0" smtClean="0"/>
+              <a:rPr lang="en-US" dirty="0"/>
               <a:t> </a:t>
             </a:r>
             <a:r>
-              <a:rPr lang="en-US" dirty="0" err="1" smtClean="0"/>
+              <a:rPr lang="en-US" dirty="0" err="1"/>
               <a:t>lehet</a:t>
             </a:r>
             <a:r>
-              <a:rPr lang="en-US" dirty="0" smtClean="0"/>
+              <a:rPr lang="en-US" dirty="0"/>
               <a:t> </a:t>
             </a:r>
             <a:r>
-              <a:rPr lang="en-US" dirty="0" err="1" smtClean="0"/>
+              <a:rPr lang="en-US" dirty="0" err="1"/>
               <a:t>választani</a:t>
             </a:r>
-            <a:endParaRPr lang="en-US" dirty="0" smtClean="0"/>
+            <a:endParaRPr lang="en-US" dirty="0"/>
           </a:p>
           <a:p>
             <a:pPr lvl="1"/>
             <a:r>
-              <a:rPr lang="en-US" dirty="0" err="1" smtClean="0"/>
+              <a:rPr lang="en-US" dirty="0" err="1"/>
               <a:t>Fegyverajánlások</a:t>
             </a:r>
-            <a:endParaRPr lang="en-US" dirty="0" smtClean="0"/>
+            <a:endParaRPr lang="en-US" dirty="0"/>
           </a:p>
           <a:p>
             <a:pPr lvl="2"/>
             <a:r>
-              <a:rPr lang="en-US" dirty="0" err="1" smtClean="0"/>
+              <a:rPr lang="en-US" dirty="0" err="1"/>
               <a:t>Véletlenszerű</a:t>
             </a:r>
             <a:r>
-              <a:rPr lang="en-US" dirty="0" smtClean="0"/>
+              <a:rPr lang="en-US" dirty="0"/>
               <a:t> </a:t>
             </a:r>
             <a:r>
-              <a:rPr lang="en-US" dirty="0" err="1" smtClean="0"/>
+              <a:rPr lang="en-US" dirty="0" err="1"/>
               <a:t>fegyverek</a:t>
             </a:r>
             <a:r>
-              <a:rPr lang="en-US" dirty="0" smtClean="0"/>
+              <a:rPr lang="en-US" dirty="0"/>
               <a:t> </a:t>
             </a:r>
             <a:r>
-              <a:rPr lang="en-US" dirty="0" err="1" smtClean="0"/>
+              <a:rPr lang="en-US" dirty="0" err="1"/>
               <a:t>ajánlása</a:t>
             </a:r>
-            <a:endParaRPr lang="en-US" dirty="0" smtClean="0"/>
+            <a:endParaRPr lang="en-US" dirty="0"/>
           </a:p>
         </p:txBody>
       </p:sp>
@@ -4556,9 +7535,9 @@
 </file>
 
 <file path=ppt/theme/theme1.xml><?xml version="1.0" encoding="utf-8"?>
-<a:theme xmlns:a="http://schemas.openxmlformats.org/drawingml/2006/main" name="Office Theme">
+<a:theme xmlns:a="http://schemas.openxmlformats.org/drawingml/2006/main" name="Dimenzió">
   <a:themeElements>
-    <a:clrScheme name="Office">
+    <a:clrScheme name="Dimenzió">
       <a:dk1>
         <a:sysClr val="windowText" lastClr="000000"/>
       </a:dk1>
@@ -4566,80 +7545,46 @@
         <a:sysClr val="window" lastClr="FFFFFF"/>
       </a:lt1>
       <a:dk2>
-        <a:srgbClr val="1F497D"/>
+        <a:srgbClr val="2C3C43"/>
       </a:dk2>
       <a:lt2>
-        <a:srgbClr val="EEECE1"/>
+        <a:srgbClr val="EBEBEB"/>
       </a:lt2>
       <a:accent1>
-        <a:srgbClr val="4F81BD"/>
+        <a:srgbClr val="90C226"/>
       </a:accent1>
       <a:accent2>
-        <a:srgbClr val="C0504D"/>
+        <a:srgbClr val="54A021"/>
       </a:accent2>
       <a:accent3>
-        <a:srgbClr val="9BBB59"/>
+        <a:srgbClr val="E6B91E"/>
       </a:accent3>
       <a:accent4>
-        <a:srgbClr val="8064A2"/>
+        <a:srgbClr val="E76618"/>
       </a:accent4>
       <a:accent5>
-        <a:srgbClr val="4BACC6"/>
+        <a:srgbClr val="C42F1A"/>
       </a:accent5>
       <a:accent6>
-        <a:srgbClr val="F79646"/>
+        <a:srgbClr val="918655"/>
       </a:accent6>
       <a:hlink>
-        <a:srgbClr val="0000FF"/>
+        <a:srgbClr val="99CA3C"/>
       </a:hlink>
       <a:folHlink>
-        <a:srgbClr val="800080"/>
+        <a:srgbClr val="B9D181"/>
       </a:folHlink>
     </a:clrScheme>
-    <a:fontScheme name="Office">
+    <a:fontScheme name="Dimenzió">
       <a:majorFont>
-        <a:latin typeface="Calibri"/>
+        <a:latin typeface="Trebuchet MS" panose="020B0603020202020204"/>
         <a:ea typeface=""/>
         <a:cs typeface=""/>
-        <a:font script="Jpan" typeface="ＭＳ Ｐゴシック"/>
+        <a:font script="Jpan" typeface="メイリオ"/>
         <a:font script="Hang" typeface="맑은 고딕"/>
-        <a:font script="Hans" typeface="宋体"/>
-        <a:font script="Hant" typeface="新細明體"/>
-        <a:font script="Arab" typeface="Times New Roman"/>
-        <a:font script="Hebr" typeface="Times New Roman"/>
-        <a:font script="Thai" typeface="Angsana New"/>
-        <a:font script="Ethi" typeface="Nyala"/>
-        <a:font script="Beng" typeface="Vrinda"/>
-        <a:font script="Gujr" typeface="Shruti"/>
-        <a:font script="Khmr" typeface="MoolBoran"/>
-        <a:font script="Knda" typeface="Tunga"/>
-        <a:font script="Guru" typeface="Raavi"/>
-        <a:font script="Cans" typeface="Euphemia"/>
-        <a:font script="Cher" typeface="Plantagenet Cherokee"/>
-        <a:font script="Yiii" typeface="Microsoft Yi Baiti"/>
-        <a:font script="Tibt" typeface="Microsoft Himalaya"/>
-        <a:font script="Thaa" typeface="MV Boli"/>
-        <a:font script="Deva" typeface="Mangal"/>
-        <a:font script="Telu" typeface="Gautami"/>
-        <a:font script="Taml" typeface="Latha"/>
-        <a:font script="Syrc" typeface="Estrangelo Edessa"/>
-        <a:font script="Orya" typeface="Kalinga"/>
-        <a:font script="Mlym" typeface="Kartika"/>
-        <a:font script="Laoo" typeface="DokChampa"/>
-        <a:font script="Sinh" typeface="Iskoola Pota"/>
-        <a:font script="Mong" typeface="Mongolian Baiti"/>
-        <a:font script="Viet" typeface="Times New Roman"/>
-        <a:font script="Uigh" typeface="Microsoft Uighur"/>
-      </a:majorFont>
-      <a:minorFont>
-        <a:latin typeface="Calibri"/>
-        <a:ea typeface=""/>
-        <a:cs typeface=""/>
-        <a:font script="Jpan" typeface="ＭＳ Ｐゴシック"/>
-        <a:font script="Hang" typeface="맑은 고딕"/>
-        <a:font script="Hans" typeface="宋体"/>
-        <a:font script="Hant" typeface="新細明體"/>
-        <a:font script="Arab" typeface="Arial"/>
+        <a:font script="Hans" typeface="方正姚体"/>
+        <a:font script="Hant" typeface="微軟正黑體"/>
+        <a:font script="Arab" typeface="Tahoma"/>
         <a:font script="Hebr" typeface="Arial"/>
         <a:font script="Thai" typeface="Cordia New"/>
         <a:font script="Ethi" typeface="Nyala"/>
@@ -4662,11 +7607,47 @@
         <a:font script="Laoo" typeface="DokChampa"/>
         <a:font script="Sinh" typeface="Iskoola Pota"/>
         <a:font script="Mong" typeface="Mongolian Baiti"/>
+        <a:font script="Viet" typeface="Tahoma"/>
+        <a:font script="Uigh" typeface="Microsoft Uighur"/>
+        <a:font script="Geor" typeface="Sylfaen"/>
+      </a:majorFont>
+      <a:minorFont>
+        <a:latin typeface="Trebuchet MS" panose="020B0603020202020204"/>
+        <a:ea typeface=""/>
+        <a:cs typeface=""/>
+        <a:font script="Jpan" typeface="メイリオ"/>
+        <a:font script="Hang" typeface="HY그래픽M"/>
+        <a:font script="Hans" typeface="华文新魏"/>
+        <a:font script="Hant" typeface="微軟正黑體"/>
+        <a:font script="Arab" typeface="Tahoma"/>
+        <a:font script="Hebr" typeface="Gisha"/>
+        <a:font script="Thai" typeface="IrisUPC"/>
+        <a:font script="Ethi" typeface="Nyala"/>
+        <a:font script="Beng" typeface="Vrinda"/>
+        <a:font script="Gujr" typeface="Shruti"/>
+        <a:font script="Khmr" typeface="DaunPenh"/>
+        <a:font script="Knda" typeface="Tunga"/>
+        <a:font script="Guru" typeface="Raavi"/>
+        <a:font script="Cans" typeface="Euphemia"/>
+        <a:font script="Cher" typeface="Plantagenet Cherokee"/>
+        <a:font script="Yiii" typeface="Microsoft Yi Baiti"/>
+        <a:font script="Tibt" typeface="Microsoft Himalaya"/>
+        <a:font script="Thaa" typeface="MV Boli"/>
+        <a:font script="Deva" typeface="Mangal"/>
+        <a:font script="Telu" typeface="Gautami"/>
+        <a:font script="Taml" typeface="Latha"/>
+        <a:font script="Syrc" typeface="Estrangelo Edessa"/>
+        <a:font script="Orya" typeface="Kalinga"/>
+        <a:font script="Mlym" typeface="Kartika"/>
+        <a:font script="Laoo" typeface="DokChampa"/>
+        <a:font script="Sinh" typeface="Iskoola Pota"/>
+        <a:font script="Mong" typeface="Mongolian Baiti"/>
         <a:font script="Viet" typeface="Arial"/>
         <a:font script="Uigh" typeface="Microsoft Uighur"/>
+        <a:font script="Geor" typeface="Sylfaen"/>
       </a:minorFont>
     </a:fontScheme>
-    <a:fmtScheme name="Office">
+    <a:fmtScheme name="Dimenzió">
       <a:fillStyleLst>
         <a:solidFill>
           <a:schemeClr val="phClr"/>
@@ -4675,66 +7656,50 @@
           <a:gsLst>
             <a:gs pos="0">
               <a:schemeClr val="phClr">
-                <a:tint val="50000"/>
-                <a:satMod val="300000"/>
+                <a:tint val="65000"/>
+                <a:lumMod val="110000"/>
               </a:schemeClr>
             </a:gs>
-            <a:gs pos="35000">
+            <a:gs pos="88000">
               <a:schemeClr val="phClr">
-                <a:tint val="37000"/>
-                <a:satMod val="300000"/>
-              </a:schemeClr>
-            </a:gs>
-            <a:gs pos="100000">
-              <a:schemeClr val="phClr">
-                <a:tint val="15000"/>
-                <a:satMod val="350000"/>
+                <a:tint val="90000"/>
               </a:schemeClr>
             </a:gs>
           </a:gsLst>
-          <a:lin ang="16200000" scaled="1"/>
+          <a:lin ang="5400000" scaled="0"/>
         </a:gradFill>
         <a:gradFill rotWithShape="1">
           <a:gsLst>
             <a:gs pos="0">
               <a:schemeClr val="phClr">
-                <a:shade val="51000"/>
-                <a:satMod val="130000"/>
+                <a:tint val="96000"/>
+                <a:lumMod val="100000"/>
               </a:schemeClr>
             </a:gs>
-            <a:gs pos="80000">
-              <a:schemeClr val="phClr">
-                <a:shade val="93000"/>
-                <a:satMod val="130000"/>
-              </a:schemeClr>
-            </a:gs>
-            <a:gs pos="100000">
+            <a:gs pos="78000">
               <a:schemeClr val="phClr">
                 <a:shade val="94000"/>
-                <a:satMod val="135000"/>
+                <a:lumMod val="94000"/>
               </a:schemeClr>
             </a:gs>
           </a:gsLst>
-          <a:lin ang="16200000" scaled="0"/>
+          <a:lin ang="5400000" scaled="0"/>
         </a:gradFill>
       </a:fillStyleLst>
       <a:lnStyleLst>
-        <a:ln w="9525" cap="flat" cmpd="sng" algn="ctr">
-          <a:solidFill>
-            <a:schemeClr val="phClr">
-              <a:shade val="95000"/>
-              <a:satMod val="105000"/>
-            </a:schemeClr>
-          </a:solidFill>
-          <a:prstDash val="solid"/>
-        </a:ln>
-        <a:ln w="25400" cap="flat" cmpd="sng" algn="ctr">
+        <a:ln w="12700" cap="rnd" cmpd="sng" algn="ctr">
           <a:solidFill>
             <a:schemeClr val="phClr"/>
           </a:solidFill>
           <a:prstDash val="solid"/>
         </a:ln>
-        <a:ln w="38100" cap="flat" cmpd="sng" algn="ctr">
+        <a:ln w="19050" cap="rnd" cmpd="sng" algn="ctr">
+          <a:solidFill>
+            <a:schemeClr val="phClr"/>
+          </a:solidFill>
+          <a:prstDash val="solid"/>
+        </a:ln>
+        <a:ln w="25400" cap="rnd" cmpd="sng" algn="ctr">
           <a:solidFill>
             <a:schemeClr val="phClr"/>
           </a:solidFill>
@@ -4743,17 +7708,11 @@
       </a:lnStyleLst>
       <a:effectStyleLst>
         <a:effectStyle>
-          <a:effectLst>
-            <a:outerShdw blurRad="40000" dist="20000" dir="5400000" rotWithShape="0">
-              <a:srgbClr val="000000">
-                <a:alpha val="38000"/>
-              </a:srgbClr>
-            </a:outerShdw>
-          </a:effectLst>
+          <a:effectLst/>
         </a:effectStyle>
         <a:effectStyle>
           <a:effectLst>
-            <a:outerShdw blurRad="40000" dist="23000" dir="5400000" rotWithShape="0">
+            <a:outerShdw blurRad="38100" dist="25400" dir="5400000" rotWithShape="0">
               <a:srgbClr val="000000">
                 <a:alpha val="35000"/>
               </a:srgbClr>
@@ -4762,7 +7721,7 @@
         </a:effectStyle>
         <a:effectStyle>
           <a:effectLst>
-            <a:outerShdw blurRad="40000" dist="23000" dir="5400000" rotWithShape="0">
+            <a:outerShdw blurRad="50800" dist="38100" dir="5400000" rotWithShape="0">
               <a:srgbClr val="000000">
                 <a:alpha val="35000"/>
               </a:srgbClr>
@@ -4772,12 +7731,10 @@
             <a:camera prst="orthographicFront">
               <a:rot lat="0" lon="0" rev="0"/>
             </a:camera>
-            <a:lightRig rig="threePt" dir="t">
-              <a:rot lat="0" lon="0" rev="1200000"/>
-            </a:lightRig>
+            <a:lightRig rig="threePt" dir="tl"/>
           </a:scene3d>
-          <a:sp3d>
-            <a:bevelT w="63500" h="25400"/>
+          <a:sp3d prstMaterial="plastic">
+            <a:bevelT w="0" h="0"/>
           </a:sp3d>
         </a:effectStyle>
       </a:effectStyleLst>
@@ -4789,45 +7746,36 @@
           <a:gsLst>
             <a:gs pos="0">
               <a:schemeClr val="phClr">
-                <a:tint val="40000"/>
-                <a:satMod val="350000"/>
+                <a:tint val="90000"/>
+                <a:lumMod val="104000"/>
               </a:schemeClr>
             </a:gs>
-            <a:gs pos="40000">
+            <a:gs pos="94000">
               <a:schemeClr val="phClr">
-                <a:tint val="45000"/>
-                <a:shade val="99000"/>
-                <a:satMod val="350000"/>
-              </a:schemeClr>
-            </a:gs>
-            <a:gs pos="100000">
-              <a:schemeClr val="phClr">
-                <a:shade val="20000"/>
-                <a:satMod val="255000"/>
+                <a:shade val="96000"/>
+                <a:lumMod val="82000"/>
               </a:schemeClr>
             </a:gs>
           </a:gsLst>
-          <a:path path="circle">
-            <a:fillToRect l="50000" t="-80000" r="50000" b="180000"/>
-          </a:path>
+          <a:lin ang="5400000" scaled="0"/>
         </a:gradFill>
         <a:gradFill rotWithShape="1">
           <a:gsLst>
             <a:gs pos="0">
               <a:schemeClr val="phClr">
-                <a:tint val="80000"/>
-                <a:satMod val="300000"/>
+                <a:tint val="90000"/>
+                <a:lumMod val="110000"/>
               </a:schemeClr>
             </a:gs>
             <a:gs pos="100000">
               <a:schemeClr val="phClr">
-                <a:shade val="30000"/>
-                <a:satMod val="200000"/>
+                <a:shade val="94000"/>
+                <a:lumMod val="96000"/>
               </a:schemeClr>
             </a:gs>
           </a:gsLst>
           <a:path path="circle">
-            <a:fillToRect l="50000" t="50000" r="50000" b="50000"/>
+            <a:fillToRect l="50000" t="50000" r="100000" b="100000"/>
           </a:path>
         </a:gradFill>
       </a:bgFillStyleLst>
@@ -4835,5 +7783,10 @@
   </a:themeElements>
   <a:objectDefaults/>
   <a:extraClrSchemeLst/>
+  <a:extLst>
+    <a:ext uri="{05A4C25C-085E-4340-85A3-A5531E510DB2}">
+      <thm15:themeFamily xmlns:thm15="http://schemas.microsoft.com/office/thememl/2012/main" name="Facet" id="{C0C680CD-088A-49FC-A102-D699147F32B2}" vid="{CFBC31BA-B70F-4F30-BCAA-4F3011E16C4D}"/>
+    </a:ext>
+  </a:extLst>
 </a:theme>
 </file>
--- a/Szoftverfejlesztő- és tesztelő vizsgaremek.pptx
+++ b/Szoftverfejlesztő- és tesztelő vizsgaremek.pptx
@@ -117,7 +117,7 @@
   </p:defaultTextStyle>
   <p:extLst>
     <p:ext uri="{EFAFB233-063F-42B5-8137-9DF3F51BA10A}">
-      <p15:sldGuideLst xmlns:p15="http://schemas.microsoft.com/office/powerpoint/2012/main">
+      <p15:sldGuideLst xmlns="" xmlns:p15="http://schemas.microsoft.com/office/powerpoint/2012/main">
         <p15:guide id="1" orient="horz" pos="2160">
           <p15:clr>
             <a:srgbClr val="A4A3A4"/>
@@ -981,7 +981,7 @@
     </p:spTree>
     <p:extLst>
       <p:ext uri="{BB962C8B-B14F-4D97-AF65-F5344CB8AC3E}">
-        <p14:creationId xmlns:p14="http://schemas.microsoft.com/office/powerpoint/2010/main" val="2652331471"/>
+        <p14:creationId xmlns="" xmlns:p14="http://schemas.microsoft.com/office/powerpoint/2010/main" val="2652331471"/>
       </p:ext>
     </p:extLst>
   </p:cSld>
@@ -1234,7 +1234,7 @@
     </p:spTree>
     <p:extLst>
       <p:ext uri="{BB962C8B-B14F-4D97-AF65-F5344CB8AC3E}">
-        <p14:creationId xmlns:p14="http://schemas.microsoft.com/office/powerpoint/2010/main" val="2554071393"/>
+        <p14:creationId xmlns="" xmlns:p14="http://schemas.microsoft.com/office/powerpoint/2010/main" val="2554071393"/>
       </p:ext>
     </p:extLst>
   </p:cSld>
@@ -1632,7 +1632,7 @@
     </p:spTree>
     <p:extLst>
       <p:ext uri="{BB962C8B-B14F-4D97-AF65-F5344CB8AC3E}">
-        <p14:creationId xmlns:p14="http://schemas.microsoft.com/office/powerpoint/2010/main" val="1754991079"/>
+        <p14:creationId xmlns="" xmlns:p14="http://schemas.microsoft.com/office/powerpoint/2010/main" val="1754991079"/>
       </p:ext>
     </p:extLst>
   </p:cSld>
@@ -1885,7 +1885,7 @@
     </p:spTree>
     <p:extLst>
       <p:ext uri="{BB962C8B-B14F-4D97-AF65-F5344CB8AC3E}">
-        <p14:creationId xmlns:p14="http://schemas.microsoft.com/office/powerpoint/2010/main" val="857741157"/>
+        <p14:creationId xmlns="" xmlns:p14="http://schemas.microsoft.com/office/powerpoint/2010/main" val="857741157"/>
       </p:ext>
     </p:extLst>
   </p:cSld>
@@ -2283,7 +2283,7 @@
     </p:spTree>
     <p:extLst>
       <p:ext uri="{BB962C8B-B14F-4D97-AF65-F5344CB8AC3E}">
-        <p14:creationId xmlns:p14="http://schemas.microsoft.com/office/powerpoint/2010/main" val="1341717093"/>
+        <p14:creationId xmlns="" xmlns:p14="http://schemas.microsoft.com/office/powerpoint/2010/main" val="1341717093"/>
       </p:ext>
     </p:extLst>
   </p:cSld>
@@ -2596,7 +2596,7 @@
     </p:spTree>
     <p:extLst>
       <p:ext uri="{BB962C8B-B14F-4D97-AF65-F5344CB8AC3E}">
-        <p14:creationId xmlns:p14="http://schemas.microsoft.com/office/powerpoint/2010/main" val="649406926"/>
+        <p14:creationId xmlns="" xmlns:p14="http://schemas.microsoft.com/office/powerpoint/2010/main" val="649406926"/>
       </p:ext>
     </p:extLst>
   </p:cSld>
@@ -2768,7 +2768,7 @@
     </p:spTree>
     <p:extLst>
       <p:ext uri="{BB962C8B-B14F-4D97-AF65-F5344CB8AC3E}">
-        <p14:creationId xmlns:p14="http://schemas.microsoft.com/office/powerpoint/2010/main" val="1749705606"/>
+        <p14:creationId xmlns="" xmlns:p14="http://schemas.microsoft.com/office/powerpoint/2010/main" val="1749705606"/>
       </p:ext>
     </p:extLst>
   </p:cSld>
@@ -2950,7 +2950,7 @@
     </p:spTree>
     <p:extLst>
       <p:ext uri="{BB962C8B-B14F-4D97-AF65-F5344CB8AC3E}">
-        <p14:creationId xmlns:p14="http://schemas.microsoft.com/office/powerpoint/2010/main" val="3017387510"/>
+        <p14:creationId xmlns="" xmlns:p14="http://schemas.microsoft.com/office/powerpoint/2010/main" val="3017387510"/>
       </p:ext>
     </p:extLst>
   </p:cSld>
@@ -3122,7 +3122,7 @@
     </p:spTree>
     <p:extLst>
       <p:ext uri="{BB962C8B-B14F-4D97-AF65-F5344CB8AC3E}">
-        <p14:creationId xmlns:p14="http://schemas.microsoft.com/office/powerpoint/2010/main" val="711260976"/>
+        <p14:creationId xmlns="" xmlns:p14="http://schemas.microsoft.com/office/powerpoint/2010/main" val="711260976"/>
       </p:ext>
     </p:extLst>
   </p:cSld>
@@ -3371,7 +3371,7 @@
     </p:spTree>
     <p:extLst>
       <p:ext uri="{BB962C8B-B14F-4D97-AF65-F5344CB8AC3E}">
-        <p14:creationId xmlns:p14="http://schemas.microsoft.com/office/powerpoint/2010/main" val="488066856"/>
+        <p14:creationId xmlns="" xmlns:p14="http://schemas.microsoft.com/office/powerpoint/2010/main" val="488066856"/>
       </p:ext>
     </p:extLst>
   </p:cSld>
@@ -3670,7 +3670,7 @@
     </p:spTree>
     <p:extLst>
       <p:ext uri="{BB962C8B-B14F-4D97-AF65-F5344CB8AC3E}">
-        <p14:creationId xmlns:p14="http://schemas.microsoft.com/office/powerpoint/2010/main" val="3873652194"/>
+        <p14:creationId xmlns="" xmlns:p14="http://schemas.microsoft.com/office/powerpoint/2010/main" val="3873652194"/>
       </p:ext>
     </p:extLst>
   </p:cSld>
@@ -4051,7 +4051,7 @@
     </p:spTree>
     <p:extLst>
       <p:ext uri="{BB962C8B-B14F-4D97-AF65-F5344CB8AC3E}">
-        <p14:creationId xmlns:p14="http://schemas.microsoft.com/office/powerpoint/2010/main" val="2017929926"/>
+        <p14:creationId xmlns="" xmlns:p14="http://schemas.microsoft.com/office/powerpoint/2010/main" val="2017929926"/>
       </p:ext>
     </p:extLst>
   </p:cSld>
@@ -4176,7 +4176,7 @@
     </p:spTree>
     <p:extLst>
       <p:ext uri="{BB962C8B-B14F-4D97-AF65-F5344CB8AC3E}">
-        <p14:creationId xmlns:p14="http://schemas.microsoft.com/office/powerpoint/2010/main" val="481938020"/>
+        <p14:creationId xmlns="" xmlns:p14="http://schemas.microsoft.com/office/powerpoint/2010/main" val="481938020"/>
       </p:ext>
     </p:extLst>
   </p:cSld>
@@ -4273,7 +4273,7 @@
     </p:spTree>
     <p:extLst>
       <p:ext uri="{BB962C8B-B14F-4D97-AF65-F5344CB8AC3E}">
-        <p14:creationId xmlns:p14="http://schemas.microsoft.com/office/powerpoint/2010/main" val="3224844826"/>
+        <p14:creationId xmlns="" xmlns:p14="http://schemas.microsoft.com/office/powerpoint/2010/main" val="3224844826"/>
       </p:ext>
     </p:extLst>
   </p:cSld>
@@ -4530,7 +4530,7 @@
     </p:spTree>
     <p:extLst>
       <p:ext uri="{BB962C8B-B14F-4D97-AF65-F5344CB8AC3E}">
-        <p14:creationId xmlns:p14="http://schemas.microsoft.com/office/powerpoint/2010/main" val="3975097974"/>
+        <p14:creationId xmlns="" xmlns:p14="http://schemas.microsoft.com/office/powerpoint/2010/main" val="3975097974"/>
       </p:ext>
     </p:extLst>
   </p:cSld>
@@ -4795,7 +4795,7 @@
     </p:spTree>
     <p:extLst>
       <p:ext uri="{BB962C8B-B14F-4D97-AF65-F5344CB8AC3E}">
-        <p14:creationId xmlns:p14="http://schemas.microsoft.com/office/powerpoint/2010/main" val="2339674578"/>
+        <p14:creationId xmlns="" xmlns:p14="http://schemas.microsoft.com/office/powerpoint/2010/main" val="2339674578"/>
       </p:ext>
     </p:extLst>
   </p:cSld>
@@ -5645,7 +5645,7 @@
     </p:spTree>
     <p:extLst>
       <p:ext uri="{BB962C8B-B14F-4D97-AF65-F5344CB8AC3E}">
-        <p14:creationId xmlns:p14="http://schemas.microsoft.com/office/powerpoint/2010/main" val="677202443"/>
+        <p14:creationId xmlns="" xmlns:p14="http://schemas.microsoft.com/office/powerpoint/2010/main" val="677202443"/>
       </p:ext>
     </p:extLst>
   </p:cSld>
@@ -6131,8 +6131,32 @@
           <a:lstStyle/>
           <a:p>
             <a:r>
-              <a:rPr lang="hu-HU"/>
-              <a:t>Fuglovics Konor, Uivárosi Katona Gábriel, Kiss-Fodor Zsombor, Szöllősy Marcell</a:t>
+              <a:rPr lang="hu-HU" dirty="0"/>
+              <a:t>Fuglovics Konor, </a:t>
+            </a:r>
+            <a:r>
+              <a:rPr lang="hu-HU" dirty="0" err="1"/>
+              <a:t>Uivárosi</a:t>
+            </a:r>
+            <a:r>
+              <a:rPr lang="hu-HU" dirty="0"/>
+              <a:t> Katona Gábriel, </a:t>
+            </a:r>
+            <a:r>
+              <a:rPr lang="hu-HU" dirty="0" err="1"/>
+              <a:t>Kiss-Fodor</a:t>
+            </a:r>
+            <a:r>
+              <a:rPr lang="hu-HU" dirty="0"/>
+              <a:t> Zsombor, </a:t>
+            </a:r>
+            <a:r>
+              <a:rPr lang="hu-HU" dirty="0" err="1"/>
+              <a:t>Szöllősy</a:t>
+            </a:r>
+            <a:r>
+              <a:rPr lang="hu-HU" dirty="0"/>
+              <a:t> Marcell</a:t>
             </a:r>
           </a:p>
         </p:txBody>
@@ -6206,67 +6230,37 @@
             </a:pPr>
             <a:r>
               <a:rPr lang="en-US" dirty="0"/>
-              <a:t>3. Slideshow</a:t>
-            </a:r>
+              <a:t>3. </a:t>
+            </a:r>
+            <a:r>
+              <a:rPr lang="en-US" dirty="0" err="1" smtClean="0"/>
+              <a:t>Kosár</a:t>
+            </a:r>
+            <a:endParaRPr lang="en-US" dirty="0"/>
           </a:p>
           <a:p>
             <a:pPr marL="742950" lvl="2" indent="-342900"/>
             <a:r>
-              <a:rPr lang="en-US" dirty="0" err="1"/>
-              <a:t>Képekkel</a:t>
-            </a:r>
-            <a:r>
-              <a:rPr lang="en-US" dirty="0"/>
+              <a:rPr lang="en-US" dirty="0" err="1" smtClean="0"/>
+              <a:t>Hatékony</a:t>
+            </a:r>
+            <a:r>
+              <a:rPr lang="en-US" dirty="0" smtClean="0"/>
               <a:t> </a:t>
             </a:r>
             <a:r>
-              <a:rPr lang="en-US" dirty="0" err="1"/>
-              <a:t>bíztatja</a:t>
-            </a:r>
-            <a:r>
-              <a:rPr lang="en-US" dirty="0"/>
-              <a:t> meg a </a:t>
-            </a:r>
-            <a:r>
-              <a:rPr lang="en-US" dirty="0" err="1"/>
-              <a:t>vásárlót</a:t>
-            </a:r>
-            <a:r>
-              <a:rPr lang="en-US" dirty="0"/>
-              <a:t>, </a:t>
-            </a:r>
-            <a:r>
-              <a:rPr lang="en-US" dirty="0" err="1"/>
-              <a:t>hogy</a:t>
-            </a:r>
-            <a:r>
-              <a:rPr lang="en-US" dirty="0"/>
+              <a:rPr lang="en-US" dirty="0" err="1" smtClean="0"/>
+              <a:t>kosár</a:t>
+            </a:r>
+            <a:r>
+              <a:rPr lang="en-US" dirty="0" smtClean="0"/>
               <a:t> </a:t>
             </a:r>
             <a:r>
-              <a:rPr lang="en-US" dirty="0" err="1"/>
-              <a:t>jó</a:t>
-            </a:r>
-            <a:r>
-              <a:rPr lang="en-US" dirty="0"/>
-              <a:t> </a:t>
-            </a:r>
-            <a:r>
-              <a:rPr lang="en-US" dirty="0" err="1"/>
-              <a:t>helyen</a:t>
-            </a:r>
-            <a:r>
-              <a:rPr lang="en-US" dirty="0"/>
-              <a:t> </a:t>
-            </a:r>
-            <a:r>
-              <a:rPr lang="en-US" dirty="0" err="1"/>
-              <a:t>jár</a:t>
-            </a:r>
-            <a:r>
-              <a:rPr lang="en-US" dirty="0"/>
-              <a:t>.</a:t>
-            </a:r>
+              <a:rPr lang="en-US" dirty="0" err="1" smtClean="0"/>
+              <a:t>rendszer</a:t>
+            </a:r>
+            <a:endParaRPr lang="en-US" dirty="0"/>
           </a:p>
           <a:p>
             <a:pPr marL="342900" lvl="1" indent="-342900">
@@ -6631,8 +6625,13 @@
           <a:p>
             <a:r>
               <a:rPr lang="hu-HU" dirty="0"/>
-              <a:t>Nekem az adatbázist kellet létrehoznom, a csapatársam által összegyűjtött adatokból.</a:t>
-            </a:r>
+              <a:t>Nekem az </a:t>
+            </a:r>
+            <a:r>
+              <a:rPr lang="hu-HU" dirty="0" smtClean="0"/>
+              <a:t>adatbázist és a backend-et kellet létrehoznom.</a:t>
+            </a:r>
+            <a:endParaRPr lang="hu-HU" dirty="0"/>
           </a:p>
         </p:txBody>
       </p:sp>
@@ -6844,32 +6843,13 @@
           <a:p>
             <a:r>
               <a:rPr lang="hu-HU" dirty="0"/>
-              <a:t>Én csináltam meg a frontendet</a:t>
-            </a:r>
-            <a:r>
-              <a:rPr lang="en-US" dirty="0"/>
-              <a:t> </a:t>
-            </a:r>
-            <a:r>
-              <a:rPr lang="en-US" dirty="0" err="1"/>
-              <a:t>és</a:t>
-            </a:r>
-            <a:r>
-              <a:rPr lang="en-US" dirty="0"/>
-              <a:t> </a:t>
-            </a:r>
-            <a:r>
-              <a:rPr lang="en-US" dirty="0" err="1"/>
-              <a:t>az</a:t>
-            </a:r>
-            <a:r>
-              <a:rPr lang="en-US" dirty="0"/>
-              <a:t> </a:t>
-            </a:r>
-            <a:r>
-              <a:rPr lang="hu-HU" dirty="0"/>
-              <a:t>.</a:t>
-            </a:r>
+              <a:t>Én csináltam meg a </a:t>
+            </a:r>
+            <a:r>
+              <a:rPr lang="hu-HU" dirty="0" smtClean="0"/>
+              <a:t>frontendet és a weboldal dizájnt.</a:t>
+            </a:r>
+            <a:endParaRPr lang="hu-HU" dirty="0"/>
           </a:p>
           <a:p>
             <a:r>
@@ -6956,24 +6936,42 @@
           <a:lstStyle/>
           <a:p>
             <a:r>
-              <a:rPr lang="hu-HU"/>
-              <a:t>Bemutatjuk a Release the Mags nevű webshopot.</a:t>
-            </a:r>
-          </a:p>
-          <a:p>
-            <a:r>
-              <a:rPr lang="hu-HU"/>
-              <a:t>Egy weboldal, ahol fegyvereket, katonai felszereléseket, járműveket és kellékeket lehet vásárolni.</a:t>
-            </a:r>
-          </a:p>
-          <a:p>
-            <a:r>
-              <a:rPr lang="hu-HU" b="1">
-                <a:solidFill>
-                  <a:srgbClr val="C00000"/>
-                </a:solidFill>
-              </a:rPr>
-              <a:t>Fegyvereket csak fegyvertartási engedéllyel lehet vásárolni és ha 18 éves elmúlt!</a:t>
+              <a:rPr lang="hu-HU" dirty="0"/>
+              <a:t>Bemutatjuk a </a:t>
+            </a:r>
+            <a:r>
+              <a:rPr lang="hu-HU" dirty="0" err="1" smtClean="0"/>
+              <a:t>Third</a:t>
+            </a:r>
+            <a:r>
+              <a:rPr lang="hu-HU" dirty="0" smtClean="0"/>
+              <a:t> </a:t>
+            </a:r>
+            <a:r>
+              <a:rPr lang="hu-HU" dirty="0" err="1" smtClean="0"/>
+              <a:t>Gear</a:t>
+            </a:r>
+            <a:r>
+              <a:rPr lang="hu-HU" dirty="0" smtClean="0"/>
+              <a:t> nevű </a:t>
+            </a:r>
+            <a:r>
+              <a:rPr lang="hu-HU" dirty="0" err="1"/>
+              <a:t>webshopot</a:t>
+            </a:r>
+            <a:r>
+              <a:rPr lang="hu-HU" dirty="0"/>
+              <a:t>.</a:t>
+            </a:r>
+          </a:p>
+          <a:p>
+            <a:r>
+              <a:rPr lang="hu-HU" dirty="0"/>
+              <a:t>Egy weboldal, ahol </a:t>
+            </a:r>
+            <a:r>
+              <a:rPr lang="hu-HU" dirty="0" smtClean="0"/>
+              <a:t>járműveket lehet vásárolni, egyszerűen és hatékonyan.</a:t>
             </a:r>
           </a:p>
         </p:txBody>
@@ -7095,10 +7093,10 @@
               <a:t>Nagy </a:t>
             </a:r>
             <a:r>
-              <a:rPr lang="en-US" dirty="0" err="1"/>
+              <a:rPr lang="en-US" dirty="0" err="1" smtClean="0"/>
               <a:t>választék</a:t>
             </a:r>
-            <a:endParaRPr lang="en-US" dirty="0"/>
+            <a:endParaRPr lang="en-US" dirty="0" smtClean="0"/>
           </a:p>
           <a:p>
             <a:pPr>
@@ -7106,16 +7104,8 @@
               <a:buChar char="-"/>
             </a:pPr>
             <a:r>
-              <a:rPr lang="en-US" dirty="0" err="1"/>
-              <a:t>kibaszott</a:t>
-            </a:r>
-            <a:r>
-              <a:rPr lang="en-US" dirty="0"/>
-              <a:t> </a:t>
-            </a:r>
-            <a:r>
-              <a:rPr lang="en-US"/>
-              <a:t>szar</a:t>
+              <a:rPr lang="en-US" dirty="0" err="1" smtClean="0"/>
+              <a:t>Felhasználó-barát</a:t>
             </a:r>
             <a:endParaRPr lang="hu-HU" dirty="0"/>
           </a:p>
@@ -7417,9 +7407,33 @@
               <a:t>rólunk</a:t>
             </a:r>
             <a:r>
-              <a:rPr lang="en-US" dirty="0"/>
+              <a:rPr lang="en-US" dirty="0" smtClean="0"/>
               <a:t>)</a:t>
             </a:r>
+          </a:p>
+          <a:p>
+            <a:pPr lvl="1"/>
+            <a:r>
+              <a:rPr lang="en-US" dirty="0" err="1" smtClean="0"/>
+              <a:t>Jármű</a:t>
+            </a:r>
+            <a:r>
+              <a:rPr lang="en-US" dirty="0" smtClean="0"/>
+              <a:t> </a:t>
+            </a:r>
+            <a:r>
+              <a:rPr lang="en-US" dirty="0" err="1" smtClean="0"/>
+              <a:t>ajánlások</a:t>
+            </a:r>
+            <a:endParaRPr lang="en-US" dirty="0" smtClean="0"/>
+          </a:p>
+          <a:p>
+            <a:pPr lvl="2"/>
+            <a:r>
+              <a:rPr lang="en-US" smtClean="0"/>
+              <a:t>Véletlenszerű</a:t>
+            </a:r>
+            <a:endParaRPr lang="en-US" dirty="0"/>
           </a:p>
           <a:p>
             <a:r>
@@ -7427,100 +7441,96 @@
               <a:t>2. </a:t>
             </a:r>
             <a:r>
-              <a:rPr lang="en-US" dirty="0" err="1"/>
-              <a:t>Termékmenü</a:t>
+              <a:rPr lang="en-US" dirty="0" err="1" smtClean="0"/>
+              <a:t>Termék</a:t>
+            </a:r>
+            <a:r>
+              <a:rPr lang="en-US" dirty="0" smtClean="0"/>
+              <a:t> </a:t>
+            </a:r>
+            <a:r>
+              <a:rPr lang="en-US" dirty="0" err="1" smtClean="0"/>
+              <a:t>oldalak</a:t>
             </a:r>
             <a:endParaRPr lang="en-US" dirty="0"/>
           </a:p>
           <a:p>
             <a:pPr lvl="1"/>
             <a:r>
-              <a:rPr lang="en-US" dirty="0" err="1"/>
-              <a:t>Fegyverkategóriák</a:t>
+              <a:rPr lang="en-US" dirty="0" err="1" smtClean="0"/>
+              <a:t>Járműkategóriák</a:t>
             </a:r>
             <a:endParaRPr lang="en-US" dirty="0"/>
           </a:p>
           <a:p>
             <a:pPr lvl="2"/>
             <a:r>
-              <a:rPr lang="en-US" dirty="0"/>
-              <a:t>5 </a:t>
-            </a:r>
-            <a:r>
-              <a:rPr lang="en-US" dirty="0" err="1"/>
+              <a:rPr lang="en-US" dirty="0" err="1" smtClean="0"/>
+              <a:t>Sok</a:t>
+            </a:r>
+            <a:r>
+              <a:rPr lang="en-US" dirty="0" smtClean="0"/>
+              <a:t> </a:t>
+            </a:r>
+            <a:r>
+              <a:rPr lang="en-US" dirty="0" err="1" smtClean="0"/>
               <a:t>fajta</a:t>
             </a:r>
             <a:r>
-              <a:rPr lang="en-US" dirty="0"/>
+              <a:rPr lang="en-US" dirty="0" smtClean="0"/>
               <a:t> </a:t>
             </a:r>
             <a:r>
-              <a:rPr lang="en-US" dirty="0" err="1"/>
-              <a:t>fegyvertípusokból</a:t>
-            </a:r>
-            <a:r>
-              <a:rPr lang="en-US" dirty="0"/>
+              <a:rPr lang="en-US" dirty="0" err="1" smtClean="0"/>
+              <a:t>járművekből</a:t>
+            </a:r>
+            <a:r>
+              <a:rPr lang="en-US" dirty="0" smtClean="0"/>
               <a:t> </a:t>
             </a:r>
             <a:r>
-              <a:rPr lang="en-US" dirty="0" err="1"/>
-              <a:t>és</a:t>
-            </a:r>
-            <a:r>
-              <a:rPr lang="en-US" dirty="0"/>
+              <a:rPr lang="en-US" dirty="0" err="1" smtClean="0"/>
+              <a:t>lehet</a:t>
+            </a:r>
+            <a:r>
+              <a:rPr lang="en-US" dirty="0" smtClean="0"/>
               <a:t> </a:t>
             </a:r>
             <a:r>
-              <a:rPr lang="en-US" dirty="0" err="1"/>
-              <a:t>gránátokból</a:t>
-            </a:r>
-            <a:r>
-              <a:rPr lang="en-US" dirty="0"/>
+              <a:rPr lang="en-US" dirty="0" err="1" smtClean="0"/>
+              <a:t>választani</a:t>
+            </a:r>
+            <a:endParaRPr lang="en-US" dirty="0"/>
+          </a:p>
+          <a:p>
+            <a:pPr lvl="1"/>
+            <a:r>
+              <a:rPr lang="en-US" dirty="0" err="1" smtClean="0"/>
+              <a:t>Jármű</a:t>
+            </a:r>
+            <a:r>
+              <a:rPr lang="en-US" dirty="0" smtClean="0"/>
               <a:t> </a:t>
             </a:r>
             <a:r>
-              <a:rPr lang="en-US" dirty="0" err="1"/>
-              <a:t>lehet</a:t>
-            </a:r>
-            <a:r>
-              <a:rPr lang="en-US" dirty="0"/>
+              <a:rPr lang="en-US" dirty="0" err="1" smtClean="0"/>
+              <a:t>keresési</a:t>
+            </a:r>
+            <a:r>
+              <a:rPr lang="en-US" dirty="0" smtClean="0"/>
               <a:t> </a:t>
             </a:r>
             <a:r>
-              <a:rPr lang="en-US" dirty="0" err="1"/>
-              <a:t>választani</a:t>
-            </a:r>
-            <a:endParaRPr lang="en-US" dirty="0"/>
+              <a:rPr lang="en-US" dirty="0" err="1" smtClean="0"/>
+              <a:t>eredmények</a:t>
+            </a:r>
+            <a:endParaRPr lang="en-US" dirty="0" smtClean="0"/>
           </a:p>
           <a:p>
             <a:pPr lvl="1"/>
             <a:r>
-              <a:rPr lang="en-US" dirty="0" err="1"/>
-              <a:t>Fegyverajánlások</a:t>
-            </a:r>
-            <a:endParaRPr lang="en-US" dirty="0"/>
-          </a:p>
-          <a:p>
-            <a:pPr lvl="2"/>
-            <a:r>
-              <a:rPr lang="en-US" dirty="0" err="1"/>
-              <a:t>Véletlenszerű</a:t>
-            </a:r>
-            <a:r>
-              <a:rPr lang="en-US" dirty="0"/>
-              <a:t> </a:t>
-            </a:r>
-            <a:r>
-              <a:rPr lang="en-US" dirty="0" err="1"/>
-              <a:t>fegyverek</a:t>
-            </a:r>
-            <a:r>
-              <a:rPr lang="en-US" dirty="0"/>
-              <a:t> </a:t>
-            </a:r>
-            <a:r>
-              <a:rPr lang="en-US" dirty="0" err="1"/>
-              <a:t>ajánlása</a:t>
+              <a:rPr lang="en-US" dirty="0" err="1" smtClean="0"/>
+              <a:t>Járművek</a:t>
             </a:r>
             <a:endParaRPr lang="en-US" dirty="0"/>
           </a:p>
@@ -7539,10 +7549,10 @@
   <a:themeElements>
     <a:clrScheme name="Dimenzió">
       <a:dk1>
-        <a:sysClr val="windowText" lastClr="000000"/>
+        <a:sysClr val="windowText" lastClr="E0E4EC"/>
       </a:dk1>
       <a:lt1>
-        <a:sysClr val="window" lastClr="FFFFFF"/>
+        <a:sysClr val="window" lastClr="191919"/>
       </a:lt1>
       <a:dk2>
         <a:srgbClr val="2C3C43"/>
@@ -7577,7 +7587,7 @@
     </a:clrScheme>
     <a:fontScheme name="Dimenzió">
       <a:majorFont>
-        <a:latin typeface="Trebuchet MS" panose="020B0603020202020204"/>
+        <a:latin typeface="Trebuchet MS"/>
         <a:ea typeface=""/>
         <a:cs typeface=""/>
         <a:font script="Jpan" typeface="メイリオ"/>
@@ -7612,7 +7622,7 @@
         <a:font script="Geor" typeface="Sylfaen"/>
       </a:majorFont>
       <a:minorFont>
-        <a:latin typeface="Trebuchet MS" panose="020B0603020202020204"/>
+        <a:latin typeface="Trebuchet MS"/>
         <a:ea typeface=""/>
         <a:cs typeface=""/>
         <a:font script="Jpan" typeface="メイリオ"/>
@@ -7785,7 +7795,7 @@
   <a:extraClrSchemeLst/>
   <a:extLst>
     <a:ext uri="{05A4C25C-085E-4340-85A3-A5531E510DB2}">
-      <thm15:themeFamily xmlns:thm15="http://schemas.microsoft.com/office/thememl/2012/main" name="Facet" id="{C0C680CD-088A-49FC-A102-D699147F32B2}" vid="{CFBC31BA-B70F-4F30-BCAA-4F3011E16C4D}"/>
+      <thm15:themeFamily xmlns="" xmlns:thm15="http://schemas.microsoft.com/office/thememl/2012/main" name="Facet" id="{C0C680CD-088A-49FC-A102-D699147F32B2}" vid="{CFBC31BA-B70F-4F30-BCAA-4F3011E16C4D}"/>
     </a:ext>
   </a:extLst>
 </a:theme>
